--- a/docs/presentation.pptx
+++ b/docs/presentation.pptx
@@ -3090,7 +3090,7 @@
     <p:bg>
       <p:bgPr>
         <a:solidFill>
-          <a:srgbClr val="14243E"/>
+          <a:srgbClr val="0D1117"/>
         </a:solidFill>
         <a:effectLst/>
       </p:bgPr>
@@ -3110,17 +3110,19 @@
         </p:nvSpPr>
         <p:spPr>
           <a:xfrm>
-            <a:off x="0" y="0"/>
-            <a:ext cx="164592" cy="6858000"/>
+            <a:off x="7909560" y="0"/>
+            <a:ext cx="4279392" cy="6858000"/>
           </a:xfrm>
           <a:prstGeom prst="rect">
             <a:avLst/>
           </a:prstGeom>
           <a:solidFill>
-            <a:srgbClr val="168F88"/>
+            <a:srgbClr val="181F2A"/>
           </a:solidFill>
           <a:ln>
-            <a:noFill/>
+            <a:solidFill>
+              <a:srgbClr val="181F2A"/>
+            </a:solidFill>
           </a:ln>
         </p:spPr>
         <p:style>
@@ -3153,8 +3155,8 @@
         </p:nvSpPr>
         <p:spPr>
           <a:xfrm>
-            <a:off x="822960" y="960120"/>
-            <a:ext cx="10058400" cy="365760"/>
+            <a:off x="731520" y="658368"/>
+            <a:ext cx="6583680" cy="320040"/>
           </a:xfrm>
           <a:prstGeom prst="rect">
             <a:avLst/>
@@ -3162,15 +3164,18 @@
           <a:noFill/>
         </p:spPr>
         <p:txBody>
-          <a:bodyPr wrap="square">
+          <a:bodyPr wrap="square" lIns="45720" rIns="45720">
             <a:spAutoFit/>
           </a:bodyPr>
           <a:lstStyle/>
           <a:p>
-            <a:pPr>
-              <a:defRPr sz="1300" b="1">
-                <a:solidFill>
-                  <a:srgbClr val="73D5CB"/>
+            <a:pPr algn="l">
+              <a:spcAft>
+                <a:spcPts val="600"/>
+              </a:spcAft>
+              <a:defRPr sz="1200" b="1">
+                <a:solidFill>
+                  <a:srgbClr val="5DE0E6"/>
                 </a:solidFill>
                 <a:latin typeface="Aptos"/>
               </a:defRPr>
@@ -3189,8 +3194,8 @@
         </p:nvSpPr>
         <p:spPr>
           <a:xfrm>
-            <a:off x="822960" y="1600200"/>
-            <a:ext cx="10058400" cy="1371600"/>
+            <a:off x="731520" y="1417320"/>
+            <a:ext cx="6675120" cy="1234440"/>
           </a:xfrm>
           <a:prstGeom prst="rect">
             <a:avLst/>
@@ -3198,15 +3203,18 @@
           <a:noFill/>
         </p:spPr>
         <p:txBody>
-          <a:bodyPr wrap="square">
+          <a:bodyPr wrap="square" lIns="45720" rIns="45720">
             <a:spAutoFit/>
           </a:bodyPr>
           <a:lstStyle/>
           <a:p>
-            <a:pPr>
-              <a:defRPr sz="4200" b="1">
-                <a:solidFill>
-                  <a:srgbClr val="FFFFFF"/>
+            <a:pPr algn="l">
+              <a:spcAft>
+                <a:spcPts val="600"/>
+              </a:spcAft>
+              <a:defRPr sz="3600" b="1">
+                <a:solidFill>
+                  <a:srgbClr val="F2F6FC"/>
                 </a:solidFill>
                 <a:latin typeface="Aptos"/>
               </a:defRPr>
@@ -3225,8 +3233,8 @@
         </p:nvSpPr>
         <p:spPr>
           <a:xfrm>
-            <a:off x="822960" y="2880360"/>
-            <a:ext cx="9875520" cy="960120"/>
+            <a:off x="749808" y="2743200"/>
+            <a:ext cx="6400800" cy="868680"/>
           </a:xfrm>
           <a:prstGeom prst="rect">
             <a:avLst/>
@@ -3234,21 +3242,24 @@
           <a:noFill/>
         </p:spPr>
         <p:txBody>
-          <a:bodyPr wrap="square">
+          <a:bodyPr wrap="square" lIns="45720" rIns="45720">
             <a:spAutoFit/>
           </a:bodyPr>
           <a:lstStyle/>
           <a:p>
-            <a:pPr>
-              <a:defRPr sz="2400" b="0">
-                <a:solidFill>
-                  <a:srgbClr val="DEE7F1"/>
-                </a:solidFill>
-                <a:latin typeface="Aptos"/>
-              </a:defRPr>
-            </a:pPr>
-            <a:r>
-              <a:t>From unstructured news and social signals to portfolio risk decisions</a:t>
+            <a:pPr algn="l">
+              <a:spcAft>
+                <a:spcPts val="600"/>
+              </a:spcAft>
+              <a:defRPr sz="2300" b="1">
+                <a:solidFill>
+                  <a:srgbClr val="63B3ED"/>
+                </a:solidFill>
+                <a:latin typeface="Aptos"/>
+              </a:defRPr>
+            </a:pPr>
+            <a:r>
+              <a:t>Financial Risk Intelligence</a:t>
             </a:r>
           </a:p>
         </p:txBody>
@@ -3261,8 +3272,8 @@
         </p:nvSpPr>
         <p:spPr>
           <a:xfrm>
-            <a:off x="822960" y="5166360"/>
-            <a:ext cx="9144000" cy="685800"/>
+            <a:off x="749808" y="3657600"/>
+            <a:ext cx="6309360" cy="914400"/>
           </a:xfrm>
           <a:prstGeom prst="rect">
             <a:avLst/>
@@ -3270,25 +3281,24 @@
           <a:noFill/>
         </p:spPr>
         <p:txBody>
-          <a:bodyPr wrap="square">
+          <a:bodyPr wrap="square" lIns="45720" rIns="45720">
             <a:spAutoFit/>
           </a:bodyPr>
           <a:lstStyle/>
           <a:p>
-            <a:pPr>
-              <a:defRPr sz="1500" b="0">
-                <a:solidFill>
-                  <a:srgbClr val="FFFFFF"/>
-                </a:solidFill>
-                <a:latin typeface="Aptos"/>
-              </a:defRPr>
-            </a:pPr>
-            <a:r>
-              <a:t>Aniket Sonawane  |  ABV-IIITM Gwalior</a:t>
-            </a:r>
-            <a:br/>
-            <a:r>
-              <a:t>Risk Engine • Index Rebalancer • Portfolio Stress Tester</a:t>
+            <a:pPr algn="l">
+              <a:spcAft>
+                <a:spcPts val="600"/>
+              </a:spcAft>
+              <a:defRPr sz="1900" b="0">
+                <a:solidFill>
+                  <a:srgbClr val="A5B1C2"/>
+                </a:solidFill>
+                <a:latin typeface="Aptos"/>
+              </a:defRPr>
+            </a:pPr>
+            <a:r>
+              <a:t>Turning unstructured news and social text into structured risk signals and portfolio decisions.</a:t>
             </a:r>
           </a:p>
         </p:txBody>
@@ -3301,8 +3311,8 @@
         </p:nvSpPr>
         <p:spPr>
           <a:xfrm>
-            <a:off x="822960" y="6428232"/>
-            <a:ext cx="10058400" cy="182880"/>
+            <a:off x="749808" y="5120640"/>
+            <a:ext cx="6400800" cy="548640"/>
           </a:xfrm>
           <a:prstGeom prst="rect">
             <a:avLst/>
@@ -3310,21 +3320,555 @@
           <a:noFill/>
         </p:spPr>
         <p:txBody>
-          <a:bodyPr wrap="square">
+          <a:bodyPr wrap="square" lIns="45720" rIns="45720">
             <a:spAutoFit/>
           </a:bodyPr>
           <a:lstStyle/>
           <a:p>
-            <a:pPr>
-              <a:defRPr sz="900" b="0">
-                <a:solidFill>
-                  <a:srgbClr val="B4C3D3"/>
-                </a:solidFill>
-                <a:latin typeface="Aptos"/>
-              </a:defRPr>
-            </a:pPr>
-            <a:r>
-              <a:t>DRAFT DECK — refresh output metrics/screenshots after the final clean run</a:t>
+            <a:pPr algn="l">
+              <a:spcAft>
+                <a:spcPts val="600"/>
+              </a:spcAft>
+              <a:defRPr sz="1600" b="1">
+                <a:solidFill>
+                  <a:srgbClr val="F2F6FC"/>
+                </a:solidFill>
+                <a:latin typeface="Aptos"/>
+              </a:defRPr>
+            </a:pPr>
+            <a:r>
+              <a:t>Aniket Sonawane  •  ABV-IIITM Gwalior</a:t>
+            </a:r>
+          </a:p>
+        </p:txBody>
+      </p:sp>
+      <p:sp>
+        <p:nvSpPr>
+          <p:cNvPr id="8" name="Rounded Rectangle 7"/>
+          <p:cNvSpPr/>
+          <p:nvPr/>
+        </p:nvSpPr>
+        <p:spPr>
+          <a:xfrm>
+            <a:off x="8366760" y="868680"/>
+            <a:ext cx="3154680" cy="841248"/>
+          </a:xfrm>
+          <a:prstGeom prst="roundRect">
+            <a:avLst/>
+          </a:prstGeom>
+          <a:solidFill>
+            <a:srgbClr val="0D1117"/>
+          </a:solidFill>
+          <a:ln>
+            <a:solidFill>
+              <a:srgbClr val="63B3ED"/>
+            </a:solidFill>
+          </a:ln>
+        </p:spPr>
+        <p:style>
+          <a:lnRef idx="1">
+            <a:schemeClr val="accent1"/>
+          </a:lnRef>
+          <a:fillRef idx="3">
+            <a:schemeClr val="accent1"/>
+          </a:fillRef>
+          <a:effectRef idx="2">
+            <a:schemeClr val="accent1"/>
+          </a:effectRef>
+          <a:fontRef idx="minor">
+            <a:schemeClr val="lt1"/>
+          </a:fontRef>
+        </p:style>
+        <p:txBody>
+          <a:bodyPr rtlCol="0" anchor="ctr"/>
+          <a:lstStyle/>
+          <a:p>
+            <a:pPr algn="ctr"/>
+          </a:p>
+        </p:txBody>
+      </p:sp>
+      <p:sp>
+        <p:nvSpPr>
+          <p:cNvPr id="9" name="TextBox 8"/>
+          <p:cNvSpPr txBox="1"/>
+          <p:nvPr/>
+        </p:nvSpPr>
+        <p:spPr>
+          <a:xfrm>
+            <a:off x="8577072" y="978407"/>
+            <a:ext cx="2743200" cy="228600"/>
+          </a:xfrm>
+          <a:prstGeom prst="rect">
+            <a:avLst/>
+          </a:prstGeom>
+          <a:noFill/>
+        </p:spPr>
+        <p:txBody>
+          <a:bodyPr wrap="square" lIns="45720" rIns="45720">
+            <a:spAutoFit/>
+          </a:bodyPr>
+          <a:lstStyle/>
+          <a:p>
+            <a:pPr algn="l">
+              <a:spcAft>
+                <a:spcPts val="600"/>
+              </a:spcAft>
+              <a:defRPr sz="1400" b="1">
+                <a:solidFill>
+                  <a:srgbClr val="63B3ED"/>
+                </a:solidFill>
+                <a:latin typeface="Aptos"/>
+              </a:defRPr>
+            </a:pPr>
+            <a:r>
+              <a:t>INGEST</a:t>
+            </a:r>
+          </a:p>
+        </p:txBody>
+      </p:sp>
+      <p:sp>
+        <p:nvSpPr>
+          <p:cNvPr id="10" name="TextBox 9"/>
+          <p:cNvSpPr txBox="1"/>
+          <p:nvPr/>
+        </p:nvSpPr>
+        <p:spPr>
+          <a:xfrm>
+            <a:off x="8577072" y="1261872"/>
+            <a:ext cx="2743200" cy="228600"/>
+          </a:xfrm>
+          <a:prstGeom prst="rect">
+            <a:avLst/>
+          </a:prstGeom>
+          <a:noFill/>
+        </p:spPr>
+        <p:txBody>
+          <a:bodyPr wrap="square" lIns="45720" rIns="45720">
+            <a:spAutoFit/>
+          </a:bodyPr>
+          <a:lstStyle/>
+          <a:p>
+            <a:pPr algn="l">
+              <a:spcAft>
+                <a:spcPts val="600"/>
+              </a:spcAft>
+              <a:defRPr sz="1200" b="0">
+                <a:solidFill>
+                  <a:srgbClr val="F2F6FC"/>
+                </a:solidFill>
+                <a:latin typeface="Aptos"/>
+              </a:defRPr>
+            </a:pPr>
+            <a:r>
+              <a:t>News + social text</a:t>
+            </a:r>
+          </a:p>
+        </p:txBody>
+      </p:sp>
+      <p:sp>
+        <p:nvSpPr>
+          <p:cNvPr id="11" name="Rounded Rectangle 10"/>
+          <p:cNvSpPr/>
+          <p:nvPr/>
+        </p:nvSpPr>
+        <p:spPr>
+          <a:xfrm>
+            <a:off x="8366760" y="2148840"/>
+            <a:ext cx="3154680" cy="841248"/>
+          </a:xfrm>
+          <a:prstGeom prst="roundRect">
+            <a:avLst/>
+          </a:prstGeom>
+          <a:solidFill>
+            <a:srgbClr val="0D1117"/>
+          </a:solidFill>
+          <a:ln>
+            <a:solidFill>
+              <a:srgbClr val="5DE0E6"/>
+            </a:solidFill>
+          </a:ln>
+        </p:spPr>
+        <p:style>
+          <a:lnRef idx="1">
+            <a:schemeClr val="accent1"/>
+          </a:lnRef>
+          <a:fillRef idx="3">
+            <a:schemeClr val="accent1"/>
+          </a:fillRef>
+          <a:effectRef idx="2">
+            <a:schemeClr val="accent1"/>
+          </a:effectRef>
+          <a:fontRef idx="minor">
+            <a:schemeClr val="lt1"/>
+          </a:fontRef>
+        </p:style>
+        <p:txBody>
+          <a:bodyPr rtlCol="0" anchor="ctr"/>
+          <a:lstStyle/>
+          <a:p>
+            <a:pPr algn="ctr"/>
+          </a:p>
+        </p:txBody>
+      </p:sp>
+      <p:sp>
+        <p:nvSpPr>
+          <p:cNvPr id="12" name="TextBox 11"/>
+          <p:cNvSpPr txBox="1"/>
+          <p:nvPr/>
+        </p:nvSpPr>
+        <p:spPr>
+          <a:xfrm>
+            <a:off x="8577072" y="2258568"/>
+            <a:ext cx="2743200" cy="228600"/>
+          </a:xfrm>
+          <a:prstGeom prst="rect">
+            <a:avLst/>
+          </a:prstGeom>
+          <a:noFill/>
+        </p:spPr>
+        <p:txBody>
+          <a:bodyPr wrap="square" lIns="45720" rIns="45720">
+            <a:spAutoFit/>
+          </a:bodyPr>
+          <a:lstStyle/>
+          <a:p>
+            <a:pPr algn="l">
+              <a:spcAft>
+                <a:spcPts val="600"/>
+              </a:spcAft>
+              <a:defRPr sz="1400" b="1">
+                <a:solidFill>
+                  <a:srgbClr val="5DE0E6"/>
+                </a:solidFill>
+                <a:latin typeface="Aptos"/>
+              </a:defRPr>
+            </a:pPr>
+            <a:r>
+              <a:t>ANALYZE</a:t>
+            </a:r>
+          </a:p>
+        </p:txBody>
+      </p:sp>
+      <p:sp>
+        <p:nvSpPr>
+          <p:cNvPr id="13" name="TextBox 12"/>
+          <p:cNvSpPr txBox="1"/>
+          <p:nvPr/>
+        </p:nvSpPr>
+        <p:spPr>
+          <a:xfrm>
+            <a:off x="8577072" y="2542032"/>
+            <a:ext cx="2743200" cy="228600"/>
+          </a:xfrm>
+          <a:prstGeom prst="rect">
+            <a:avLst/>
+          </a:prstGeom>
+          <a:noFill/>
+        </p:spPr>
+        <p:txBody>
+          <a:bodyPr wrap="square" lIns="45720" rIns="45720">
+            <a:spAutoFit/>
+          </a:bodyPr>
+          <a:lstStyle/>
+          <a:p>
+            <a:pPr algn="l">
+              <a:spcAft>
+                <a:spcPts val="600"/>
+              </a:spcAft>
+              <a:defRPr sz="1200" b="0">
+                <a:solidFill>
+                  <a:srgbClr val="F2F6FC"/>
+                </a:solidFill>
+                <a:latin typeface="Aptos"/>
+              </a:defRPr>
+            </a:pPr>
+            <a:r>
+              <a:t>Sentiment • event • impact</a:t>
+            </a:r>
+          </a:p>
+        </p:txBody>
+      </p:sp>
+      <p:sp>
+        <p:nvSpPr>
+          <p:cNvPr id="14" name="Rounded Rectangle 13"/>
+          <p:cNvSpPr/>
+          <p:nvPr/>
+        </p:nvSpPr>
+        <p:spPr>
+          <a:xfrm>
+            <a:off x="8366760" y="3429000"/>
+            <a:ext cx="3154680" cy="841248"/>
+          </a:xfrm>
+          <a:prstGeom prst="roundRect">
+            <a:avLst/>
+          </a:prstGeom>
+          <a:solidFill>
+            <a:srgbClr val="0D1117"/>
+          </a:solidFill>
+          <a:ln>
+            <a:solidFill>
+              <a:srgbClr val="FFBE5C"/>
+            </a:solidFill>
+          </a:ln>
+        </p:spPr>
+        <p:style>
+          <a:lnRef idx="1">
+            <a:schemeClr val="accent1"/>
+          </a:lnRef>
+          <a:fillRef idx="3">
+            <a:schemeClr val="accent1"/>
+          </a:fillRef>
+          <a:effectRef idx="2">
+            <a:schemeClr val="accent1"/>
+          </a:effectRef>
+          <a:fontRef idx="minor">
+            <a:schemeClr val="lt1"/>
+          </a:fontRef>
+        </p:style>
+        <p:txBody>
+          <a:bodyPr rtlCol="0" anchor="ctr"/>
+          <a:lstStyle/>
+          <a:p>
+            <a:pPr algn="ctr"/>
+          </a:p>
+        </p:txBody>
+      </p:sp>
+      <p:sp>
+        <p:nvSpPr>
+          <p:cNvPr id="15" name="TextBox 14"/>
+          <p:cNvSpPr txBox="1"/>
+          <p:nvPr/>
+        </p:nvSpPr>
+        <p:spPr>
+          <a:xfrm>
+            <a:off x="8577072" y="3538728"/>
+            <a:ext cx="2743200" cy="228600"/>
+          </a:xfrm>
+          <a:prstGeom prst="rect">
+            <a:avLst/>
+          </a:prstGeom>
+          <a:noFill/>
+        </p:spPr>
+        <p:txBody>
+          <a:bodyPr wrap="square" lIns="45720" rIns="45720">
+            <a:spAutoFit/>
+          </a:bodyPr>
+          <a:lstStyle/>
+          <a:p>
+            <a:pPr algn="l">
+              <a:spcAft>
+                <a:spcPts val="600"/>
+              </a:spcAft>
+              <a:defRPr sz="1400" b="1">
+                <a:solidFill>
+                  <a:srgbClr val="FFBE5C"/>
+                </a:solidFill>
+                <a:latin typeface="Aptos"/>
+              </a:defRPr>
+            </a:pPr>
+            <a:r>
+              <a:t>PERSIST</a:t>
+            </a:r>
+          </a:p>
+        </p:txBody>
+      </p:sp>
+      <p:sp>
+        <p:nvSpPr>
+          <p:cNvPr id="16" name="TextBox 15"/>
+          <p:cNvSpPr txBox="1"/>
+          <p:nvPr/>
+        </p:nvSpPr>
+        <p:spPr>
+          <a:xfrm>
+            <a:off x="8577072" y="3822191"/>
+            <a:ext cx="2743200" cy="228600"/>
+          </a:xfrm>
+          <a:prstGeom prst="rect">
+            <a:avLst/>
+          </a:prstGeom>
+          <a:noFill/>
+        </p:spPr>
+        <p:txBody>
+          <a:bodyPr wrap="square" lIns="45720" rIns="45720">
+            <a:spAutoFit/>
+          </a:bodyPr>
+          <a:lstStyle/>
+          <a:p>
+            <a:pPr algn="l">
+              <a:spcAft>
+                <a:spcPts val="600"/>
+              </a:spcAft>
+              <a:defRPr sz="1200" b="0">
+                <a:solidFill>
+                  <a:srgbClr val="F2F6FC"/>
+                </a:solidFill>
+                <a:latin typeface="Aptos"/>
+              </a:defRPr>
+            </a:pPr>
+            <a:r>
+              <a:t>SQLite + API</a:t>
+            </a:r>
+          </a:p>
+        </p:txBody>
+      </p:sp>
+      <p:sp>
+        <p:nvSpPr>
+          <p:cNvPr id="17" name="Rounded Rectangle 16"/>
+          <p:cNvSpPr/>
+          <p:nvPr/>
+        </p:nvSpPr>
+        <p:spPr>
+          <a:xfrm>
+            <a:off x="8366760" y="4709160"/>
+            <a:ext cx="3154680" cy="841248"/>
+          </a:xfrm>
+          <a:prstGeom prst="roundRect">
+            <a:avLst/>
+          </a:prstGeom>
+          <a:solidFill>
+            <a:srgbClr val="0D1117"/>
+          </a:solidFill>
+          <a:ln>
+            <a:solidFill>
+              <a:srgbClr val="6FDCAA"/>
+            </a:solidFill>
+          </a:ln>
+        </p:spPr>
+        <p:style>
+          <a:lnRef idx="1">
+            <a:schemeClr val="accent1"/>
+          </a:lnRef>
+          <a:fillRef idx="3">
+            <a:schemeClr val="accent1"/>
+          </a:fillRef>
+          <a:effectRef idx="2">
+            <a:schemeClr val="accent1"/>
+          </a:effectRef>
+          <a:fontRef idx="minor">
+            <a:schemeClr val="lt1"/>
+          </a:fontRef>
+        </p:style>
+        <p:txBody>
+          <a:bodyPr rtlCol="0" anchor="ctr"/>
+          <a:lstStyle/>
+          <a:p>
+            <a:pPr algn="ctr"/>
+          </a:p>
+        </p:txBody>
+      </p:sp>
+      <p:sp>
+        <p:nvSpPr>
+          <p:cNvPr id="18" name="TextBox 17"/>
+          <p:cNvSpPr txBox="1"/>
+          <p:nvPr/>
+        </p:nvSpPr>
+        <p:spPr>
+          <a:xfrm>
+            <a:off x="8577072" y="4818888"/>
+            <a:ext cx="2743200" cy="228600"/>
+          </a:xfrm>
+          <a:prstGeom prst="rect">
+            <a:avLst/>
+          </a:prstGeom>
+          <a:noFill/>
+        </p:spPr>
+        <p:txBody>
+          <a:bodyPr wrap="square" lIns="45720" rIns="45720">
+            <a:spAutoFit/>
+          </a:bodyPr>
+          <a:lstStyle/>
+          <a:p>
+            <a:pPr algn="l">
+              <a:spcAft>
+                <a:spcPts val="600"/>
+              </a:spcAft>
+              <a:defRPr sz="1400" b="1">
+                <a:solidFill>
+                  <a:srgbClr val="6FDCAA"/>
+                </a:solidFill>
+                <a:latin typeface="Aptos"/>
+              </a:defRPr>
+            </a:pPr>
+            <a:r>
+              <a:t>ACT</a:t>
+            </a:r>
+          </a:p>
+        </p:txBody>
+      </p:sp>
+      <p:sp>
+        <p:nvSpPr>
+          <p:cNvPr id="19" name="TextBox 18"/>
+          <p:cNvSpPr txBox="1"/>
+          <p:nvPr/>
+        </p:nvSpPr>
+        <p:spPr>
+          <a:xfrm>
+            <a:off x="8577072" y="5102352"/>
+            <a:ext cx="2743200" cy="228600"/>
+          </a:xfrm>
+          <a:prstGeom prst="rect">
+            <a:avLst/>
+          </a:prstGeom>
+          <a:noFill/>
+        </p:spPr>
+        <p:txBody>
+          <a:bodyPr wrap="square" lIns="45720" rIns="45720">
+            <a:spAutoFit/>
+          </a:bodyPr>
+          <a:lstStyle/>
+          <a:p>
+            <a:pPr algn="l">
+              <a:spcAft>
+                <a:spcPts val="600"/>
+              </a:spcAft>
+              <a:defRPr sz="1200" b="0">
+                <a:solidFill>
+                  <a:srgbClr val="F2F6FC"/>
+                </a:solidFill>
+                <a:latin typeface="Aptos"/>
+              </a:defRPr>
+            </a:pPr>
+            <a:r>
+              <a:t>Rebalance + stress test</a:t>
+            </a:r>
+          </a:p>
+        </p:txBody>
+      </p:sp>
+      <p:sp>
+        <p:nvSpPr>
+          <p:cNvPr id="20" name="TextBox 19"/>
+          <p:cNvSpPr txBox="1"/>
+          <p:nvPr/>
+        </p:nvSpPr>
+        <p:spPr>
+          <a:xfrm>
+            <a:off x="8458200" y="5989320"/>
+            <a:ext cx="2926080" cy="274320"/>
+          </a:xfrm>
+          <a:prstGeom prst="rect">
+            <a:avLst/>
+          </a:prstGeom>
+          <a:noFill/>
+        </p:spPr>
+        <p:txBody>
+          <a:bodyPr wrap="square" lIns="45720" rIns="45720">
+            <a:spAutoFit/>
+          </a:bodyPr>
+          <a:lstStyle/>
+          <a:p>
+            <a:pPr algn="ctr">
+              <a:spcAft>
+                <a:spcPts val="600"/>
+              </a:spcAft>
+              <a:defRPr sz="1200" b="0">
+                <a:solidFill>
+                  <a:srgbClr val="A5B1C2"/>
+                </a:solidFill>
+                <a:latin typeface="Aptos"/>
+              </a:defRPr>
+            </a:pPr>
+            <a:r>
+              <a:t>Python • FastAPI • Streamlit</a:t>
             </a:r>
           </a:p>
         </p:txBody>
@@ -3343,7 +3887,7 @@
     <p:bg>
       <p:bgPr>
         <a:solidFill>
-          <a:srgbClr val="FFFFFF"/>
+          <a:srgbClr val="0D1117"/>
         </a:solidFill>
         <a:effectLst/>
       </p:bgPr>
@@ -3357,23 +3901,103 @@
       <p:grpSpPr/>
       <p:sp>
         <p:nvSpPr>
-          <p:cNvPr id="2" name="Rectangle 1"/>
+          <p:cNvPr id="2" name="TextBox 1"/>
+          <p:cNvSpPr txBox="1"/>
+          <p:nvPr/>
+        </p:nvSpPr>
+        <p:spPr>
+          <a:xfrm>
+            <a:off x="594360" y="320040"/>
+            <a:ext cx="9875520" cy="228600"/>
+          </a:xfrm>
+          <a:prstGeom prst="rect">
+            <a:avLst/>
+          </a:prstGeom>
+          <a:noFill/>
+        </p:spPr>
+        <p:txBody>
+          <a:bodyPr wrap="square" lIns="45720" rIns="45720">
+            <a:spAutoFit/>
+          </a:bodyPr>
+          <a:lstStyle/>
+          <a:p>
+            <a:pPr algn="l">
+              <a:spcAft>
+                <a:spcPts val="600"/>
+              </a:spcAft>
+              <a:defRPr sz="1000" b="1">
+                <a:solidFill>
+                  <a:srgbClr val="5DE0E6"/>
+                </a:solidFill>
+                <a:latin typeface="Aptos"/>
+              </a:defRPr>
+            </a:pPr>
+            <a:r>
+              <a:t>01 / PROBLEM &amp; APPROACH</a:t>
+            </a:r>
+          </a:p>
+        </p:txBody>
+      </p:sp>
+      <p:sp>
+        <p:nvSpPr>
+          <p:cNvPr id="3" name="TextBox 2"/>
+          <p:cNvSpPr txBox="1"/>
+          <p:nvPr/>
+        </p:nvSpPr>
+        <p:spPr>
+          <a:xfrm>
+            <a:off x="594360" y="658368"/>
+            <a:ext cx="10972800" cy="566928"/>
+          </a:xfrm>
+          <a:prstGeom prst="rect">
+            <a:avLst/>
+          </a:prstGeom>
+          <a:noFill/>
+        </p:spPr>
+        <p:txBody>
+          <a:bodyPr wrap="square" lIns="45720" rIns="45720">
+            <a:spAutoFit/>
+          </a:bodyPr>
+          <a:lstStyle/>
+          <a:p>
+            <a:pPr algn="l">
+              <a:spcAft>
+                <a:spcPts val="600"/>
+              </a:spcAft>
+              <a:defRPr sz="2700" b="1">
+                <a:solidFill>
+                  <a:srgbClr val="F2F6FC"/>
+                </a:solidFill>
+                <a:latin typeface="Aptos"/>
+              </a:defRPr>
+            </a:pPr>
+            <a:r>
+              <a:t>One risk signal contract, two financial applications</a:t>
+            </a:r>
+          </a:p>
+        </p:txBody>
+      </p:sp>
+      <p:sp>
+        <p:nvSpPr>
+          <p:cNvPr id="4" name="Rectangle 3"/>
           <p:cNvSpPr/>
           <p:nvPr/>
         </p:nvSpPr>
         <p:spPr>
           <a:xfrm>
-            <a:off x="0" y="0"/>
-            <a:ext cx="12191695" cy="146304"/>
+            <a:off x="594360" y="1307592"/>
+            <a:ext cx="960120" cy="50292"/>
           </a:xfrm>
           <a:prstGeom prst="rect">
             <a:avLst/>
           </a:prstGeom>
           <a:solidFill>
-            <a:srgbClr val="168F88"/>
+            <a:srgbClr val="63B3ED"/>
           </a:solidFill>
           <a:ln>
-            <a:noFill/>
+            <a:solidFill>
+              <a:srgbClr val="63B3ED"/>
+            </a:solidFill>
           </a:ln>
         </p:spPr>
         <p:style>
@@ -3400,14 +4024,14 @@
       </p:sp>
       <p:sp>
         <p:nvSpPr>
-          <p:cNvPr id="3" name="TextBox 2"/>
+          <p:cNvPr id="5" name="TextBox 4"/>
           <p:cNvSpPr txBox="1"/>
           <p:nvPr/>
         </p:nvSpPr>
         <p:spPr>
           <a:xfrm>
-            <a:off x="594360" y="384048"/>
-            <a:ext cx="10972800" cy="256032"/>
+            <a:off x="11155680" y="6473952"/>
+            <a:ext cx="457200" cy="182880"/>
           </a:xfrm>
           <a:prstGeom prst="rect">
             <a:avLst/>
@@ -3415,80 +4039,49 @@
           <a:noFill/>
         </p:spPr>
         <p:txBody>
-          <a:bodyPr wrap="square">
+          <a:bodyPr wrap="square" lIns="45720" rIns="45720">
             <a:spAutoFit/>
           </a:bodyPr>
           <a:lstStyle/>
           <a:p>
-            <a:pPr>
-              <a:defRPr sz="1100" b="1">
-                <a:solidFill>
-                  <a:srgbClr val="168F88"/>
-                </a:solidFill>
-                <a:latin typeface="Aptos"/>
-              </a:defRPr>
-            </a:pPr>
-            <a:r>
-              <a:t>01 / OBJECTIVE</a:t>
-            </a:r>
-          </a:p>
-        </p:txBody>
-      </p:sp>
-      <p:sp>
-        <p:nvSpPr>
-          <p:cNvPr id="4" name="TextBox 3"/>
-          <p:cNvSpPr txBox="1"/>
-          <p:nvPr/>
-        </p:nvSpPr>
-        <p:spPr>
-          <a:xfrm>
-            <a:off x="594360" y="713232"/>
-            <a:ext cx="10972800" cy="594360"/>
-          </a:xfrm>
-          <a:prstGeom prst="rect">
-            <a:avLst/>
-          </a:prstGeom>
-          <a:noFill/>
-        </p:spPr>
-        <p:txBody>
-          <a:bodyPr wrap="square">
-            <a:spAutoFit/>
-          </a:bodyPr>
-          <a:lstStyle/>
-          <a:p>
-            <a:pPr>
-              <a:defRPr sz="3000" b="1">
-                <a:solidFill>
-                  <a:srgbClr val="14243E"/>
-                </a:solidFill>
-                <a:latin typeface="Aptos"/>
-              </a:defRPr>
-            </a:pPr>
-            <a:r>
-              <a:t>Problem &amp; approach</a:t>
-            </a:r>
-          </a:p>
-        </p:txBody>
-      </p:sp>
-      <p:sp>
-        <p:nvSpPr>
-          <p:cNvPr id="5" name="Rectangle 4"/>
+            <a:pPr algn="r">
+              <a:spcAft>
+                <a:spcPts val="600"/>
+              </a:spcAft>
+              <a:defRPr sz="1000" b="0">
+                <a:solidFill>
+                  <a:srgbClr val="A5B1C2"/>
+                </a:solidFill>
+                <a:latin typeface="Aptos"/>
+              </a:defRPr>
+            </a:pPr>
+            <a:r>
+              <a:t>2/7</a:t>
+            </a:r>
+          </a:p>
+        </p:txBody>
+      </p:sp>
+      <p:sp>
+        <p:nvSpPr>
+          <p:cNvPr id="6" name="Rounded Rectangle 5"/>
           <p:cNvSpPr/>
           <p:nvPr/>
         </p:nvSpPr>
         <p:spPr>
           <a:xfrm>
-            <a:off x="594360" y="1399032"/>
-            <a:ext cx="1005840" cy="50292"/>
-          </a:xfrm>
-          <a:prstGeom prst="rect">
+            <a:off x="640080" y="1645920"/>
+            <a:ext cx="3520440" cy="3337560"/>
+          </a:xfrm>
+          <a:prstGeom prst="roundRect">
             <a:avLst/>
           </a:prstGeom>
           <a:solidFill>
-            <a:srgbClr val="2463AA"/>
+            <a:srgbClr val="181F2A"/>
           </a:solidFill>
           <a:ln>
-            <a:noFill/>
+            <a:solidFill>
+              <a:srgbClr val="181F2A"/>
+            </a:solidFill>
           </a:ln>
         </p:spPr>
         <p:style>
@@ -3515,96 +4108,24 @@
       </p:sp>
       <p:sp>
         <p:nvSpPr>
-          <p:cNvPr id="6" name="TextBox 5"/>
-          <p:cNvSpPr txBox="1"/>
-          <p:nvPr/>
-        </p:nvSpPr>
-        <p:spPr>
-          <a:xfrm>
-            <a:off x="594360" y="6510528"/>
-            <a:ext cx="10058400" cy="182880"/>
-          </a:xfrm>
-          <a:prstGeom prst="rect">
-            <a:avLst/>
-          </a:prstGeom>
-          <a:noFill/>
-        </p:spPr>
-        <p:txBody>
-          <a:bodyPr wrap="square">
-            <a:spAutoFit/>
-          </a:bodyPr>
-          <a:lstStyle/>
-          <a:p>
-            <a:pPr>
-              <a:defRPr sz="800" b="1">
-                <a:solidFill>
-                  <a:srgbClr val="5F6C7B"/>
-                </a:solidFill>
-                <a:latin typeface="Aptos"/>
-              </a:defRPr>
-            </a:pPr>
-            <a:r>
-              <a:t>CODE TO CONNECT  •  S&amp;P GLOBAL &amp; CRISIL CAMPUS HACKATHON</a:t>
-            </a:r>
-          </a:p>
-        </p:txBody>
-      </p:sp>
-      <p:sp>
-        <p:nvSpPr>
-          <p:cNvPr id="7" name="TextBox 6"/>
-          <p:cNvSpPr txBox="1"/>
-          <p:nvPr/>
-        </p:nvSpPr>
-        <p:spPr>
-          <a:xfrm>
-            <a:off x="10972800" y="6473952"/>
-            <a:ext cx="594360" cy="228600"/>
-          </a:xfrm>
-          <a:prstGeom prst="rect">
-            <a:avLst/>
-          </a:prstGeom>
-          <a:noFill/>
-        </p:spPr>
-        <p:txBody>
-          <a:bodyPr wrap="square">
-            <a:spAutoFit/>
-          </a:bodyPr>
-          <a:lstStyle/>
-          <a:p>
-            <a:pPr>
-              <a:defRPr sz="900" b="0">
-                <a:solidFill>
-                  <a:srgbClr val="5F6C7B"/>
-                </a:solidFill>
-                <a:latin typeface="Aptos"/>
-              </a:defRPr>
-            </a:pPr>
-            <a:r>
-              <a:t>2</a:t>
-            </a:r>
-          </a:p>
-        </p:txBody>
-      </p:sp>
-      <p:sp>
-        <p:nvSpPr>
-          <p:cNvPr id="8" name="Rounded Rectangle 7"/>
+          <p:cNvPr id="7" name="Rectangle 6"/>
           <p:cNvSpPr/>
           <p:nvPr/>
         </p:nvSpPr>
         <p:spPr>
           <a:xfrm>
-            <a:off x="685800" y="1737360"/>
-            <a:ext cx="3474720" cy="1920240"/>
-          </a:xfrm>
-          <a:prstGeom prst="roundRect">
+            <a:off x="640080" y="1645920"/>
+            <a:ext cx="64008" cy="3337560"/>
+          </a:xfrm>
+          <a:prstGeom prst="rect">
             <a:avLst/>
           </a:prstGeom>
           <a:solidFill>
-            <a:srgbClr val="F2F6FA"/>
+            <a:srgbClr val="63B3ED"/>
           </a:solidFill>
           <a:ln>
             <a:solidFill>
-              <a:srgbClr val="DEE6EF"/>
+              <a:srgbClr val="63B3ED"/>
             </a:solidFill>
           </a:ln>
         </p:spPr>
@@ -3632,23 +4153,132 @@
       </p:sp>
       <p:sp>
         <p:nvSpPr>
-          <p:cNvPr id="9" name="Rectangle 8"/>
+          <p:cNvPr id="8" name="TextBox 7"/>
+          <p:cNvSpPr txBox="1"/>
+          <p:nvPr/>
+        </p:nvSpPr>
+        <p:spPr>
+          <a:xfrm>
+            <a:off x="841247" y="1810512"/>
+            <a:ext cx="3154680" cy="329184"/>
+          </a:xfrm>
+          <a:prstGeom prst="rect">
+            <a:avLst/>
+          </a:prstGeom>
+          <a:noFill/>
+        </p:spPr>
+        <p:txBody>
+          <a:bodyPr wrap="square" lIns="45720" rIns="45720">
+            <a:spAutoFit/>
+          </a:bodyPr>
+          <a:lstStyle/>
+          <a:p>
+            <a:pPr algn="l">
+              <a:spcAft>
+                <a:spcPts val="600"/>
+              </a:spcAft>
+              <a:defRPr sz="1700" b="1">
+                <a:solidFill>
+                  <a:srgbClr val="F2F6FC"/>
+                </a:solidFill>
+                <a:latin typeface="Aptos"/>
+              </a:defRPr>
+            </a:pPr>
+            <a:r>
+              <a:t>The problem</a:t>
+            </a:r>
+          </a:p>
+        </p:txBody>
+      </p:sp>
+      <p:sp>
+        <p:nvSpPr>
+          <p:cNvPr id="9" name="TextBox 8"/>
+          <p:cNvSpPr txBox="1"/>
+          <p:nvPr/>
+        </p:nvSpPr>
+        <p:spPr>
+          <a:xfrm>
+            <a:off x="841247" y="2240280"/>
+            <a:ext cx="3136392" cy="2624328"/>
+          </a:xfrm>
+          <a:prstGeom prst="rect">
+            <a:avLst/>
+          </a:prstGeom>
+          <a:noFill/>
+        </p:spPr>
+        <p:txBody>
+          <a:bodyPr wrap="square" lIns="45720" rIns="45720">
+            <a:spAutoFit/>
+          </a:bodyPr>
+          <a:lstStyle/>
+          <a:p>
+            <a:pPr algn="l">
+              <a:spcAft>
+                <a:spcPts val="600"/>
+              </a:spcAft>
+              <a:defRPr sz="1500" b="0">
+                <a:solidFill>
+                  <a:srgbClr val="A5B1C2"/>
+                </a:solidFill>
+                <a:latin typeface="Aptos"/>
+              </a:defRPr>
+            </a:pPr>
+            <a:r>
+              <a:t>News and social posts are unstructured, fast-moving, and hard for downstream systems to use consistently.</a:t>
+            </a:r>
+          </a:p>
+          <a:p>
+            <a:pPr algn="l">
+              <a:spcAft>
+                <a:spcPts val="600"/>
+              </a:spcAft>
+              <a:defRPr sz="1500" b="0">
+                <a:solidFill>
+                  <a:srgbClr val="A5B1C2"/>
+                </a:solidFill>
+                <a:latin typeface="Aptos"/>
+              </a:defRPr>
+            </a:pPr>
+          </a:p>
+          <a:p>
+            <a:pPr algn="l">
+              <a:spcAft>
+                <a:spcPts val="600"/>
+              </a:spcAft>
+              <a:defRPr sz="1500" b="0">
+                <a:solidFill>
+                  <a:srgbClr val="A5B1C2"/>
+                </a:solidFill>
+                <a:latin typeface="Aptos"/>
+              </a:defRPr>
+            </a:pPr>
+            <a:r>
+              <a:t>Important event details can be lost between text, risk interpretation and portfolio action.</a:t>
+            </a:r>
+          </a:p>
+        </p:txBody>
+      </p:sp>
+      <p:sp>
+        <p:nvSpPr>
+          <p:cNvPr id="10" name="Rounded Rectangle 9"/>
           <p:cNvSpPr/>
           <p:nvPr/>
         </p:nvSpPr>
         <p:spPr>
           <a:xfrm>
-            <a:off x="685800" y="1737360"/>
-            <a:ext cx="73152" cy="1920240"/>
-          </a:xfrm>
-          <a:prstGeom prst="rect">
+            <a:off x="4343400" y="1645920"/>
+            <a:ext cx="3520440" cy="3337560"/>
+          </a:xfrm>
+          <a:prstGeom prst="roundRect">
             <a:avLst/>
           </a:prstGeom>
           <a:solidFill>
-            <a:srgbClr val="2463AA"/>
+            <a:srgbClr val="181F2A"/>
           </a:solidFill>
           <a:ln>
-            <a:noFill/>
+            <a:solidFill>
+              <a:srgbClr val="181F2A"/>
+            </a:solidFill>
           </a:ln>
         </p:spPr>
         <p:style>
@@ -3675,96 +4305,24 @@
       </p:sp>
       <p:sp>
         <p:nvSpPr>
-          <p:cNvPr id="10" name="TextBox 9"/>
-          <p:cNvSpPr txBox="1"/>
-          <p:nvPr/>
-        </p:nvSpPr>
-        <p:spPr>
-          <a:xfrm>
-            <a:off x="886968" y="1901952"/>
-            <a:ext cx="3108960" cy="384048"/>
-          </a:xfrm>
-          <a:prstGeom prst="rect">
-            <a:avLst/>
-          </a:prstGeom>
-          <a:noFill/>
-        </p:spPr>
-        <p:txBody>
-          <a:bodyPr wrap="square">
-            <a:spAutoFit/>
-          </a:bodyPr>
-          <a:lstStyle/>
-          <a:p>
-            <a:pPr>
-              <a:defRPr sz="1700" b="1">
-                <a:solidFill>
-                  <a:srgbClr val="14243E"/>
-                </a:solidFill>
-                <a:latin typeface="Aptos"/>
-              </a:defRPr>
-            </a:pPr>
-            <a:r>
-              <a:t>The problem</a:t>
-            </a:r>
-          </a:p>
-        </p:txBody>
-      </p:sp>
-      <p:sp>
-        <p:nvSpPr>
-          <p:cNvPr id="11" name="TextBox 10"/>
-          <p:cNvSpPr txBox="1"/>
-          <p:nvPr/>
-        </p:nvSpPr>
-        <p:spPr>
-          <a:xfrm>
-            <a:off x="886968" y="2395728"/>
-            <a:ext cx="3108960" cy="1188720"/>
-          </a:xfrm>
-          <a:prstGeom prst="rect">
-            <a:avLst/>
-          </a:prstGeom>
-          <a:noFill/>
-        </p:spPr>
-        <p:txBody>
-          <a:bodyPr wrap="square">
-            <a:spAutoFit/>
-          </a:bodyPr>
-          <a:lstStyle/>
-          <a:p>
-            <a:pPr>
-              <a:defRPr sz="1300" b="0">
-                <a:solidFill>
-                  <a:srgbClr val="2A3441"/>
-                </a:solidFill>
-                <a:latin typeface="Aptos"/>
-              </a:defRPr>
-            </a:pPr>
-            <a:r>
-              <a:t>News and social posts are unstructured, fast-moving, and difficult to translate into consistent risk signals.</a:t>
-            </a:r>
-          </a:p>
-        </p:txBody>
-      </p:sp>
-      <p:sp>
-        <p:nvSpPr>
-          <p:cNvPr id="12" name="Rounded Rectangle 11"/>
+          <p:cNvPr id="11" name="Rectangle 10"/>
           <p:cNvSpPr/>
           <p:nvPr/>
         </p:nvSpPr>
         <p:spPr>
           <a:xfrm>
-            <a:off x="4370832" y="1737360"/>
-            <a:ext cx="3474720" cy="1920240"/>
-          </a:xfrm>
-          <a:prstGeom prst="roundRect">
+            <a:off x="4343400" y="1645920"/>
+            <a:ext cx="64008" cy="3337560"/>
+          </a:xfrm>
+          <a:prstGeom prst="rect">
             <a:avLst/>
           </a:prstGeom>
           <a:solidFill>
-            <a:srgbClr val="F2F6FA"/>
+            <a:srgbClr val="5DE0E6"/>
           </a:solidFill>
           <a:ln>
             <a:solidFill>
-              <a:srgbClr val="DEE6EF"/>
+              <a:srgbClr val="5DE0E6"/>
             </a:solidFill>
           </a:ln>
         </p:spPr>
@@ -3792,23 +4350,132 @@
       </p:sp>
       <p:sp>
         <p:nvSpPr>
-          <p:cNvPr id="13" name="Rectangle 12"/>
+          <p:cNvPr id="12" name="TextBox 11"/>
+          <p:cNvSpPr txBox="1"/>
+          <p:nvPr/>
+        </p:nvSpPr>
+        <p:spPr>
+          <a:xfrm>
+            <a:off x="4544568" y="1810512"/>
+            <a:ext cx="3154680" cy="329184"/>
+          </a:xfrm>
+          <a:prstGeom prst="rect">
+            <a:avLst/>
+          </a:prstGeom>
+          <a:noFill/>
+        </p:spPr>
+        <p:txBody>
+          <a:bodyPr wrap="square" lIns="45720" rIns="45720">
+            <a:spAutoFit/>
+          </a:bodyPr>
+          <a:lstStyle/>
+          <a:p>
+            <a:pPr algn="l">
+              <a:spcAft>
+                <a:spcPts val="600"/>
+              </a:spcAft>
+              <a:defRPr sz="1700" b="1">
+                <a:solidFill>
+                  <a:srgbClr val="F2F6FC"/>
+                </a:solidFill>
+                <a:latin typeface="Aptos"/>
+              </a:defRPr>
+            </a:pPr>
+            <a:r>
+              <a:t>The engine</a:t>
+            </a:r>
+          </a:p>
+        </p:txBody>
+      </p:sp>
+      <p:sp>
+        <p:nvSpPr>
+          <p:cNvPr id="13" name="TextBox 12"/>
+          <p:cNvSpPr txBox="1"/>
+          <p:nvPr/>
+        </p:nvSpPr>
+        <p:spPr>
+          <a:xfrm>
+            <a:off x="4544568" y="2240280"/>
+            <a:ext cx="3136392" cy="2624328"/>
+          </a:xfrm>
+          <a:prstGeom prst="rect">
+            <a:avLst/>
+          </a:prstGeom>
+          <a:noFill/>
+        </p:spPr>
+        <p:txBody>
+          <a:bodyPr wrap="square" lIns="45720" rIns="45720">
+            <a:spAutoFit/>
+          </a:bodyPr>
+          <a:lstStyle/>
+          <a:p>
+            <a:pPr algn="l">
+              <a:spcAft>
+                <a:spcPts val="600"/>
+              </a:spcAft>
+              <a:defRPr sz="1500" b="0">
+                <a:solidFill>
+                  <a:srgbClr val="A5B1C2"/>
+                </a:solidFill>
+                <a:latin typeface="Aptos"/>
+              </a:defRPr>
+            </a:pPr>
+            <a:r>
+              <a:t>Normalize timestamped documents; link entities conservatively; score sentiment; classify event type; estimate impact and confidence.</a:t>
+            </a:r>
+          </a:p>
+          <a:p>
+            <a:pPr algn="l">
+              <a:spcAft>
+                <a:spcPts val="600"/>
+              </a:spcAft>
+              <a:defRPr sz="1500" b="0">
+                <a:solidFill>
+                  <a:srgbClr val="A5B1C2"/>
+                </a:solidFill>
+                <a:latin typeface="Aptos"/>
+              </a:defRPr>
+            </a:pPr>
+          </a:p>
+          <a:p>
+            <a:pPr algn="l">
+              <a:spcAft>
+                <a:spcPts val="600"/>
+              </a:spcAft>
+              <a:defRPr sz="1500" b="0">
+                <a:solidFill>
+                  <a:srgbClr val="A5B1C2"/>
+                </a:solidFill>
+                <a:latin typeface="Aptos"/>
+              </a:defRPr>
+            </a:pPr>
+            <a:r>
+              <a:t>Store each result as a validated, machine-readable signal.</a:t>
+            </a:r>
+          </a:p>
+        </p:txBody>
+      </p:sp>
+      <p:sp>
+        <p:nvSpPr>
+          <p:cNvPr id="14" name="Rounded Rectangle 13"/>
           <p:cNvSpPr/>
           <p:nvPr/>
         </p:nvSpPr>
         <p:spPr>
           <a:xfrm>
-            <a:off x="4370832" y="1737360"/>
-            <a:ext cx="73152" cy="1920240"/>
-          </a:xfrm>
-          <a:prstGeom prst="rect">
+            <a:off x="8046720" y="1645920"/>
+            <a:ext cx="3520440" cy="3337560"/>
+          </a:xfrm>
+          <a:prstGeom prst="roundRect">
             <a:avLst/>
           </a:prstGeom>
           <a:solidFill>
-            <a:srgbClr val="168F88"/>
+            <a:srgbClr val="181F2A"/>
           </a:solidFill>
           <a:ln>
-            <a:noFill/>
+            <a:solidFill>
+              <a:srgbClr val="181F2A"/>
+            </a:solidFill>
           </a:ln>
         </p:spPr>
         <p:style>
@@ -3835,96 +4502,24 @@
       </p:sp>
       <p:sp>
         <p:nvSpPr>
-          <p:cNvPr id="14" name="TextBox 13"/>
-          <p:cNvSpPr txBox="1"/>
-          <p:nvPr/>
-        </p:nvSpPr>
-        <p:spPr>
-          <a:xfrm>
-            <a:off x="4572000" y="1901952"/>
-            <a:ext cx="3108960" cy="384048"/>
-          </a:xfrm>
-          <a:prstGeom prst="rect">
-            <a:avLst/>
-          </a:prstGeom>
-          <a:noFill/>
-        </p:spPr>
-        <p:txBody>
-          <a:bodyPr wrap="square">
-            <a:spAutoFit/>
-          </a:bodyPr>
-          <a:lstStyle/>
-          <a:p>
-            <a:pPr>
-              <a:defRPr sz="1700" b="1">
-                <a:solidFill>
-                  <a:srgbClr val="14243E"/>
-                </a:solidFill>
-                <a:latin typeface="Aptos"/>
-              </a:defRPr>
-            </a:pPr>
-            <a:r>
-              <a:t>The engine</a:t>
-            </a:r>
-          </a:p>
-        </p:txBody>
-      </p:sp>
-      <p:sp>
-        <p:nvSpPr>
-          <p:cNvPr id="15" name="TextBox 14"/>
-          <p:cNvSpPr txBox="1"/>
-          <p:nvPr/>
-        </p:nvSpPr>
-        <p:spPr>
-          <a:xfrm>
-            <a:off x="4572000" y="2395728"/>
-            <a:ext cx="3108960" cy="1188720"/>
-          </a:xfrm>
-          <a:prstGeom prst="rect">
-            <a:avLst/>
-          </a:prstGeom>
-          <a:noFill/>
-        </p:spPr>
-        <p:txBody>
-          <a:bodyPr wrap="square">
-            <a:spAutoFit/>
-          </a:bodyPr>
-          <a:lstStyle/>
-          <a:p>
-            <a:pPr>
-              <a:defRPr sz="1300" b="0">
-                <a:solidFill>
-                  <a:srgbClr val="2A3441"/>
-                </a:solidFill>
-                <a:latin typeface="Aptos"/>
-              </a:defRPr>
-            </a:pPr>
-            <a:r>
-              <a:t>Normalize documents and emit structured ticker/scope signals with sentiment, event type, impact, confidence, and rationale.</a:t>
-            </a:r>
-          </a:p>
-        </p:txBody>
-      </p:sp>
-      <p:sp>
-        <p:nvSpPr>
-          <p:cNvPr id="16" name="Rounded Rectangle 15"/>
+          <p:cNvPr id="15" name="Rectangle 14"/>
           <p:cNvSpPr/>
           <p:nvPr/>
         </p:nvSpPr>
         <p:spPr>
           <a:xfrm>
-            <a:off x="8046720" y="1737360"/>
-            <a:ext cx="3474720" cy="1920240"/>
-          </a:xfrm>
-          <a:prstGeom prst="roundRect">
+            <a:off x="8046720" y="1645920"/>
+            <a:ext cx="64008" cy="3337560"/>
+          </a:xfrm>
+          <a:prstGeom prst="rect">
             <a:avLst/>
           </a:prstGeom>
           <a:solidFill>
-            <a:srgbClr val="F2F6FA"/>
+            <a:srgbClr val="6FDCAA"/>
           </a:solidFill>
           <a:ln>
             <a:solidFill>
-              <a:srgbClr val="DEE6EF"/>
+              <a:srgbClr val="6FDCAA"/>
             </a:solidFill>
           </a:ln>
         </p:spPr>
@@ -3952,44 +4547,108 @@
       </p:sp>
       <p:sp>
         <p:nvSpPr>
-          <p:cNvPr id="17" name="Rectangle 16"/>
-          <p:cNvSpPr/>
-          <p:nvPr/>
-        </p:nvSpPr>
-        <p:spPr>
-          <a:xfrm>
-            <a:off x="8046720" y="1737360"/>
-            <a:ext cx="73152" cy="1920240"/>
-          </a:xfrm>
-          <a:prstGeom prst="rect">
-            <a:avLst/>
-          </a:prstGeom>
-          <a:solidFill>
-            <a:srgbClr val="C67E20"/>
-          </a:solidFill>
-          <a:ln>
-            <a:noFill/>
-          </a:ln>
-        </p:spPr>
-        <p:style>
-          <a:lnRef idx="1">
-            <a:schemeClr val="accent1"/>
-          </a:lnRef>
-          <a:fillRef idx="3">
-            <a:schemeClr val="accent1"/>
-          </a:fillRef>
-          <a:effectRef idx="2">
-            <a:schemeClr val="accent1"/>
-          </a:effectRef>
-          <a:fontRef idx="minor">
-            <a:schemeClr val="lt1"/>
-          </a:fontRef>
-        </p:style>
-        <p:txBody>
-          <a:bodyPr rtlCol="0" anchor="ctr"/>
-          <a:lstStyle/>
-          <a:p>
-            <a:pPr algn="ctr"/>
+          <p:cNvPr id="16" name="TextBox 15"/>
+          <p:cNvSpPr txBox="1"/>
+          <p:nvPr/>
+        </p:nvSpPr>
+        <p:spPr>
+          <a:xfrm>
+            <a:off x="8247888" y="1810512"/>
+            <a:ext cx="3154680" cy="329184"/>
+          </a:xfrm>
+          <a:prstGeom prst="rect">
+            <a:avLst/>
+          </a:prstGeom>
+          <a:noFill/>
+        </p:spPr>
+        <p:txBody>
+          <a:bodyPr wrap="square" lIns="45720" rIns="45720">
+            <a:spAutoFit/>
+          </a:bodyPr>
+          <a:lstStyle/>
+          <a:p>
+            <a:pPr algn="l">
+              <a:spcAft>
+                <a:spcPts val="600"/>
+              </a:spcAft>
+              <a:defRPr sz="1700" b="1">
+                <a:solidFill>
+                  <a:srgbClr val="F2F6FC"/>
+                </a:solidFill>
+                <a:latin typeface="Aptos"/>
+              </a:defRPr>
+            </a:pPr>
+            <a:r>
+              <a:t>The applications</a:t>
+            </a:r>
+          </a:p>
+        </p:txBody>
+      </p:sp>
+      <p:sp>
+        <p:nvSpPr>
+          <p:cNvPr id="17" name="TextBox 16"/>
+          <p:cNvSpPr txBox="1"/>
+          <p:nvPr/>
+        </p:nvSpPr>
+        <p:spPr>
+          <a:xfrm>
+            <a:off x="8247888" y="2240280"/>
+            <a:ext cx="3136392" cy="2624328"/>
+          </a:xfrm>
+          <a:prstGeom prst="rect">
+            <a:avLst/>
+          </a:prstGeom>
+          <a:noFill/>
+        </p:spPr>
+        <p:txBody>
+          <a:bodyPr wrap="square" lIns="45720" rIns="45720">
+            <a:spAutoFit/>
+          </a:bodyPr>
+          <a:lstStyle/>
+          <a:p>
+            <a:pPr algn="l">
+              <a:spcAft>
+                <a:spcPts val="600"/>
+              </a:spcAft>
+              <a:defRPr sz="1500" b="0">
+                <a:solidFill>
+                  <a:srgbClr val="A5B1C2"/>
+                </a:solidFill>
+                <a:latin typeface="Aptos"/>
+              </a:defRPr>
+            </a:pPr>
+            <a:r>
+              <a:t>Module A uses company-level sentiment for a constrained 16-stock historical rebalancing simulation.</a:t>
+            </a:r>
+          </a:p>
+          <a:p>
+            <a:pPr algn="l">
+              <a:spcAft>
+                <a:spcPts val="600"/>
+              </a:spcAft>
+              <a:defRPr sz="1500" b="0">
+                <a:solidFill>
+                  <a:srgbClr val="A5B1C2"/>
+                </a:solidFill>
+                <a:latin typeface="Aptos"/>
+              </a:defRPr>
+            </a:pPr>
+          </a:p>
+          <a:p>
+            <a:pPr algn="l">
+              <a:spcAft>
+                <a:spcPts val="600"/>
+              </a:spcAft>
+              <a:defRPr sz="1500" b="0">
+                <a:solidFill>
+                  <a:srgbClr val="A5B1C2"/>
+                </a:solidFill>
+                <a:latin typeface="Aptos"/>
+              </a:defRPr>
+            </a:pPr>
+            <a:r>
+              <a:t>Module B uses actual stored risk events to stress a synthetic loans/bonds/derivatives portfolio.</a:t>
+            </a:r>
           </a:p>
         </p:txBody>
       </p:sp>
@@ -4001,8 +4660,8 @@
         </p:nvSpPr>
         <p:spPr>
           <a:xfrm>
-            <a:off x="8247888" y="1901952"/>
-            <a:ext cx="3108960" cy="384048"/>
+            <a:off x="777240" y="5532120"/>
+            <a:ext cx="10789920" cy="502920"/>
           </a:xfrm>
           <a:prstGeom prst="rect">
             <a:avLst/>
@@ -4010,112 +4669,24 @@
           <a:noFill/>
         </p:spPr>
         <p:txBody>
-          <a:bodyPr wrap="square">
+          <a:bodyPr wrap="square" lIns="45720" rIns="45720">
             <a:spAutoFit/>
           </a:bodyPr>
           <a:lstStyle/>
           <a:p>
-            <a:pPr>
-              <a:defRPr sz="1700" b="1">
-                <a:solidFill>
-                  <a:srgbClr val="14243E"/>
-                </a:solidFill>
-                <a:latin typeface="Aptos"/>
-              </a:defRPr>
-            </a:pPr>
-            <a:r>
-              <a:t>The decisions</a:t>
-            </a:r>
-          </a:p>
-        </p:txBody>
-      </p:sp>
-      <p:sp>
-        <p:nvSpPr>
-          <p:cNvPr id="19" name="TextBox 18"/>
-          <p:cNvSpPr txBox="1"/>
-          <p:nvPr/>
-        </p:nvSpPr>
-        <p:spPr>
-          <a:xfrm>
-            <a:off x="8247888" y="2395728"/>
-            <a:ext cx="3108960" cy="1188720"/>
-          </a:xfrm>
-          <a:prstGeom prst="rect">
-            <a:avLst/>
-          </a:prstGeom>
-          <a:noFill/>
-        </p:spPr>
-        <p:txBody>
-          <a:bodyPr wrap="square">
-            <a:spAutoFit/>
-          </a:bodyPr>
-          <a:lstStyle/>
-          <a:p>
-            <a:pPr>
-              <a:defRPr sz="1300" b="0">
-                <a:solidFill>
-                  <a:srgbClr val="2A3441"/>
-                </a:solidFill>
-                <a:latin typeface="Aptos"/>
-              </a:defRPr>
-            </a:pPr>
-            <a:r>
-              <a:t>Use signals to tilt index weights within risk controls and stress a synthetic wholesale portfolio after high-impact events.</a:t>
-            </a:r>
-          </a:p>
-        </p:txBody>
-      </p:sp>
-      <p:sp>
-        <p:nvSpPr>
-          <p:cNvPr id="20" name="TextBox 19"/>
-          <p:cNvSpPr txBox="1"/>
-          <p:nvPr/>
-        </p:nvSpPr>
-        <p:spPr>
-          <a:xfrm>
-            <a:off x="822960" y="4160520"/>
-            <a:ext cx="10607040" cy="1463040"/>
-          </a:xfrm>
-          <a:prstGeom prst="rect">
-            <a:avLst/>
-          </a:prstGeom>
-          <a:noFill/>
-        </p:spPr>
-        <p:txBody>
-          <a:bodyPr wrap="square">
-            <a:spAutoFit/>
-          </a:bodyPr>
-          <a:lstStyle/>
-          <a:p>
-            <a:pPr>
-              <a:spcAft>
-                <a:spcPts val="1700"/>
-              </a:spcAft>
-              <a:defRPr sz="1800">
-                <a:solidFill>
-                  <a:srgbClr val="2A3441"/>
-                </a:solidFill>
-                <a:latin typeface="Aptos"/>
-              </a:defRPr>
-            </a:pPr>
-            <a:r>
-              <a:t>•  Common signal contract lets downstream modules reuse the same risk intelligence.</a:t>
-            </a:r>
-          </a:p>
-          <a:p>
-            <a:pPr>
-              <a:spcAft>
-                <a:spcPts val="1700"/>
-              </a:spcAft>
-              <a:defRPr sz="1800">
-                <a:solidFill>
-                  <a:srgbClr val="2A3441"/>
-                </a:solidFill>
-                <a:latin typeface="Aptos"/>
-              </a:defRPr>
-            </a:pPr>
-            <a:r>
-              <a:t>•  SQLite stores the signal history; FastAPI provides endpoints; Streamlit provides the interactive demo.</a:t>
+            <a:pPr algn="ctr">
+              <a:spcAft>
+                <a:spcPts val="600"/>
+              </a:spcAft>
+              <a:defRPr sz="1500" b="1">
+                <a:solidFill>
+                  <a:srgbClr val="F2F6FC"/>
+                </a:solidFill>
+                <a:latin typeface="Aptos"/>
+              </a:defRPr>
+            </a:pPr>
+            <a:r>
+              <a:t>Shared fields: ticker / scope • sentiment [-1, +1] • event type • impact [1, 10] • confidence • source • timestamp</a:t>
             </a:r>
           </a:p>
         </p:txBody>
@@ -4134,7 +4705,7 @@
     <p:bg>
       <p:bgPr>
         <a:solidFill>
-          <a:srgbClr val="FFFFFF"/>
+          <a:srgbClr val="0D1117"/>
         </a:solidFill>
         <a:effectLst/>
       </p:bgPr>
@@ -4148,23 +4719,103 @@
       <p:grpSpPr/>
       <p:sp>
         <p:nvSpPr>
-          <p:cNvPr id="2" name="Rectangle 1"/>
+          <p:cNvPr id="2" name="TextBox 1"/>
+          <p:cNvSpPr txBox="1"/>
+          <p:nvPr/>
+        </p:nvSpPr>
+        <p:spPr>
+          <a:xfrm>
+            <a:off x="594360" y="320040"/>
+            <a:ext cx="9875520" cy="228600"/>
+          </a:xfrm>
+          <a:prstGeom prst="rect">
+            <a:avLst/>
+          </a:prstGeom>
+          <a:noFill/>
+        </p:spPr>
+        <p:txBody>
+          <a:bodyPr wrap="square" lIns="45720" rIns="45720">
+            <a:spAutoFit/>
+          </a:bodyPr>
+          <a:lstStyle/>
+          <a:p>
+            <a:pPr algn="l">
+              <a:spcAft>
+                <a:spcPts val="600"/>
+              </a:spcAft>
+              <a:defRPr sz="1000" b="1">
+                <a:solidFill>
+                  <a:srgbClr val="5DE0E6"/>
+                </a:solidFill>
+                <a:latin typeface="Aptos"/>
+              </a:defRPr>
+            </a:pPr>
+            <a:r>
+              <a:t>02 / SYSTEM DESIGN</a:t>
+            </a:r>
+          </a:p>
+        </p:txBody>
+      </p:sp>
+      <p:sp>
+        <p:nvSpPr>
+          <p:cNvPr id="3" name="TextBox 2"/>
+          <p:cNvSpPr txBox="1"/>
+          <p:nvPr/>
+        </p:nvSpPr>
+        <p:spPr>
+          <a:xfrm>
+            <a:off x="594360" y="658368"/>
+            <a:ext cx="10972800" cy="566928"/>
+          </a:xfrm>
+          <a:prstGeom prst="rect">
+            <a:avLst/>
+          </a:prstGeom>
+          <a:noFill/>
+        </p:spPr>
+        <p:txBody>
+          <a:bodyPr wrap="square" lIns="45720" rIns="45720">
+            <a:spAutoFit/>
+          </a:bodyPr>
+          <a:lstStyle/>
+          <a:p>
+            <a:pPr algn="l">
+              <a:spcAft>
+                <a:spcPts val="600"/>
+              </a:spcAft>
+              <a:defRPr sz="2700" b="1">
+                <a:solidFill>
+                  <a:srgbClr val="F2F6FC"/>
+                </a:solidFill>
+                <a:latin typeface="Aptos"/>
+              </a:defRPr>
+            </a:pPr>
+            <a:r>
+              <a:t>Architecture: from raw text to decisions</a:t>
+            </a:r>
+          </a:p>
+        </p:txBody>
+      </p:sp>
+      <p:sp>
+        <p:nvSpPr>
+          <p:cNvPr id="4" name="Rectangle 3"/>
           <p:cNvSpPr/>
           <p:nvPr/>
         </p:nvSpPr>
         <p:spPr>
           <a:xfrm>
-            <a:off x="0" y="0"/>
-            <a:ext cx="12191695" cy="146304"/>
+            <a:off x="594360" y="1307592"/>
+            <a:ext cx="960120" cy="50292"/>
           </a:xfrm>
           <a:prstGeom prst="rect">
             <a:avLst/>
           </a:prstGeom>
           <a:solidFill>
-            <a:srgbClr val="168F88"/>
+            <a:srgbClr val="63B3ED"/>
           </a:solidFill>
           <a:ln>
-            <a:noFill/>
+            <a:solidFill>
+              <a:srgbClr val="63B3ED"/>
+            </a:solidFill>
           </a:ln>
         </p:spPr>
         <p:style>
@@ -4191,14 +4842,14 @@
       </p:sp>
       <p:sp>
         <p:nvSpPr>
-          <p:cNvPr id="3" name="TextBox 2"/>
+          <p:cNvPr id="5" name="TextBox 4"/>
           <p:cNvSpPr txBox="1"/>
           <p:nvPr/>
         </p:nvSpPr>
         <p:spPr>
           <a:xfrm>
-            <a:off x="594360" y="384048"/>
-            <a:ext cx="10972800" cy="256032"/>
+            <a:off x="11155680" y="6473952"/>
+            <a:ext cx="457200" cy="182880"/>
           </a:xfrm>
           <a:prstGeom prst="rect">
             <a:avLst/>
@@ -4206,80 +4857,49 @@
           <a:noFill/>
         </p:spPr>
         <p:txBody>
-          <a:bodyPr wrap="square">
+          <a:bodyPr wrap="square" lIns="45720" rIns="45720">
             <a:spAutoFit/>
           </a:bodyPr>
           <a:lstStyle/>
           <a:p>
-            <a:pPr>
-              <a:defRPr sz="1100" b="1">
-                <a:solidFill>
-                  <a:srgbClr val="168F88"/>
-                </a:solidFill>
-                <a:latin typeface="Aptos"/>
-              </a:defRPr>
-            </a:pPr>
-            <a:r>
-              <a:t>02 / SYSTEM DESIGN</a:t>
-            </a:r>
-          </a:p>
-        </p:txBody>
-      </p:sp>
-      <p:sp>
-        <p:nvSpPr>
-          <p:cNvPr id="4" name="TextBox 3"/>
-          <p:cNvSpPr txBox="1"/>
-          <p:nvPr/>
-        </p:nvSpPr>
-        <p:spPr>
-          <a:xfrm>
-            <a:off x="594360" y="713232"/>
-            <a:ext cx="10972800" cy="594360"/>
-          </a:xfrm>
-          <a:prstGeom prst="rect">
-            <a:avLst/>
-          </a:prstGeom>
-          <a:noFill/>
-        </p:spPr>
-        <p:txBody>
-          <a:bodyPr wrap="square">
-            <a:spAutoFit/>
-          </a:bodyPr>
-          <a:lstStyle/>
-          <a:p>
-            <a:pPr>
-              <a:defRPr sz="3000" b="1">
-                <a:solidFill>
-                  <a:srgbClr val="14243E"/>
-                </a:solidFill>
-                <a:latin typeface="Aptos"/>
-              </a:defRPr>
-            </a:pPr>
-            <a:r>
-              <a:t>Architecture &amp; data flow</a:t>
-            </a:r>
-          </a:p>
-        </p:txBody>
-      </p:sp>
-      <p:sp>
-        <p:nvSpPr>
-          <p:cNvPr id="5" name="Rectangle 4"/>
+            <a:pPr algn="r">
+              <a:spcAft>
+                <a:spcPts val="600"/>
+              </a:spcAft>
+              <a:defRPr sz="1000" b="0">
+                <a:solidFill>
+                  <a:srgbClr val="A5B1C2"/>
+                </a:solidFill>
+                <a:latin typeface="Aptos"/>
+              </a:defRPr>
+            </a:pPr>
+            <a:r>
+              <a:t>3/7</a:t>
+            </a:r>
+          </a:p>
+        </p:txBody>
+      </p:sp>
+      <p:sp>
+        <p:nvSpPr>
+          <p:cNvPr id="6" name="Rounded Rectangle 5"/>
           <p:cNvSpPr/>
           <p:nvPr/>
         </p:nvSpPr>
         <p:spPr>
           <a:xfrm>
-            <a:off x="594360" y="1399032"/>
-            <a:ext cx="1005840" cy="50292"/>
-          </a:xfrm>
-          <a:prstGeom prst="rect">
+            <a:off x="548640" y="1828800"/>
+            <a:ext cx="1828800" cy="822960"/>
+          </a:xfrm>
+          <a:prstGeom prst="roundRect">
             <a:avLst/>
           </a:prstGeom>
           <a:solidFill>
-            <a:srgbClr val="2463AA"/>
+            <a:srgbClr val="181F2A"/>
           </a:solidFill>
           <a:ln>
-            <a:noFill/>
+            <a:solidFill>
+              <a:srgbClr val="63B3ED"/>
+            </a:solidFill>
           </a:ln>
         </p:spPr>
         <p:style>
@@ -4306,14 +4926,14 @@
       </p:sp>
       <p:sp>
         <p:nvSpPr>
-          <p:cNvPr id="6" name="TextBox 5"/>
+          <p:cNvPr id="7" name="TextBox 6"/>
           <p:cNvSpPr txBox="1"/>
           <p:nvPr/>
         </p:nvSpPr>
         <p:spPr>
           <a:xfrm>
-            <a:off x="594360" y="6510528"/>
-            <a:ext cx="10058400" cy="182880"/>
+            <a:off x="640080" y="1938528"/>
+            <a:ext cx="1645920" cy="228600"/>
           </a:xfrm>
           <a:prstGeom prst="rect">
             <a:avLst/>
@@ -4321,35 +4941,38 @@
           <a:noFill/>
         </p:spPr>
         <p:txBody>
-          <a:bodyPr wrap="square">
+          <a:bodyPr wrap="square" lIns="45720" rIns="45720">
             <a:spAutoFit/>
           </a:bodyPr>
           <a:lstStyle/>
           <a:p>
-            <a:pPr>
-              <a:defRPr sz="800" b="1">
-                <a:solidFill>
-                  <a:srgbClr val="5F6C7B"/>
-                </a:solidFill>
-                <a:latin typeface="Aptos"/>
-              </a:defRPr>
-            </a:pPr>
-            <a:r>
-              <a:t>CODE TO CONNECT  •  S&amp;P GLOBAL &amp; CRISIL CAMPUS HACKATHON</a:t>
-            </a:r>
-          </a:p>
-        </p:txBody>
-      </p:sp>
-      <p:sp>
-        <p:nvSpPr>
-          <p:cNvPr id="7" name="TextBox 6"/>
+            <a:pPr algn="ctr">
+              <a:spcAft>
+                <a:spcPts val="600"/>
+              </a:spcAft>
+              <a:defRPr sz="1100" b="1">
+                <a:solidFill>
+                  <a:srgbClr val="63B3ED"/>
+                </a:solidFill>
+                <a:latin typeface="Aptos"/>
+              </a:defRPr>
+            </a:pPr>
+            <a:r>
+              <a:t>DATA SOURCES</a:t>
+            </a:r>
+          </a:p>
+        </p:txBody>
+      </p:sp>
+      <p:sp>
+        <p:nvSpPr>
+          <p:cNvPr id="8" name="TextBox 7"/>
           <p:cNvSpPr txBox="1"/>
           <p:nvPr/>
         </p:nvSpPr>
         <p:spPr>
           <a:xfrm>
-            <a:off x="10972800" y="6473952"/>
-            <a:ext cx="594360" cy="228600"/>
+            <a:off x="621792" y="2221992"/>
+            <a:ext cx="1682496" cy="347472"/>
           </a:xfrm>
           <a:prstGeom prst="rect">
             <a:avLst/>
@@ -4357,45 +4980,64 @@
           <a:noFill/>
         </p:spPr>
         <p:txBody>
-          <a:bodyPr wrap="square">
+          <a:bodyPr wrap="square" lIns="45720" rIns="45720">
             <a:spAutoFit/>
           </a:bodyPr>
           <a:lstStyle/>
           <a:p>
-            <a:pPr>
-              <a:defRPr sz="900" b="0">
-                <a:solidFill>
-                  <a:srgbClr val="5F6C7B"/>
-                </a:solidFill>
-                <a:latin typeface="Aptos"/>
-              </a:defRPr>
-            </a:pPr>
-            <a:r>
-              <a:t>3</a:t>
-            </a:r>
-          </a:p>
-        </p:txBody>
-      </p:sp>
-      <p:sp>
-        <p:nvSpPr>
-          <p:cNvPr id="8" name="Rounded Rectangle 7"/>
+            <a:pPr algn="ctr">
+              <a:spcAft>
+                <a:spcPts val="600"/>
+              </a:spcAft>
+              <a:defRPr sz="1000" b="0">
+                <a:solidFill>
+                  <a:srgbClr val="F2F6FC"/>
+                </a:solidFill>
+                <a:latin typeface="Aptos"/>
+              </a:defRPr>
+            </a:pPr>
+            <a:r>
+              <a:t>Tweets • GDELT GKG</a:t>
+            </a:r>
+          </a:p>
+          <a:p>
+            <a:pPr algn="ctr">
+              <a:spcAft>
+                <a:spcPts val="600"/>
+              </a:spcAft>
+              <a:defRPr sz="1000" b="0">
+                <a:solidFill>
+                  <a:srgbClr val="F2F6FC"/>
+                </a:solidFill>
+                <a:latin typeface="Aptos"/>
+              </a:defRPr>
+            </a:pPr>
+            <a:r>
+              <a:t>News CSV • optional API</a:t>
+            </a:r>
+          </a:p>
+        </p:txBody>
+      </p:sp>
+      <p:sp>
+        <p:nvSpPr>
+          <p:cNvPr id="9" name="Rounded Rectangle 8"/>
           <p:cNvSpPr/>
           <p:nvPr/>
         </p:nvSpPr>
         <p:spPr>
           <a:xfrm>
-            <a:off x="502920" y="2148840"/>
-            <a:ext cx="1691640" cy="1554480"/>
+            <a:off x="2743200" y="1828800"/>
+            <a:ext cx="1828800" cy="822960"/>
           </a:xfrm>
           <a:prstGeom prst="roundRect">
             <a:avLst/>
           </a:prstGeom>
           <a:solidFill>
-            <a:srgbClr val="F2F6FA"/>
+            <a:srgbClr val="181F2A"/>
           </a:solidFill>
           <a:ln>
             <a:solidFill>
-              <a:srgbClr val="DEE6EF"/>
+              <a:srgbClr val="5DE0E6"/>
             </a:solidFill>
           </a:ln>
         </p:spPr>
@@ -4423,23 +5065,119 @@
       </p:sp>
       <p:sp>
         <p:nvSpPr>
-          <p:cNvPr id="9" name="Rectangle 8"/>
+          <p:cNvPr id="10" name="TextBox 9"/>
+          <p:cNvSpPr txBox="1"/>
+          <p:nvPr/>
+        </p:nvSpPr>
+        <p:spPr>
+          <a:xfrm>
+            <a:off x="2834640" y="1938528"/>
+            <a:ext cx="1645920" cy="228600"/>
+          </a:xfrm>
+          <a:prstGeom prst="rect">
+            <a:avLst/>
+          </a:prstGeom>
+          <a:noFill/>
+        </p:spPr>
+        <p:txBody>
+          <a:bodyPr wrap="square" lIns="45720" rIns="45720">
+            <a:spAutoFit/>
+          </a:bodyPr>
+          <a:lstStyle/>
+          <a:p>
+            <a:pPr algn="ctr">
+              <a:spcAft>
+                <a:spcPts val="600"/>
+              </a:spcAft>
+              <a:defRPr sz="1100" b="1">
+                <a:solidFill>
+                  <a:srgbClr val="5DE0E6"/>
+                </a:solidFill>
+                <a:latin typeface="Aptos"/>
+              </a:defRPr>
+            </a:pPr>
+            <a:r>
+              <a:t>INGESTION</a:t>
+            </a:r>
+          </a:p>
+        </p:txBody>
+      </p:sp>
+      <p:sp>
+        <p:nvSpPr>
+          <p:cNvPr id="11" name="TextBox 10"/>
+          <p:cNvSpPr txBox="1"/>
+          <p:nvPr/>
+        </p:nvSpPr>
+        <p:spPr>
+          <a:xfrm>
+            <a:off x="2816352" y="2221992"/>
+            <a:ext cx="1682496" cy="347472"/>
+          </a:xfrm>
+          <a:prstGeom prst="rect">
+            <a:avLst/>
+          </a:prstGeom>
+          <a:noFill/>
+        </p:spPr>
+        <p:txBody>
+          <a:bodyPr wrap="square" lIns="45720" rIns="45720">
+            <a:spAutoFit/>
+          </a:bodyPr>
+          <a:lstStyle/>
+          <a:p>
+            <a:pPr algn="ctr">
+              <a:spcAft>
+                <a:spcPts val="600"/>
+              </a:spcAft>
+              <a:defRPr sz="1000" b="0">
+                <a:solidFill>
+                  <a:srgbClr val="F2F6FC"/>
+                </a:solidFill>
+                <a:latin typeface="Aptos"/>
+              </a:defRPr>
+            </a:pPr>
+            <a:r>
+              <a:t>Normalize + deduplicate</a:t>
+            </a:r>
+          </a:p>
+          <a:p>
+            <a:pPr algn="ctr">
+              <a:spcAft>
+                <a:spcPts val="600"/>
+              </a:spcAft>
+              <a:defRPr sz="1000" b="0">
+                <a:solidFill>
+                  <a:srgbClr val="F2F6FC"/>
+                </a:solidFill>
+                <a:latin typeface="Aptos"/>
+              </a:defRPr>
+            </a:pPr>
+            <a:r>
+              <a:t>UTC timestamps</a:t>
+            </a:r>
+          </a:p>
+        </p:txBody>
+      </p:sp>
+      <p:sp>
+        <p:nvSpPr>
+          <p:cNvPr id="12" name="Rounded Rectangle 11"/>
           <p:cNvSpPr/>
           <p:nvPr/>
         </p:nvSpPr>
         <p:spPr>
           <a:xfrm>
-            <a:off x="502920" y="2148840"/>
-            <a:ext cx="73152" cy="1554480"/>
-          </a:xfrm>
-          <a:prstGeom prst="rect">
+            <a:off x="4937760" y="1828800"/>
+            <a:ext cx="1828800" cy="822960"/>
+          </a:xfrm>
+          <a:prstGeom prst="roundRect">
             <a:avLst/>
           </a:prstGeom>
           <a:solidFill>
-            <a:srgbClr val="2463AA"/>
+            <a:srgbClr val="181F2A"/>
           </a:solidFill>
           <a:ln>
-            <a:noFill/>
+            <a:solidFill>
+              <a:srgbClr val="FFBE5C"/>
+            </a:solidFill>
           </a:ln>
         </p:spPr>
         <p:style>
@@ -4466,14 +5204,14 @@
       </p:sp>
       <p:sp>
         <p:nvSpPr>
-          <p:cNvPr id="10" name="TextBox 9"/>
+          <p:cNvPr id="13" name="TextBox 12"/>
           <p:cNvSpPr txBox="1"/>
           <p:nvPr/>
         </p:nvSpPr>
         <p:spPr>
           <a:xfrm>
-            <a:off x="704088" y="2313432"/>
-            <a:ext cx="1325880" cy="384048"/>
+            <a:off x="5029200" y="1938528"/>
+            <a:ext cx="1645920" cy="228600"/>
           </a:xfrm>
           <a:prstGeom prst="rect">
             <a:avLst/>
@@ -4481,35 +5219,38 @@
           <a:noFill/>
         </p:spPr>
         <p:txBody>
-          <a:bodyPr wrap="square">
+          <a:bodyPr wrap="square" lIns="45720" rIns="45720">
             <a:spAutoFit/>
           </a:bodyPr>
           <a:lstStyle/>
           <a:p>
-            <a:pPr>
-              <a:defRPr sz="1700" b="1">
-                <a:solidFill>
-                  <a:srgbClr val="14243E"/>
-                </a:solidFill>
-                <a:latin typeface="Aptos"/>
-              </a:defRPr>
-            </a:pPr>
-            <a:r>
-              <a:t>Sources</a:t>
-            </a:r>
-          </a:p>
-        </p:txBody>
-      </p:sp>
-      <p:sp>
-        <p:nvSpPr>
-          <p:cNvPr id="11" name="TextBox 10"/>
+            <a:pPr algn="ctr">
+              <a:spcAft>
+                <a:spcPts val="600"/>
+              </a:spcAft>
+              <a:defRPr sz="1100" b="1">
+                <a:solidFill>
+                  <a:srgbClr val="FFBE5C"/>
+                </a:solidFill>
+                <a:latin typeface="Aptos"/>
+              </a:defRPr>
+            </a:pPr>
+            <a:r>
+              <a:t>NLP ENGINE</a:t>
+            </a:r>
+          </a:p>
+        </p:txBody>
+      </p:sp>
+      <p:sp>
+        <p:nvSpPr>
+          <p:cNvPr id="14" name="TextBox 13"/>
           <p:cNvSpPr txBox="1"/>
           <p:nvPr/>
         </p:nvSpPr>
         <p:spPr>
           <a:xfrm>
-            <a:off x="704088" y="2807208"/>
-            <a:ext cx="1325880" cy="822959"/>
+            <a:off x="5010912" y="2221992"/>
+            <a:ext cx="1682496" cy="347472"/>
           </a:xfrm>
           <a:prstGeom prst="rect">
             <a:avLst/>
@@ -4517,44 +5258,65 @@
           <a:noFill/>
         </p:spPr>
         <p:txBody>
-          <a:bodyPr wrap="square">
+          <a:bodyPr wrap="square" lIns="45720" rIns="45720">
             <a:spAutoFit/>
           </a:bodyPr>
           <a:lstStyle/>
           <a:p>
-            <a:pPr>
-              <a:defRPr sz="1300" b="0">
-                <a:solidFill>
-                  <a:srgbClr val="2A3441"/>
-                </a:solidFill>
-                <a:latin typeface="Aptos"/>
-              </a:defRPr>
-            </a:pPr>
-            <a:r>
-              <a:t>News + social</a:t>
-            </a:r>
-          </a:p>
-        </p:txBody>
-      </p:sp>
-      <p:sp>
-        <p:nvSpPr>
-          <p:cNvPr id="12" name="Chevron 11"/>
+            <a:pPr algn="ctr">
+              <a:spcAft>
+                <a:spcPts val="600"/>
+              </a:spcAft>
+              <a:defRPr sz="1000" b="0">
+                <a:solidFill>
+                  <a:srgbClr val="F2F6FC"/>
+                </a:solidFill>
+                <a:latin typeface="Aptos"/>
+              </a:defRPr>
+            </a:pPr>
+            <a:r>
+              <a:t>Entity • sentiment</a:t>
+            </a:r>
+          </a:p>
+          <a:p>
+            <a:pPr algn="ctr">
+              <a:spcAft>
+                <a:spcPts val="600"/>
+              </a:spcAft>
+              <a:defRPr sz="1000" b="0">
+                <a:solidFill>
+                  <a:srgbClr val="F2F6FC"/>
+                </a:solidFill>
+                <a:latin typeface="Aptos"/>
+              </a:defRPr>
+            </a:pPr>
+            <a:r>
+              <a:t>event • impact</a:t>
+            </a:r>
+          </a:p>
+        </p:txBody>
+      </p:sp>
+      <p:sp>
+        <p:nvSpPr>
+          <p:cNvPr id="15" name="Rounded Rectangle 14"/>
           <p:cNvSpPr/>
           <p:nvPr/>
         </p:nvSpPr>
         <p:spPr>
           <a:xfrm>
-            <a:off x="2203704" y="2679192"/>
-            <a:ext cx="219456" cy="365760"/>
-          </a:xfrm>
-          <a:prstGeom prst="chevron">
+            <a:off x="7132320" y="1828800"/>
+            <a:ext cx="1828800" cy="822960"/>
+          </a:xfrm>
+          <a:prstGeom prst="roundRect">
             <a:avLst/>
           </a:prstGeom>
           <a:solidFill>
-            <a:srgbClr val="5F6C7B"/>
+            <a:srgbClr val="181F2A"/>
           </a:solidFill>
           <a:ln>
-            <a:noFill/>
+            <a:solidFill>
+              <a:srgbClr val="6FDCAA"/>
+            </a:solidFill>
           </a:ln>
         </p:spPr>
         <p:style>
@@ -4581,24 +5343,118 @@
       </p:sp>
       <p:sp>
         <p:nvSpPr>
-          <p:cNvPr id="13" name="Rounded Rectangle 12"/>
+          <p:cNvPr id="16" name="TextBox 15"/>
+          <p:cNvSpPr txBox="1"/>
+          <p:nvPr/>
+        </p:nvSpPr>
+        <p:spPr>
+          <a:xfrm>
+            <a:off x="7223759" y="1938528"/>
+            <a:ext cx="1645920" cy="228600"/>
+          </a:xfrm>
+          <a:prstGeom prst="rect">
+            <a:avLst/>
+          </a:prstGeom>
+          <a:noFill/>
+        </p:spPr>
+        <p:txBody>
+          <a:bodyPr wrap="square" lIns="45720" rIns="45720">
+            <a:spAutoFit/>
+          </a:bodyPr>
+          <a:lstStyle/>
+          <a:p>
+            <a:pPr algn="ctr">
+              <a:spcAft>
+                <a:spcPts val="600"/>
+              </a:spcAft>
+              <a:defRPr sz="1100" b="1">
+                <a:solidFill>
+                  <a:srgbClr val="6FDCAA"/>
+                </a:solidFill>
+                <a:latin typeface="Aptos"/>
+              </a:defRPr>
+            </a:pPr>
+            <a:r>
+              <a:t>SIGNAL STORE</a:t>
+            </a:r>
+          </a:p>
+        </p:txBody>
+      </p:sp>
+      <p:sp>
+        <p:nvSpPr>
+          <p:cNvPr id="17" name="TextBox 16"/>
+          <p:cNvSpPr txBox="1"/>
+          <p:nvPr/>
+        </p:nvSpPr>
+        <p:spPr>
+          <a:xfrm>
+            <a:off x="7205472" y="2221992"/>
+            <a:ext cx="1682496" cy="347472"/>
+          </a:xfrm>
+          <a:prstGeom prst="rect">
+            <a:avLst/>
+          </a:prstGeom>
+          <a:noFill/>
+        </p:spPr>
+        <p:txBody>
+          <a:bodyPr wrap="square" lIns="45720" rIns="45720">
+            <a:spAutoFit/>
+          </a:bodyPr>
+          <a:lstStyle/>
+          <a:p>
+            <a:pPr algn="ctr">
+              <a:spcAft>
+                <a:spcPts val="600"/>
+              </a:spcAft>
+              <a:defRPr sz="1000" b="0">
+                <a:solidFill>
+                  <a:srgbClr val="F2F6FC"/>
+                </a:solidFill>
+                <a:latin typeface="Aptos"/>
+              </a:defRPr>
+            </a:pPr>
+            <a:r>
+              <a:t>SQLite history</a:t>
+            </a:r>
+          </a:p>
+          <a:p>
+            <a:pPr algn="ctr">
+              <a:spcAft>
+                <a:spcPts val="600"/>
+              </a:spcAft>
+              <a:defRPr sz="1000" b="0">
+                <a:solidFill>
+                  <a:srgbClr val="F2F6FC"/>
+                </a:solidFill>
+                <a:latin typeface="Aptos"/>
+              </a:defRPr>
+            </a:pPr>
+            <a:r>
+              <a:t>FastAPI read endpoints</a:t>
+            </a:r>
+          </a:p>
+        </p:txBody>
+      </p:sp>
+      <p:sp>
+        <p:nvSpPr>
+          <p:cNvPr id="18" name="Rounded Rectangle 17"/>
           <p:cNvSpPr/>
           <p:nvPr/>
         </p:nvSpPr>
         <p:spPr>
           <a:xfrm>
-            <a:off x="2450591" y="2148840"/>
-            <a:ext cx="1691640" cy="1554480"/>
+            <a:off x="9326880" y="1828800"/>
+            <a:ext cx="2286000" cy="822960"/>
           </a:xfrm>
           <a:prstGeom prst="roundRect">
             <a:avLst/>
           </a:prstGeom>
           <a:solidFill>
-            <a:srgbClr val="F2F6FA"/>
+            <a:srgbClr val="181F2A"/>
           </a:solidFill>
           <a:ln>
             <a:solidFill>
-              <a:srgbClr val="DEE6EF"/>
+              <a:srgbClr val="63B3ED"/>
             </a:solidFill>
           </a:ln>
         </p:spPr>
@@ -4626,23 +5482,259 @@
       </p:sp>
       <p:sp>
         <p:nvSpPr>
-          <p:cNvPr id="14" name="Rectangle 13"/>
+          <p:cNvPr id="19" name="TextBox 18"/>
+          <p:cNvSpPr txBox="1"/>
+          <p:nvPr/>
+        </p:nvSpPr>
+        <p:spPr>
+          <a:xfrm>
+            <a:off x="9418319" y="1938528"/>
+            <a:ext cx="2103120" cy="228600"/>
+          </a:xfrm>
+          <a:prstGeom prst="rect">
+            <a:avLst/>
+          </a:prstGeom>
+          <a:noFill/>
+        </p:spPr>
+        <p:txBody>
+          <a:bodyPr wrap="square" lIns="45720" rIns="45720">
+            <a:spAutoFit/>
+          </a:bodyPr>
+          <a:lstStyle/>
+          <a:p>
+            <a:pPr algn="ctr">
+              <a:spcAft>
+                <a:spcPts val="600"/>
+              </a:spcAft>
+              <a:defRPr sz="1100" b="1">
+                <a:solidFill>
+                  <a:srgbClr val="63B3ED"/>
+                </a:solidFill>
+                <a:latin typeface="Aptos"/>
+              </a:defRPr>
+            </a:pPr>
+            <a:r>
+              <a:t>DASHBOARD</a:t>
+            </a:r>
+          </a:p>
+        </p:txBody>
+      </p:sp>
+      <p:sp>
+        <p:nvSpPr>
+          <p:cNvPr id="20" name="TextBox 19"/>
+          <p:cNvSpPr txBox="1"/>
+          <p:nvPr/>
+        </p:nvSpPr>
+        <p:spPr>
+          <a:xfrm>
+            <a:off x="9400032" y="2221992"/>
+            <a:ext cx="2139696" cy="347472"/>
+          </a:xfrm>
+          <a:prstGeom prst="rect">
+            <a:avLst/>
+          </a:prstGeom>
+          <a:noFill/>
+        </p:spPr>
+        <p:txBody>
+          <a:bodyPr wrap="square" lIns="45720" rIns="45720">
+            <a:spAutoFit/>
+          </a:bodyPr>
+          <a:lstStyle/>
+          <a:p>
+            <a:pPr algn="ctr">
+              <a:spcAft>
+                <a:spcPts val="600"/>
+              </a:spcAft>
+              <a:defRPr sz="1000" b="0">
+                <a:solidFill>
+                  <a:srgbClr val="F2F6FC"/>
+                </a:solidFill>
+                <a:latin typeface="Aptos"/>
+              </a:defRPr>
+            </a:pPr>
+            <a:r>
+              <a:t>Full-db analytics</a:t>
+            </a:r>
+          </a:p>
+          <a:p>
+            <a:pPr algn="ctr">
+              <a:spcAft>
+                <a:spcPts val="600"/>
+              </a:spcAft>
+              <a:defRPr sz="1000" b="0">
+                <a:solidFill>
+                  <a:srgbClr val="F2F6FC"/>
+                </a:solidFill>
+                <a:latin typeface="Aptos"/>
+              </a:defRPr>
+            </a:pPr>
+            <a:r>
+              <a:t>Recent feed</a:t>
+            </a:r>
+          </a:p>
+        </p:txBody>
+      </p:sp>
+      <p:cxnSp>
+        <p:nvCxnSpPr>
+          <p:cNvPr id="21" name="Connector 20"/>
+          <p:cNvCxnSpPr/>
+          <p:nvPr/>
+        </p:nvCxnSpPr>
+        <p:spPr>
+          <a:xfrm>
+            <a:off x="2377440" y="2240280"/>
+            <a:ext cx="365760" cy="0"/>
+          </a:xfrm>
+          <a:prstGeom prst="line">
+            <a:avLst/>
+          </a:prstGeom>
+          <a:ln w="25400">
+            <a:solidFill>
+              <a:srgbClr val="A5B1C2"/>
+            </a:solidFill>
+          </a:ln>
+        </p:spPr>
+        <p:style>
+          <a:lnRef idx="2">
+            <a:schemeClr val="accent1"/>
+          </a:lnRef>
+          <a:fillRef idx="0">
+            <a:schemeClr val="accent1"/>
+          </a:fillRef>
+          <a:effectRef idx="1">
+            <a:schemeClr val="accent1"/>
+          </a:effectRef>
+          <a:fontRef idx="minor">
+            <a:schemeClr val="tx1"/>
+          </a:fontRef>
+        </p:style>
+      </p:cxnSp>
+      <p:cxnSp>
+        <p:nvCxnSpPr>
+          <p:cNvPr id="22" name="Connector 21"/>
+          <p:cNvCxnSpPr/>
+          <p:nvPr/>
+        </p:nvCxnSpPr>
+        <p:spPr>
+          <a:xfrm>
+            <a:off x="4572000" y="2240280"/>
+            <a:ext cx="365760" cy="0"/>
+          </a:xfrm>
+          <a:prstGeom prst="line">
+            <a:avLst/>
+          </a:prstGeom>
+          <a:ln w="25400">
+            <a:solidFill>
+              <a:srgbClr val="A5B1C2"/>
+            </a:solidFill>
+          </a:ln>
+        </p:spPr>
+        <p:style>
+          <a:lnRef idx="2">
+            <a:schemeClr val="accent1"/>
+          </a:lnRef>
+          <a:fillRef idx="0">
+            <a:schemeClr val="accent1"/>
+          </a:fillRef>
+          <a:effectRef idx="1">
+            <a:schemeClr val="accent1"/>
+          </a:effectRef>
+          <a:fontRef idx="minor">
+            <a:schemeClr val="tx1"/>
+          </a:fontRef>
+        </p:style>
+      </p:cxnSp>
+      <p:cxnSp>
+        <p:nvCxnSpPr>
+          <p:cNvPr id="23" name="Connector 22"/>
+          <p:cNvCxnSpPr/>
+          <p:nvPr/>
+        </p:nvCxnSpPr>
+        <p:spPr>
+          <a:xfrm>
+            <a:off x="6766560" y="2240280"/>
+            <a:ext cx="365760" cy="0"/>
+          </a:xfrm>
+          <a:prstGeom prst="line">
+            <a:avLst/>
+          </a:prstGeom>
+          <a:ln w="25400">
+            <a:solidFill>
+              <a:srgbClr val="A5B1C2"/>
+            </a:solidFill>
+          </a:ln>
+        </p:spPr>
+        <p:style>
+          <a:lnRef idx="2">
+            <a:schemeClr val="accent1"/>
+          </a:lnRef>
+          <a:fillRef idx="0">
+            <a:schemeClr val="accent1"/>
+          </a:fillRef>
+          <a:effectRef idx="1">
+            <a:schemeClr val="accent1"/>
+          </a:effectRef>
+          <a:fontRef idx="minor">
+            <a:schemeClr val="tx1"/>
+          </a:fontRef>
+        </p:style>
+      </p:cxnSp>
+      <p:cxnSp>
+        <p:nvCxnSpPr>
+          <p:cNvPr id="24" name="Connector 23"/>
+          <p:cNvCxnSpPr/>
+          <p:nvPr/>
+        </p:nvCxnSpPr>
+        <p:spPr>
+          <a:xfrm>
+            <a:off x="8961120" y="2240280"/>
+            <a:ext cx="365760" cy="0"/>
+          </a:xfrm>
+          <a:prstGeom prst="line">
+            <a:avLst/>
+          </a:prstGeom>
+          <a:ln w="25400">
+            <a:solidFill>
+              <a:srgbClr val="A5B1C2"/>
+            </a:solidFill>
+          </a:ln>
+        </p:spPr>
+        <p:style>
+          <a:lnRef idx="2">
+            <a:schemeClr val="accent1"/>
+          </a:lnRef>
+          <a:fillRef idx="0">
+            <a:schemeClr val="accent1"/>
+          </a:fillRef>
+          <a:effectRef idx="1">
+            <a:schemeClr val="accent1"/>
+          </a:effectRef>
+          <a:fontRef idx="minor">
+            <a:schemeClr val="tx1"/>
+          </a:fontRef>
+        </p:style>
+      </p:cxnSp>
+      <p:sp>
+        <p:nvSpPr>
+          <p:cNvPr id="25" name="Rounded Rectangle 24"/>
           <p:cNvSpPr/>
           <p:nvPr/>
         </p:nvSpPr>
         <p:spPr>
           <a:xfrm>
-            <a:off x="2450591" y="2148840"/>
-            <a:ext cx="73152" cy="1554480"/>
-          </a:xfrm>
-          <a:prstGeom prst="rect">
+            <a:off x="914400" y="3657600"/>
+            <a:ext cx="4754880" cy="1554480"/>
+          </a:xfrm>
+          <a:prstGeom prst="roundRect">
             <a:avLst/>
           </a:prstGeom>
           <a:solidFill>
-            <a:srgbClr val="2463AA"/>
+            <a:srgbClr val="181F2A"/>
           </a:solidFill>
           <a:ln>
-            <a:noFill/>
+            <a:solidFill>
+              <a:srgbClr val="181F2A"/>
+            </a:solidFill>
           </a:ln>
         </p:spPr>
         <p:style>
@@ -4669,95 +5761,25 @@
       </p:sp>
       <p:sp>
         <p:nvSpPr>
-          <p:cNvPr id="15" name="TextBox 14"/>
-          <p:cNvSpPr txBox="1"/>
-          <p:nvPr/>
-        </p:nvSpPr>
-        <p:spPr>
-          <a:xfrm>
-            <a:off x="2651760" y="2313432"/>
-            <a:ext cx="1325880" cy="384048"/>
-          </a:xfrm>
-          <a:prstGeom prst="rect">
-            <a:avLst/>
-          </a:prstGeom>
-          <a:noFill/>
-        </p:spPr>
-        <p:txBody>
-          <a:bodyPr wrap="square">
-            <a:spAutoFit/>
-          </a:bodyPr>
-          <a:lstStyle/>
-          <a:p>
-            <a:pPr>
-              <a:defRPr sz="1700" b="1">
-                <a:solidFill>
-                  <a:srgbClr val="14243E"/>
-                </a:solidFill>
-                <a:latin typeface="Aptos"/>
-              </a:defRPr>
-            </a:pPr>
-            <a:r>
-              <a:t>Ingestion</a:t>
-            </a:r>
-          </a:p>
-        </p:txBody>
-      </p:sp>
-      <p:sp>
-        <p:nvSpPr>
-          <p:cNvPr id="16" name="TextBox 15"/>
-          <p:cNvSpPr txBox="1"/>
-          <p:nvPr/>
-        </p:nvSpPr>
-        <p:spPr>
-          <a:xfrm>
-            <a:off x="2651760" y="2807208"/>
-            <a:ext cx="1325880" cy="822959"/>
-          </a:xfrm>
-          <a:prstGeom prst="rect">
-            <a:avLst/>
-          </a:prstGeom>
-          <a:noFill/>
-        </p:spPr>
-        <p:txBody>
-          <a:bodyPr wrap="square">
-            <a:spAutoFit/>
-          </a:bodyPr>
-          <a:lstStyle/>
-          <a:p>
-            <a:pPr>
-              <a:defRPr sz="1300" b="0">
-                <a:solidFill>
-                  <a:srgbClr val="2A3441"/>
-                </a:solidFill>
-                <a:latin typeface="Aptos"/>
-              </a:defRPr>
-            </a:pPr>
-            <a:r>
-              <a:t>Normalize + deduplicate</a:t>
-            </a:r>
-          </a:p>
-        </p:txBody>
-      </p:sp>
-      <p:sp>
-        <p:nvSpPr>
-          <p:cNvPr id="17" name="Chevron 16"/>
+          <p:cNvPr id="26" name="Rectangle 25"/>
           <p:cNvSpPr/>
           <p:nvPr/>
         </p:nvSpPr>
         <p:spPr>
           <a:xfrm>
-            <a:off x="4151376" y="2679192"/>
-            <a:ext cx="219456" cy="365760"/>
-          </a:xfrm>
-          <a:prstGeom prst="chevron">
+            <a:off x="914400" y="3657600"/>
+            <a:ext cx="64008" cy="1554480"/>
+          </a:xfrm>
+          <a:prstGeom prst="rect">
             <a:avLst/>
           </a:prstGeom>
           <a:solidFill>
-            <a:srgbClr val="5F6C7B"/>
+            <a:srgbClr val="63B3ED"/>
           </a:solidFill>
           <a:ln>
-            <a:noFill/>
+            <a:solidFill>
+              <a:srgbClr val="63B3ED"/>
+            </a:solidFill>
           </a:ln>
         </p:spPr>
         <p:style>
@@ -4784,24 +5806,102 @@
       </p:sp>
       <p:sp>
         <p:nvSpPr>
-          <p:cNvPr id="18" name="Rounded Rectangle 17"/>
+          <p:cNvPr id="27" name="TextBox 26"/>
+          <p:cNvSpPr txBox="1"/>
+          <p:nvPr/>
+        </p:nvSpPr>
+        <p:spPr>
+          <a:xfrm>
+            <a:off x="1115568" y="3822191"/>
+            <a:ext cx="4389120" cy="329184"/>
+          </a:xfrm>
+          <a:prstGeom prst="rect">
+            <a:avLst/>
+          </a:prstGeom>
+          <a:noFill/>
+        </p:spPr>
+        <p:txBody>
+          <a:bodyPr wrap="square" lIns="45720" rIns="45720">
+            <a:spAutoFit/>
+          </a:bodyPr>
+          <a:lstStyle/>
+          <a:p>
+            <a:pPr algn="l">
+              <a:spcAft>
+                <a:spcPts val="600"/>
+              </a:spcAft>
+              <a:defRPr sz="1700" b="1">
+                <a:solidFill>
+                  <a:srgbClr val="F2F6FC"/>
+                </a:solidFill>
+                <a:latin typeface="Aptos"/>
+              </a:defRPr>
+            </a:pPr>
+            <a:r>
+              <a:t>Module A • Tactical index rebalancer</a:t>
+            </a:r>
+          </a:p>
+        </p:txBody>
+      </p:sp>
+      <p:sp>
+        <p:nvSpPr>
+          <p:cNvPr id="28" name="TextBox 27"/>
+          <p:cNvSpPr txBox="1"/>
+          <p:nvPr/>
+        </p:nvSpPr>
+        <p:spPr>
+          <a:xfrm>
+            <a:off x="1115568" y="4251960"/>
+            <a:ext cx="4370832" cy="841247"/>
+          </a:xfrm>
+          <a:prstGeom prst="rect">
+            <a:avLst/>
+          </a:prstGeom>
+          <a:noFill/>
+        </p:spPr>
+        <p:txBody>
+          <a:bodyPr wrap="square" lIns="45720" rIns="45720">
+            <a:spAutoFit/>
+          </a:bodyPr>
+          <a:lstStyle/>
+          <a:p>
+            <a:pPr algn="l">
+              <a:spcAft>
+                <a:spcPts val="600"/>
+              </a:spcAft>
+              <a:defRPr sz="1300" b="0">
+                <a:solidFill>
+                  <a:srgbClr val="A5B1C2"/>
+                </a:solidFill>
+                <a:latin typeface="Aptos"/>
+              </a:defRPr>
+            </a:pPr>
+            <a:r>
+              <a:t>Company-scope signals + daily prices → lagged sentiment aggregation → capped weights and turnover → equal-weight / SPY comparison.</a:t>
+            </a:r>
+          </a:p>
+        </p:txBody>
+      </p:sp>
+      <p:sp>
+        <p:nvSpPr>
+          <p:cNvPr id="29" name="Rounded Rectangle 28"/>
           <p:cNvSpPr/>
           <p:nvPr/>
         </p:nvSpPr>
         <p:spPr>
           <a:xfrm>
-            <a:off x="4398264" y="2148840"/>
-            <a:ext cx="1691640" cy="1554480"/>
+            <a:off x="6492240" y="3657600"/>
+            <a:ext cx="4754880" cy="1554480"/>
           </a:xfrm>
           <a:prstGeom prst="roundRect">
             <a:avLst/>
           </a:prstGeom>
           <a:solidFill>
-            <a:srgbClr val="F2F6FA"/>
+            <a:srgbClr val="181F2A"/>
           </a:solidFill>
           <a:ln>
             <a:solidFill>
-              <a:srgbClr val="DEE6EF"/>
+              <a:srgbClr val="181F2A"/>
             </a:solidFill>
           </a:ln>
         </p:spPr>
@@ -4829,23 +5929,25 @@
       </p:sp>
       <p:sp>
         <p:nvSpPr>
-          <p:cNvPr id="19" name="Rectangle 18"/>
+          <p:cNvPr id="30" name="Rectangle 29"/>
           <p:cNvSpPr/>
           <p:nvPr/>
         </p:nvSpPr>
         <p:spPr>
           <a:xfrm>
-            <a:off x="4398264" y="2148840"/>
-            <a:ext cx="73152" cy="1554480"/>
+            <a:off x="6492240" y="3657600"/>
+            <a:ext cx="64008" cy="1554480"/>
           </a:xfrm>
           <a:prstGeom prst="rect">
             <a:avLst/>
           </a:prstGeom>
           <a:solidFill>
-            <a:srgbClr val="168F88"/>
+            <a:srgbClr val="FFBE5C"/>
           </a:solidFill>
           <a:ln>
-            <a:noFill/>
+            <a:solidFill>
+              <a:srgbClr val="FFBE5C"/>
+            </a:solidFill>
           </a:ln>
         </p:spPr>
         <p:style>
@@ -4872,14 +5974,14 @@
       </p:sp>
       <p:sp>
         <p:nvSpPr>
-          <p:cNvPr id="20" name="TextBox 19"/>
+          <p:cNvPr id="31" name="TextBox 30"/>
           <p:cNvSpPr txBox="1"/>
           <p:nvPr/>
         </p:nvSpPr>
         <p:spPr>
           <a:xfrm>
-            <a:off x="4599431" y="2313432"/>
-            <a:ext cx="1325880" cy="384048"/>
+            <a:off x="6693407" y="3822191"/>
+            <a:ext cx="4389120" cy="329184"/>
           </a:xfrm>
           <a:prstGeom prst="rect">
             <a:avLst/>
@@ -4887,35 +5989,38 @@
           <a:noFill/>
         </p:spPr>
         <p:txBody>
-          <a:bodyPr wrap="square">
+          <a:bodyPr wrap="square" lIns="45720" rIns="45720">
             <a:spAutoFit/>
           </a:bodyPr>
           <a:lstStyle/>
           <a:p>
-            <a:pPr>
+            <a:pPr algn="l">
+              <a:spcAft>
+                <a:spcPts val="600"/>
+              </a:spcAft>
               <a:defRPr sz="1700" b="1">
                 <a:solidFill>
-                  <a:srgbClr val="14243E"/>
-                </a:solidFill>
-                <a:latin typeface="Aptos"/>
-              </a:defRPr>
-            </a:pPr>
-            <a:r>
-              <a:t>Risk Engine</a:t>
-            </a:r>
-          </a:p>
-        </p:txBody>
-      </p:sp>
-      <p:sp>
-        <p:nvSpPr>
-          <p:cNvPr id="21" name="TextBox 20"/>
+                  <a:srgbClr val="F2F6FC"/>
+                </a:solidFill>
+                <a:latin typeface="Aptos"/>
+              </a:defRPr>
+            </a:pPr>
+            <a:r>
+              <a:t>Module B • Strategic stress tester</a:t>
+            </a:r>
+          </a:p>
+        </p:txBody>
+      </p:sp>
+      <p:sp>
+        <p:nvSpPr>
+          <p:cNvPr id="32" name="TextBox 31"/>
           <p:cNvSpPr txBox="1"/>
           <p:nvPr/>
         </p:nvSpPr>
         <p:spPr>
           <a:xfrm>
-            <a:off x="4599431" y="2807208"/>
-            <a:ext cx="1325880" cy="822959"/>
+            <a:off x="6693407" y="4251960"/>
+            <a:ext cx="4370832" cy="841247"/>
           </a:xfrm>
           <a:prstGeom prst="rect">
             <a:avLst/>
@@ -4923,166 +6028,108 @@
           <a:noFill/>
         </p:spPr>
         <p:txBody>
-          <a:bodyPr wrap="square">
+          <a:bodyPr wrap="square" lIns="45720" rIns="45720">
             <a:spAutoFit/>
           </a:bodyPr>
           <a:lstStyle/>
           <a:p>
-            <a:pPr>
+            <a:pPr algn="l">
+              <a:spcAft>
+                <a:spcPts val="600"/>
+              </a:spcAft>
               <a:defRPr sz="1300" b="0">
                 <a:solidFill>
-                  <a:srgbClr val="2A3441"/>
-                </a:solidFill>
-                <a:latin typeface="Aptos"/>
-              </a:defRPr>
-            </a:pPr>
-            <a:r>
-              <a:t>Sentiment / event / impact</a:t>
-            </a:r>
-          </a:p>
-        </p:txBody>
-      </p:sp>
-      <p:sp>
-        <p:nvSpPr>
-          <p:cNvPr id="22" name="Chevron 21"/>
-          <p:cNvSpPr/>
-          <p:nvPr/>
-        </p:nvSpPr>
-        <p:spPr>
-          <a:xfrm>
-            <a:off x="6099048" y="2679192"/>
-            <a:ext cx="219456" cy="365760"/>
-          </a:xfrm>
-          <a:prstGeom prst="chevron">
-            <a:avLst/>
-          </a:prstGeom>
-          <a:solidFill>
-            <a:srgbClr val="5F6C7B"/>
-          </a:solidFill>
-          <a:ln>
-            <a:noFill/>
+                  <a:srgbClr val="A5B1C2"/>
+                </a:solidFill>
+                <a:latin typeface="Aptos"/>
+              </a:defRPr>
+            </a:pPr>
+            <a:r>
+              <a:t>Selected qualifying signal from the full database + configured event scenario → synthetic portfolio repricing → total and asset-level P&amp;L.</a:t>
+            </a:r>
+          </a:p>
+        </p:txBody>
+      </p:sp>
+      <p:cxnSp>
+        <p:nvCxnSpPr>
+          <p:cNvPr id="33" name="Connector 32"/>
+          <p:cNvCxnSpPr/>
+          <p:nvPr/>
+        </p:nvCxnSpPr>
+        <p:spPr>
+          <a:xfrm>
+            <a:off x="3291840" y="2651760"/>
+            <a:ext cx="0" cy="594360"/>
+          </a:xfrm>
+          <a:prstGeom prst="line">
+            <a:avLst/>
+          </a:prstGeom>
+          <a:ln w="19050">
+            <a:solidFill>
+              <a:srgbClr val="A5B1C2"/>
+            </a:solidFill>
           </a:ln>
         </p:spPr>
         <p:style>
-          <a:lnRef idx="1">
+          <a:lnRef idx="2">
             <a:schemeClr val="accent1"/>
           </a:lnRef>
-          <a:fillRef idx="3">
+          <a:fillRef idx="0">
             <a:schemeClr val="accent1"/>
           </a:fillRef>
-          <a:effectRef idx="2">
+          <a:effectRef idx="1">
             <a:schemeClr val="accent1"/>
           </a:effectRef>
           <a:fontRef idx="minor">
-            <a:schemeClr val="lt1"/>
+            <a:schemeClr val="tx1"/>
           </a:fontRef>
         </p:style>
-        <p:txBody>
-          <a:bodyPr rtlCol="0" anchor="ctr"/>
-          <a:lstStyle/>
-          <a:p>
-            <a:pPr algn="ctr"/>
-          </a:p>
-        </p:txBody>
-      </p:sp>
-      <p:sp>
-        <p:nvSpPr>
-          <p:cNvPr id="23" name="Rounded Rectangle 22"/>
-          <p:cNvSpPr/>
-          <p:nvPr/>
-        </p:nvSpPr>
-        <p:spPr>
-          <a:xfrm>
-            <a:off x="6345936" y="2148840"/>
-            <a:ext cx="1691640" cy="1554480"/>
-          </a:xfrm>
-          <a:prstGeom prst="roundRect">
-            <a:avLst/>
-          </a:prstGeom>
-          <a:solidFill>
-            <a:srgbClr val="F2F6FA"/>
-          </a:solidFill>
-          <a:ln>
+      </p:cxnSp>
+      <p:cxnSp>
+        <p:nvCxnSpPr>
+          <p:cNvPr id="34" name="Connector 33"/>
+          <p:cNvCxnSpPr/>
+          <p:nvPr/>
+        </p:nvCxnSpPr>
+        <p:spPr>
+          <a:xfrm>
+            <a:off x="8869680" y="2651760"/>
+            <a:ext cx="0" cy="594360"/>
+          </a:xfrm>
+          <a:prstGeom prst="line">
+            <a:avLst/>
+          </a:prstGeom>
+          <a:ln w="19050">
             <a:solidFill>
-              <a:srgbClr val="DEE6EF"/>
+              <a:srgbClr val="A5B1C2"/>
             </a:solidFill>
           </a:ln>
         </p:spPr>
         <p:style>
-          <a:lnRef idx="1">
+          <a:lnRef idx="2">
             <a:schemeClr val="accent1"/>
           </a:lnRef>
-          <a:fillRef idx="3">
+          <a:fillRef idx="0">
             <a:schemeClr val="accent1"/>
           </a:fillRef>
-          <a:effectRef idx="2">
+          <a:effectRef idx="1">
             <a:schemeClr val="accent1"/>
           </a:effectRef>
           <a:fontRef idx="minor">
-            <a:schemeClr val="lt1"/>
+            <a:schemeClr val="tx1"/>
           </a:fontRef>
         </p:style>
-        <p:txBody>
-          <a:bodyPr rtlCol="0" anchor="ctr"/>
-          <a:lstStyle/>
-          <a:p>
-            <a:pPr algn="ctr"/>
-          </a:p>
-        </p:txBody>
-      </p:sp>
-      <p:sp>
-        <p:nvSpPr>
-          <p:cNvPr id="24" name="Rectangle 23"/>
-          <p:cNvSpPr/>
-          <p:nvPr/>
-        </p:nvSpPr>
-        <p:spPr>
-          <a:xfrm>
-            <a:off x="6345936" y="2148840"/>
-            <a:ext cx="73152" cy="1554480"/>
-          </a:xfrm>
-          <a:prstGeom prst="rect">
-            <a:avLst/>
-          </a:prstGeom>
-          <a:solidFill>
-            <a:srgbClr val="2463AA"/>
-          </a:solidFill>
-          <a:ln>
-            <a:noFill/>
-          </a:ln>
-        </p:spPr>
-        <p:style>
-          <a:lnRef idx="1">
-            <a:schemeClr val="accent1"/>
-          </a:lnRef>
-          <a:fillRef idx="3">
-            <a:schemeClr val="accent1"/>
-          </a:fillRef>
-          <a:effectRef idx="2">
-            <a:schemeClr val="accent1"/>
-          </a:effectRef>
-          <a:fontRef idx="minor">
-            <a:schemeClr val="lt1"/>
-          </a:fontRef>
-        </p:style>
-        <p:txBody>
-          <a:bodyPr rtlCol="0" anchor="ctr"/>
-          <a:lstStyle/>
-          <a:p>
-            <a:pPr algn="ctr"/>
-          </a:p>
-        </p:txBody>
-      </p:sp>
-      <p:sp>
-        <p:nvSpPr>
-          <p:cNvPr id="25" name="TextBox 24"/>
+      </p:cxnSp>
+      <p:sp>
+        <p:nvSpPr>
+          <p:cNvPr id="35" name="TextBox 34"/>
           <p:cNvSpPr txBox="1"/>
           <p:nvPr/>
         </p:nvSpPr>
         <p:spPr>
           <a:xfrm>
-            <a:off x="6547103" y="2313432"/>
-            <a:ext cx="1325880" cy="384048"/>
+            <a:off x="822960" y="5623560"/>
+            <a:ext cx="10515600" cy="384048"/>
           </a:xfrm>
           <a:prstGeom prst="rect">
             <a:avLst/>
@@ -5090,535 +6137,24 @@
           <a:noFill/>
         </p:spPr>
         <p:txBody>
-          <a:bodyPr wrap="square">
+          <a:bodyPr wrap="square" lIns="45720" rIns="45720">
             <a:spAutoFit/>
           </a:bodyPr>
           <a:lstStyle/>
           <a:p>
-            <a:pPr>
-              <a:defRPr sz="1700" b="1">
-                <a:solidFill>
-                  <a:srgbClr val="14243E"/>
-                </a:solidFill>
-                <a:latin typeface="Aptos"/>
-              </a:defRPr>
-            </a:pPr>
-            <a:r>
-              <a:t>Signal store</a:t>
-            </a:r>
-          </a:p>
-        </p:txBody>
-      </p:sp>
-      <p:sp>
-        <p:nvSpPr>
-          <p:cNvPr id="26" name="TextBox 25"/>
-          <p:cNvSpPr txBox="1"/>
-          <p:nvPr/>
-        </p:nvSpPr>
-        <p:spPr>
-          <a:xfrm>
-            <a:off x="6547103" y="2807208"/>
-            <a:ext cx="1325880" cy="822959"/>
-          </a:xfrm>
-          <a:prstGeom prst="rect">
-            <a:avLst/>
-          </a:prstGeom>
-          <a:noFill/>
-        </p:spPr>
-        <p:txBody>
-          <a:bodyPr wrap="square">
-            <a:spAutoFit/>
-          </a:bodyPr>
-          <a:lstStyle/>
-          <a:p>
-            <a:pPr>
-              <a:defRPr sz="1300" b="0">
-                <a:solidFill>
-                  <a:srgbClr val="2A3441"/>
-                </a:solidFill>
-                <a:latin typeface="Aptos"/>
-              </a:defRPr>
-            </a:pPr>
-            <a:r>
-              <a:t>SQLite + FastAPI</a:t>
-            </a:r>
-          </a:p>
-        </p:txBody>
-      </p:sp>
-      <p:sp>
-        <p:nvSpPr>
-          <p:cNvPr id="27" name="Chevron 26"/>
-          <p:cNvSpPr/>
-          <p:nvPr/>
-        </p:nvSpPr>
-        <p:spPr>
-          <a:xfrm>
-            <a:off x="8046719" y="2679192"/>
-            <a:ext cx="219456" cy="365760"/>
-          </a:xfrm>
-          <a:prstGeom prst="chevron">
-            <a:avLst/>
-          </a:prstGeom>
-          <a:solidFill>
-            <a:srgbClr val="5F6C7B"/>
-          </a:solidFill>
-          <a:ln>
-            <a:noFill/>
-          </a:ln>
-        </p:spPr>
-        <p:style>
-          <a:lnRef idx="1">
-            <a:schemeClr val="accent1"/>
-          </a:lnRef>
-          <a:fillRef idx="3">
-            <a:schemeClr val="accent1"/>
-          </a:fillRef>
-          <a:effectRef idx="2">
-            <a:schemeClr val="accent1"/>
-          </a:effectRef>
-          <a:fontRef idx="minor">
-            <a:schemeClr val="lt1"/>
-          </a:fontRef>
-        </p:style>
-        <p:txBody>
-          <a:bodyPr rtlCol="0" anchor="ctr"/>
-          <a:lstStyle/>
-          <a:p>
-            <a:pPr algn="ctr"/>
-          </a:p>
-        </p:txBody>
-      </p:sp>
-      <p:sp>
-        <p:nvSpPr>
-          <p:cNvPr id="28" name="Rounded Rectangle 27"/>
-          <p:cNvSpPr/>
-          <p:nvPr/>
-        </p:nvSpPr>
-        <p:spPr>
-          <a:xfrm>
-            <a:off x="8293608" y="2148840"/>
-            <a:ext cx="1691640" cy="1554480"/>
-          </a:xfrm>
-          <a:prstGeom prst="roundRect">
-            <a:avLst/>
-          </a:prstGeom>
-          <a:solidFill>
-            <a:srgbClr val="F2F6FA"/>
-          </a:solidFill>
-          <a:ln>
-            <a:solidFill>
-              <a:srgbClr val="DEE6EF"/>
-            </a:solidFill>
-          </a:ln>
-        </p:spPr>
-        <p:style>
-          <a:lnRef idx="1">
-            <a:schemeClr val="accent1"/>
-          </a:lnRef>
-          <a:fillRef idx="3">
-            <a:schemeClr val="accent1"/>
-          </a:fillRef>
-          <a:effectRef idx="2">
-            <a:schemeClr val="accent1"/>
-          </a:effectRef>
-          <a:fontRef idx="minor">
-            <a:schemeClr val="lt1"/>
-          </a:fontRef>
-        </p:style>
-        <p:txBody>
-          <a:bodyPr rtlCol="0" anchor="ctr"/>
-          <a:lstStyle/>
-          <a:p>
-            <a:pPr algn="ctr"/>
-          </a:p>
-        </p:txBody>
-      </p:sp>
-      <p:sp>
-        <p:nvSpPr>
-          <p:cNvPr id="29" name="Rectangle 28"/>
-          <p:cNvSpPr/>
-          <p:nvPr/>
-        </p:nvSpPr>
-        <p:spPr>
-          <a:xfrm>
-            <a:off x="8293608" y="2148840"/>
-            <a:ext cx="73152" cy="1554480"/>
-          </a:xfrm>
-          <a:prstGeom prst="rect">
-            <a:avLst/>
-          </a:prstGeom>
-          <a:solidFill>
-            <a:srgbClr val="168F88"/>
-          </a:solidFill>
-          <a:ln>
-            <a:noFill/>
-          </a:ln>
-        </p:spPr>
-        <p:style>
-          <a:lnRef idx="1">
-            <a:schemeClr val="accent1"/>
-          </a:lnRef>
-          <a:fillRef idx="3">
-            <a:schemeClr val="accent1"/>
-          </a:fillRef>
-          <a:effectRef idx="2">
-            <a:schemeClr val="accent1"/>
-          </a:effectRef>
-          <a:fontRef idx="minor">
-            <a:schemeClr val="lt1"/>
-          </a:fontRef>
-        </p:style>
-        <p:txBody>
-          <a:bodyPr rtlCol="0" anchor="ctr"/>
-          <a:lstStyle/>
-          <a:p>
-            <a:pPr algn="ctr"/>
-          </a:p>
-        </p:txBody>
-      </p:sp>
-      <p:sp>
-        <p:nvSpPr>
-          <p:cNvPr id="30" name="TextBox 29"/>
-          <p:cNvSpPr txBox="1"/>
-          <p:nvPr/>
-        </p:nvSpPr>
-        <p:spPr>
-          <a:xfrm>
-            <a:off x="8494776" y="2313432"/>
-            <a:ext cx="1325880" cy="384048"/>
-          </a:xfrm>
-          <a:prstGeom prst="rect">
-            <a:avLst/>
-          </a:prstGeom>
-          <a:noFill/>
-        </p:spPr>
-        <p:txBody>
-          <a:bodyPr wrap="square">
-            <a:spAutoFit/>
-          </a:bodyPr>
-          <a:lstStyle/>
-          <a:p>
-            <a:pPr>
-              <a:defRPr sz="1700" b="1">
-                <a:solidFill>
-                  <a:srgbClr val="14243E"/>
-                </a:solidFill>
-                <a:latin typeface="Aptos"/>
-              </a:defRPr>
-            </a:pPr>
-            <a:r>
-              <a:t>Modules</a:t>
-            </a:r>
-          </a:p>
-        </p:txBody>
-      </p:sp>
-      <p:sp>
-        <p:nvSpPr>
-          <p:cNvPr id="31" name="TextBox 30"/>
-          <p:cNvSpPr txBox="1"/>
-          <p:nvPr/>
-        </p:nvSpPr>
-        <p:spPr>
-          <a:xfrm>
-            <a:off x="8494776" y="2807208"/>
-            <a:ext cx="1325880" cy="822959"/>
-          </a:xfrm>
-          <a:prstGeom prst="rect">
-            <a:avLst/>
-          </a:prstGeom>
-          <a:noFill/>
-        </p:spPr>
-        <p:txBody>
-          <a:bodyPr wrap="square">
-            <a:spAutoFit/>
-          </a:bodyPr>
-          <a:lstStyle/>
-          <a:p>
-            <a:pPr>
-              <a:defRPr sz="1300" b="0">
-                <a:solidFill>
-                  <a:srgbClr val="2A3441"/>
-                </a:solidFill>
-                <a:latin typeface="Aptos"/>
-              </a:defRPr>
-            </a:pPr>
-            <a:r>
-              <a:t>Rebalance + stress</a:t>
-            </a:r>
-          </a:p>
-        </p:txBody>
-      </p:sp>
-      <p:sp>
-        <p:nvSpPr>
-          <p:cNvPr id="32" name="Chevron 31"/>
-          <p:cNvSpPr/>
-          <p:nvPr/>
-        </p:nvSpPr>
-        <p:spPr>
-          <a:xfrm>
-            <a:off x="9994392" y="2679192"/>
-            <a:ext cx="219456" cy="365760"/>
-          </a:xfrm>
-          <a:prstGeom prst="chevron">
-            <a:avLst/>
-          </a:prstGeom>
-          <a:solidFill>
-            <a:srgbClr val="5F6C7B"/>
-          </a:solidFill>
-          <a:ln>
-            <a:noFill/>
-          </a:ln>
-        </p:spPr>
-        <p:style>
-          <a:lnRef idx="1">
-            <a:schemeClr val="accent1"/>
-          </a:lnRef>
-          <a:fillRef idx="3">
-            <a:schemeClr val="accent1"/>
-          </a:fillRef>
-          <a:effectRef idx="2">
-            <a:schemeClr val="accent1"/>
-          </a:effectRef>
-          <a:fontRef idx="minor">
-            <a:schemeClr val="lt1"/>
-          </a:fontRef>
-        </p:style>
-        <p:txBody>
-          <a:bodyPr rtlCol="0" anchor="ctr"/>
-          <a:lstStyle/>
-          <a:p>
-            <a:pPr algn="ctr"/>
-          </a:p>
-        </p:txBody>
-      </p:sp>
-      <p:sp>
-        <p:nvSpPr>
-          <p:cNvPr id="33" name="Rounded Rectangle 32"/>
-          <p:cNvSpPr/>
-          <p:nvPr/>
-        </p:nvSpPr>
-        <p:spPr>
-          <a:xfrm>
-            <a:off x="10241280" y="2148840"/>
-            <a:ext cx="1691640" cy="1554480"/>
-          </a:xfrm>
-          <a:prstGeom prst="roundRect">
-            <a:avLst/>
-          </a:prstGeom>
-          <a:solidFill>
-            <a:srgbClr val="F2F6FA"/>
-          </a:solidFill>
-          <a:ln>
-            <a:solidFill>
-              <a:srgbClr val="DEE6EF"/>
-            </a:solidFill>
-          </a:ln>
-        </p:spPr>
-        <p:style>
-          <a:lnRef idx="1">
-            <a:schemeClr val="accent1"/>
-          </a:lnRef>
-          <a:fillRef idx="3">
-            <a:schemeClr val="accent1"/>
-          </a:fillRef>
-          <a:effectRef idx="2">
-            <a:schemeClr val="accent1"/>
-          </a:effectRef>
-          <a:fontRef idx="minor">
-            <a:schemeClr val="lt1"/>
-          </a:fontRef>
-        </p:style>
-        <p:txBody>
-          <a:bodyPr rtlCol="0" anchor="ctr"/>
-          <a:lstStyle/>
-          <a:p>
-            <a:pPr algn="ctr"/>
-          </a:p>
-        </p:txBody>
-      </p:sp>
-      <p:sp>
-        <p:nvSpPr>
-          <p:cNvPr id="34" name="Rectangle 33"/>
-          <p:cNvSpPr/>
-          <p:nvPr/>
-        </p:nvSpPr>
-        <p:spPr>
-          <a:xfrm>
-            <a:off x="10241280" y="2148840"/>
-            <a:ext cx="73152" cy="1554480"/>
-          </a:xfrm>
-          <a:prstGeom prst="rect">
-            <a:avLst/>
-          </a:prstGeom>
-          <a:solidFill>
-            <a:srgbClr val="2463AA"/>
-          </a:solidFill>
-          <a:ln>
-            <a:noFill/>
-          </a:ln>
-        </p:spPr>
-        <p:style>
-          <a:lnRef idx="1">
-            <a:schemeClr val="accent1"/>
-          </a:lnRef>
-          <a:fillRef idx="3">
-            <a:schemeClr val="accent1"/>
-          </a:fillRef>
-          <a:effectRef idx="2">
-            <a:schemeClr val="accent1"/>
-          </a:effectRef>
-          <a:fontRef idx="minor">
-            <a:schemeClr val="lt1"/>
-          </a:fontRef>
-        </p:style>
-        <p:txBody>
-          <a:bodyPr rtlCol="0" anchor="ctr"/>
-          <a:lstStyle/>
-          <a:p>
-            <a:pPr algn="ctr"/>
-          </a:p>
-        </p:txBody>
-      </p:sp>
-      <p:sp>
-        <p:nvSpPr>
-          <p:cNvPr id="35" name="TextBox 34"/>
-          <p:cNvSpPr txBox="1"/>
-          <p:nvPr/>
-        </p:nvSpPr>
-        <p:spPr>
-          <a:xfrm>
-            <a:off x="10442448" y="2313432"/>
-            <a:ext cx="1325880" cy="384048"/>
-          </a:xfrm>
-          <a:prstGeom prst="rect">
-            <a:avLst/>
-          </a:prstGeom>
-          <a:noFill/>
-        </p:spPr>
-        <p:txBody>
-          <a:bodyPr wrap="square">
-            <a:spAutoFit/>
-          </a:bodyPr>
-          <a:lstStyle/>
-          <a:p>
-            <a:pPr>
-              <a:defRPr sz="1700" b="1">
-                <a:solidFill>
-                  <a:srgbClr val="14243E"/>
-                </a:solidFill>
-                <a:latin typeface="Aptos"/>
-              </a:defRPr>
-            </a:pPr>
-            <a:r>
-              <a:t>Dashboard</a:t>
-            </a:r>
-          </a:p>
-        </p:txBody>
-      </p:sp>
-      <p:sp>
-        <p:nvSpPr>
-          <p:cNvPr id="36" name="TextBox 35"/>
-          <p:cNvSpPr txBox="1"/>
-          <p:nvPr/>
-        </p:nvSpPr>
-        <p:spPr>
-          <a:xfrm>
-            <a:off x="10442448" y="2807208"/>
-            <a:ext cx="1325880" cy="822959"/>
-          </a:xfrm>
-          <a:prstGeom prst="rect">
-            <a:avLst/>
-          </a:prstGeom>
-          <a:noFill/>
-        </p:spPr>
-        <p:txBody>
-          <a:bodyPr wrap="square">
-            <a:spAutoFit/>
-          </a:bodyPr>
-          <a:lstStyle/>
-          <a:p>
-            <a:pPr>
-              <a:defRPr sz="1300" b="0">
-                <a:solidFill>
-                  <a:srgbClr val="2A3441"/>
-                </a:solidFill>
-                <a:latin typeface="Aptos"/>
-              </a:defRPr>
-            </a:pPr>
-            <a:r>
-              <a:t>3 Streamlit pages</a:t>
-            </a:r>
-          </a:p>
-        </p:txBody>
-      </p:sp>
-      <p:sp>
-        <p:nvSpPr>
-          <p:cNvPr id="37" name="TextBox 36"/>
-          <p:cNvSpPr txBox="1"/>
-          <p:nvPr/>
-        </p:nvSpPr>
-        <p:spPr>
-          <a:xfrm>
-            <a:off x="731520" y="4251960"/>
-            <a:ext cx="10789920" cy="1005840"/>
-          </a:xfrm>
-          <a:prstGeom prst="rect">
-            <a:avLst/>
-          </a:prstGeom>
-          <a:noFill/>
-        </p:spPr>
-        <p:txBody>
-          <a:bodyPr wrap="square">
-            <a:spAutoFit/>
-          </a:bodyPr>
-          <a:lstStyle/>
-          <a:p>
-            <a:pPr>
-              <a:defRPr sz="1600" b="0">
-                <a:solidFill>
-                  <a:srgbClr val="2A3441"/>
-                </a:solidFill>
-                <a:latin typeface="Aptos"/>
-              </a:defRPr>
-            </a:pPr>
-            <a:r>
-              <a:t>Key files: src/common/schemas.py • src/signals/store.py • src/api/app.py • src/modules/rebalancer/engine.py • src/modules/stress_test/engine.py • src/dashboard/app.py</a:t>
-            </a:r>
-          </a:p>
-        </p:txBody>
-      </p:sp>
-      <p:sp>
-        <p:nvSpPr>
-          <p:cNvPr id="38" name="TextBox 37"/>
-          <p:cNvSpPr txBox="1"/>
-          <p:nvPr/>
-        </p:nvSpPr>
-        <p:spPr>
-          <a:xfrm>
-            <a:off x="731520" y="5440680"/>
-            <a:ext cx="10515600" cy="502920"/>
-          </a:xfrm>
-          <a:prstGeom prst="rect">
-            <a:avLst/>
-          </a:prstGeom>
-          <a:noFill/>
-        </p:spPr>
-        <p:txBody>
-          <a:bodyPr wrap="square">
-            <a:spAutoFit/>
-          </a:bodyPr>
-          <a:lstStyle/>
-          <a:p>
-            <a:pPr>
-              <a:defRPr sz="1300" b="0">
-                <a:solidFill>
-                  <a:srgbClr val="5F6C7B"/>
-                </a:solidFill>
-                <a:latin typeface="Aptos"/>
-              </a:defRPr>
-            </a:pPr>
-            <a:r>
-              <a:t>See docs/architecture.md for the editable Mermaid architecture diagram.</a:t>
+            <a:pPr algn="ctr">
+              <a:spcAft>
+                <a:spcPts val="600"/>
+              </a:spcAft>
+              <a:defRPr sz="1300" b="1">
+                <a:solidFill>
+                  <a:srgbClr val="5DE0E6"/>
+                </a:solidFill>
+                <a:latin typeface="Aptos"/>
+              </a:defRPr>
+            </a:pPr>
+            <a:r>
+              <a:t>Dashboard samples only the visible recent table; aggregate analytics and event filtering use the stored signal database.</a:t>
             </a:r>
           </a:p>
         </p:txBody>
@@ -5637,7 +6173,7 @@
     <p:bg>
       <p:bgPr>
         <a:solidFill>
-          <a:srgbClr val="FFFFFF"/>
+          <a:srgbClr val="0D1117"/>
         </a:solidFill>
         <a:effectLst/>
       </p:bgPr>
@@ -5651,23 +6187,103 @@
       <p:grpSpPr/>
       <p:sp>
         <p:nvSpPr>
-          <p:cNvPr id="2" name="Rectangle 1"/>
+          <p:cNvPr id="2" name="TextBox 1"/>
+          <p:cNvSpPr txBox="1"/>
+          <p:nvPr/>
+        </p:nvSpPr>
+        <p:spPr>
+          <a:xfrm>
+            <a:off x="594360" y="320040"/>
+            <a:ext cx="9875520" cy="228600"/>
+          </a:xfrm>
+          <a:prstGeom prst="rect">
+            <a:avLst/>
+          </a:prstGeom>
+          <a:noFill/>
+        </p:spPr>
+        <p:txBody>
+          <a:bodyPr wrap="square" lIns="45720" rIns="45720">
+            <a:spAutoFit/>
+          </a:bodyPr>
+          <a:lstStyle/>
+          <a:p>
+            <a:pPr algn="l">
+              <a:spcAft>
+                <a:spcPts val="600"/>
+              </a:spcAft>
+              <a:defRPr sz="1000" b="1">
+                <a:solidFill>
+                  <a:srgbClr val="5DE0E6"/>
+                </a:solidFill>
+                <a:latin typeface="Aptos"/>
+              </a:defRPr>
+            </a:pPr>
+            <a:r>
+              <a:t>03 / IMPLEMENTATION HIGHLIGHTS</a:t>
+            </a:r>
+          </a:p>
+        </p:txBody>
+      </p:sp>
+      <p:sp>
+        <p:nvSpPr>
+          <p:cNvPr id="3" name="TextBox 2"/>
+          <p:cNvSpPr txBox="1"/>
+          <p:nvPr/>
+        </p:nvSpPr>
+        <p:spPr>
+          <a:xfrm>
+            <a:off x="594360" y="658368"/>
+            <a:ext cx="10972800" cy="566928"/>
+          </a:xfrm>
+          <a:prstGeom prst="rect">
+            <a:avLst/>
+          </a:prstGeom>
+          <a:noFill/>
+        </p:spPr>
+        <p:txBody>
+          <a:bodyPr wrap="square" lIns="45720" rIns="45720">
+            <a:spAutoFit/>
+          </a:bodyPr>
+          <a:lstStyle/>
+          <a:p>
+            <a:pPr algn="l">
+              <a:spcAft>
+                <a:spcPts val="600"/>
+              </a:spcAft>
+              <a:defRPr sz="2700" b="1">
+                <a:solidFill>
+                  <a:srgbClr val="F2F6FC"/>
+                </a:solidFill>
+                <a:latin typeface="Aptos"/>
+              </a:defRPr>
+            </a:pPr>
+            <a:r>
+              <a:t>Risk Engine and data quality</a:t>
+            </a:r>
+          </a:p>
+        </p:txBody>
+      </p:sp>
+      <p:sp>
+        <p:nvSpPr>
+          <p:cNvPr id="4" name="Rectangle 3"/>
           <p:cNvSpPr/>
           <p:nvPr/>
         </p:nvSpPr>
         <p:spPr>
           <a:xfrm>
-            <a:off x="0" y="0"/>
-            <a:ext cx="12191695" cy="146304"/>
+            <a:off x="594360" y="1307592"/>
+            <a:ext cx="960120" cy="50292"/>
           </a:xfrm>
           <a:prstGeom prst="rect">
             <a:avLst/>
           </a:prstGeom>
           <a:solidFill>
-            <a:srgbClr val="168F88"/>
+            <a:srgbClr val="63B3ED"/>
           </a:solidFill>
           <a:ln>
-            <a:noFill/>
+            <a:solidFill>
+              <a:srgbClr val="63B3ED"/>
+            </a:solidFill>
           </a:ln>
         </p:spPr>
         <p:style>
@@ -5694,14 +6310,14 @@
       </p:sp>
       <p:sp>
         <p:nvSpPr>
-          <p:cNvPr id="3" name="TextBox 2"/>
+          <p:cNvPr id="5" name="TextBox 4"/>
           <p:cNvSpPr txBox="1"/>
           <p:nvPr/>
         </p:nvSpPr>
         <p:spPr>
           <a:xfrm>
-            <a:off x="594360" y="384048"/>
-            <a:ext cx="10972800" cy="256032"/>
+            <a:off x="11155680" y="6473952"/>
+            <a:ext cx="457200" cy="182880"/>
           </a:xfrm>
           <a:prstGeom prst="rect">
             <a:avLst/>
@@ -5709,80 +6325,49 @@
           <a:noFill/>
         </p:spPr>
         <p:txBody>
-          <a:bodyPr wrap="square">
+          <a:bodyPr wrap="square" lIns="45720" rIns="45720">
             <a:spAutoFit/>
           </a:bodyPr>
           <a:lstStyle/>
           <a:p>
-            <a:pPr>
-              <a:defRPr sz="1100" b="1">
-                <a:solidFill>
-                  <a:srgbClr val="168F88"/>
-                </a:solidFill>
-                <a:latin typeface="Aptos"/>
-              </a:defRPr>
-            </a:pPr>
-            <a:r>
-              <a:t>03 / IMPLEMENTATION</a:t>
-            </a:r>
-          </a:p>
-        </p:txBody>
-      </p:sp>
-      <p:sp>
-        <p:nvSpPr>
-          <p:cNvPr id="4" name="TextBox 3"/>
-          <p:cNvSpPr txBox="1"/>
-          <p:nvPr/>
-        </p:nvSpPr>
-        <p:spPr>
-          <a:xfrm>
-            <a:off x="594360" y="713232"/>
-            <a:ext cx="10972800" cy="594360"/>
-          </a:xfrm>
-          <a:prstGeom prst="rect">
-            <a:avLst/>
-          </a:prstGeom>
-          <a:noFill/>
-        </p:spPr>
-        <p:txBody>
-          <a:bodyPr wrap="square">
-            <a:spAutoFit/>
-          </a:bodyPr>
-          <a:lstStyle/>
-          <a:p>
-            <a:pPr>
-              <a:defRPr sz="3000" b="1">
-                <a:solidFill>
-                  <a:srgbClr val="14243E"/>
-                </a:solidFill>
-                <a:latin typeface="Aptos"/>
-              </a:defRPr>
-            </a:pPr>
-            <a:r>
-              <a:t>Risk Engine &amp; signal quality</a:t>
-            </a:r>
-          </a:p>
-        </p:txBody>
-      </p:sp>
-      <p:sp>
-        <p:nvSpPr>
-          <p:cNvPr id="5" name="Rectangle 4"/>
+            <a:pPr algn="r">
+              <a:spcAft>
+                <a:spcPts val="600"/>
+              </a:spcAft>
+              <a:defRPr sz="1000" b="0">
+                <a:solidFill>
+                  <a:srgbClr val="A5B1C2"/>
+                </a:solidFill>
+                <a:latin typeface="Aptos"/>
+              </a:defRPr>
+            </a:pPr>
+            <a:r>
+              <a:t>4/7</a:t>
+            </a:r>
+          </a:p>
+        </p:txBody>
+      </p:sp>
+      <p:sp>
+        <p:nvSpPr>
+          <p:cNvPr id="6" name="Rounded Rectangle 5"/>
           <p:cNvSpPr/>
           <p:nvPr/>
         </p:nvSpPr>
         <p:spPr>
           <a:xfrm>
-            <a:off x="594360" y="1399032"/>
-            <a:ext cx="1005840" cy="50292"/>
-          </a:xfrm>
-          <a:prstGeom prst="rect">
+            <a:off x="685800" y="1691640"/>
+            <a:ext cx="3474720" cy="3383280"/>
+          </a:xfrm>
+          <a:prstGeom prst="roundRect">
             <a:avLst/>
           </a:prstGeom>
           <a:solidFill>
-            <a:srgbClr val="2463AA"/>
+            <a:srgbClr val="181F2A"/>
           </a:solidFill>
           <a:ln>
-            <a:noFill/>
+            <a:solidFill>
+              <a:srgbClr val="181F2A"/>
+            </a:solidFill>
           </a:ln>
         </p:spPr>
         <p:style>
@@ -5809,96 +6394,24 @@
       </p:sp>
       <p:sp>
         <p:nvSpPr>
-          <p:cNvPr id="6" name="TextBox 5"/>
-          <p:cNvSpPr txBox="1"/>
-          <p:nvPr/>
-        </p:nvSpPr>
-        <p:spPr>
-          <a:xfrm>
-            <a:off x="594360" y="6510528"/>
-            <a:ext cx="10058400" cy="182880"/>
-          </a:xfrm>
-          <a:prstGeom prst="rect">
-            <a:avLst/>
-          </a:prstGeom>
-          <a:noFill/>
-        </p:spPr>
-        <p:txBody>
-          <a:bodyPr wrap="square">
-            <a:spAutoFit/>
-          </a:bodyPr>
-          <a:lstStyle/>
-          <a:p>
-            <a:pPr>
-              <a:defRPr sz="800" b="1">
-                <a:solidFill>
-                  <a:srgbClr val="5F6C7B"/>
-                </a:solidFill>
-                <a:latin typeface="Aptos"/>
-              </a:defRPr>
-            </a:pPr>
-            <a:r>
-              <a:t>CODE TO CONNECT  •  S&amp;P GLOBAL &amp; CRISIL CAMPUS HACKATHON</a:t>
-            </a:r>
-          </a:p>
-        </p:txBody>
-      </p:sp>
-      <p:sp>
-        <p:nvSpPr>
-          <p:cNvPr id="7" name="TextBox 6"/>
-          <p:cNvSpPr txBox="1"/>
-          <p:nvPr/>
-        </p:nvSpPr>
-        <p:spPr>
-          <a:xfrm>
-            <a:off x="10972800" y="6473952"/>
-            <a:ext cx="594360" cy="228600"/>
-          </a:xfrm>
-          <a:prstGeom prst="rect">
-            <a:avLst/>
-          </a:prstGeom>
-          <a:noFill/>
-        </p:spPr>
-        <p:txBody>
-          <a:bodyPr wrap="square">
-            <a:spAutoFit/>
-          </a:bodyPr>
-          <a:lstStyle/>
-          <a:p>
-            <a:pPr>
-              <a:defRPr sz="900" b="0">
-                <a:solidFill>
-                  <a:srgbClr val="5F6C7B"/>
-                </a:solidFill>
-                <a:latin typeface="Aptos"/>
-              </a:defRPr>
-            </a:pPr>
-            <a:r>
-              <a:t>4</a:t>
-            </a:r>
-          </a:p>
-        </p:txBody>
-      </p:sp>
-      <p:sp>
-        <p:nvSpPr>
-          <p:cNvPr id="8" name="Rounded Rectangle 7"/>
+          <p:cNvPr id="7" name="Rectangle 6"/>
           <p:cNvSpPr/>
           <p:nvPr/>
         </p:nvSpPr>
         <p:spPr>
           <a:xfrm>
-            <a:off x="731520" y="1737360"/>
-            <a:ext cx="5120640" cy="1874519"/>
-          </a:xfrm>
-          <a:prstGeom prst="roundRect">
+            <a:off x="685800" y="1691640"/>
+            <a:ext cx="64008" cy="3383280"/>
+          </a:xfrm>
+          <a:prstGeom prst="rect">
             <a:avLst/>
           </a:prstGeom>
           <a:solidFill>
-            <a:srgbClr val="F2F6FA"/>
+            <a:srgbClr val="63B3ED"/>
           </a:solidFill>
           <a:ln>
             <a:solidFill>
-              <a:srgbClr val="DEE6EF"/>
+              <a:srgbClr val="63B3ED"/>
             </a:solidFill>
           </a:ln>
         </p:spPr>
@@ -5926,23 +6439,180 @@
       </p:sp>
       <p:sp>
         <p:nvSpPr>
-          <p:cNvPr id="9" name="Rectangle 8"/>
+          <p:cNvPr id="8" name="TextBox 7"/>
+          <p:cNvSpPr txBox="1"/>
+          <p:nvPr/>
+        </p:nvSpPr>
+        <p:spPr>
+          <a:xfrm>
+            <a:off x="886968" y="1856232"/>
+            <a:ext cx="3108960" cy="329184"/>
+          </a:xfrm>
+          <a:prstGeom prst="rect">
+            <a:avLst/>
+          </a:prstGeom>
+          <a:noFill/>
+        </p:spPr>
+        <p:txBody>
+          <a:bodyPr wrap="square" lIns="45720" rIns="45720">
+            <a:spAutoFit/>
+          </a:bodyPr>
+          <a:lstStyle/>
+          <a:p>
+            <a:pPr algn="l">
+              <a:spcAft>
+                <a:spcPts val="600"/>
+              </a:spcAft>
+              <a:defRPr sz="1700" b="1">
+                <a:solidFill>
+                  <a:srgbClr val="F2F6FC"/>
+                </a:solidFill>
+                <a:latin typeface="Aptos"/>
+              </a:defRPr>
+            </a:pPr>
+            <a:r>
+              <a:t>Ingestion</a:t>
+            </a:r>
+          </a:p>
+        </p:txBody>
+      </p:sp>
+      <p:sp>
+        <p:nvSpPr>
+          <p:cNvPr id="9" name="TextBox 8"/>
+          <p:cNvSpPr txBox="1"/>
+          <p:nvPr/>
+        </p:nvSpPr>
+        <p:spPr>
+          <a:xfrm>
+            <a:off x="886968" y="2286000"/>
+            <a:ext cx="3090672" cy="2670048"/>
+          </a:xfrm>
+          <a:prstGeom prst="rect">
+            <a:avLst/>
+          </a:prstGeom>
+          <a:noFill/>
+        </p:spPr>
+        <p:txBody>
+          <a:bodyPr wrap="square" lIns="45720" rIns="45720">
+            <a:spAutoFit/>
+          </a:bodyPr>
+          <a:lstStyle/>
+          <a:p>
+            <a:pPr algn="l">
+              <a:spcAft>
+                <a:spcPts val="600"/>
+              </a:spcAft>
+              <a:defRPr sz="1400" b="0">
+                <a:solidFill>
+                  <a:srgbClr val="A5B1C2"/>
+                </a:solidFill>
+                <a:latin typeface="Aptos"/>
+              </a:defRPr>
+            </a:pPr>
+            <a:r>
+              <a:t>• Historical stock tweets</a:t>
+            </a:r>
+          </a:p>
+          <a:p>
+            <a:pPr algn="l">
+              <a:spcAft>
+                <a:spcPts val="600"/>
+              </a:spcAft>
+              <a:defRPr sz="1400" b="0">
+                <a:solidFill>
+                  <a:srgbClr val="A5B1C2"/>
+                </a:solidFill>
+                <a:latin typeface="Aptos"/>
+              </a:defRPr>
+            </a:pPr>
+            <a:r>
+              <a:t>• Processed GDELT bulk GKG metadata</a:t>
+            </a:r>
+          </a:p>
+          <a:p>
+            <a:pPr algn="l">
+              <a:spcAft>
+                <a:spcPts val="600"/>
+              </a:spcAft>
+              <a:defRPr sz="1400" b="0">
+                <a:solidFill>
+                  <a:srgbClr val="A5B1C2"/>
+                </a:solidFill>
+                <a:latin typeface="Aptos"/>
+              </a:defRPr>
+            </a:pPr>
+            <a:r>
+              <a:t>• Supplementary dated news CSV</a:t>
+            </a:r>
+          </a:p>
+          <a:p>
+            <a:pPr algn="l">
+              <a:spcAft>
+                <a:spcPts val="600"/>
+              </a:spcAft>
+              <a:defRPr sz="1400" b="0">
+                <a:solidFill>
+                  <a:srgbClr val="A5B1C2"/>
+                </a:solidFill>
+                <a:latin typeface="Aptos"/>
+              </a:defRPr>
+            </a:pPr>
+            <a:r>
+              <a:t>• Optional NewsAPI adapter</a:t>
+            </a:r>
+          </a:p>
+          <a:p>
+            <a:pPr algn="l">
+              <a:spcAft>
+                <a:spcPts val="600"/>
+              </a:spcAft>
+              <a:defRPr sz="1400" b="0">
+                <a:solidFill>
+                  <a:srgbClr val="A5B1C2"/>
+                </a:solidFill>
+                <a:latin typeface="Aptos"/>
+              </a:defRPr>
+            </a:pPr>
+          </a:p>
+          <a:p>
+            <a:pPr algn="l">
+              <a:spcAft>
+                <a:spcPts val="600"/>
+              </a:spcAft>
+              <a:defRPr sz="1400" b="0">
+                <a:solidFill>
+                  <a:srgbClr val="A5B1C2"/>
+                </a:solidFill>
+                <a:latin typeface="Aptos"/>
+              </a:defRPr>
+            </a:pPr>
+            <a:r>
+              <a:t>Each source maps into a common Document schema.</a:t>
+            </a:r>
+          </a:p>
+        </p:txBody>
+      </p:sp>
+      <p:sp>
+        <p:nvSpPr>
+          <p:cNvPr id="10" name="Rounded Rectangle 9"/>
           <p:cNvSpPr/>
           <p:nvPr/>
         </p:nvSpPr>
         <p:spPr>
           <a:xfrm>
-            <a:off x="731520" y="1737360"/>
-            <a:ext cx="73152" cy="1874519"/>
-          </a:xfrm>
-          <a:prstGeom prst="rect">
+            <a:off x="4343400" y="1691640"/>
+            <a:ext cx="3474720" cy="3383280"/>
+          </a:xfrm>
+          <a:prstGeom prst="roundRect">
             <a:avLst/>
           </a:prstGeom>
           <a:solidFill>
-            <a:srgbClr val="2463AA"/>
+            <a:srgbClr val="181F2A"/>
           </a:solidFill>
           <a:ln>
-            <a:noFill/>
+            <a:solidFill>
+              <a:srgbClr val="181F2A"/>
+            </a:solidFill>
           </a:ln>
         </p:spPr>
         <p:style>
@@ -5969,108 +6639,24 @@
       </p:sp>
       <p:sp>
         <p:nvSpPr>
-          <p:cNvPr id="10" name="TextBox 9"/>
-          <p:cNvSpPr txBox="1"/>
-          <p:nvPr/>
-        </p:nvSpPr>
-        <p:spPr>
-          <a:xfrm>
-            <a:off x="932688" y="1901952"/>
-            <a:ext cx="4754879" cy="384048"/>
-          </a:xfrm>
-          <a:prstGeom prst="rect">
-            <a:avLst/>
-          </a:prstGeom>
-          <a:noFill/>
-        </p:spPr>
-        <p:txBody>
-          <a:bodyPr wrap="square">
-            <a:spAutoFit/>
-          </a:bodyPr>
-          <a:lstStyle/>
-          <a:p>
-            <a:pPr>
-              <a:defRPr sz="1700" b="1">
-                <a:solidFill>
-                  <a:srgbClr val="14243E"/>
-                </a:solidFill>
-                <a:latin typeface="Aptos"/>
-              </a:defRPr>
-            </a:pPr>
-            <a:r>
-              <a:t>Structured output</a:t>
-            </a:r>
-          </a:p>
-        </p:txBody>
-      </p:sp>
-      <p:sp>
-        <p:nvSpPr>
-          <p:cNvPr id="11" name="TextBox 10"/>
-          <p:cNvSpPr txBox="1"/>
-          <p:nvPr/>
-        </p:nvSpPr>
-        <p:spPr>
-          <a:xfrm>
-            <a:off x="932688" y="2395728"/>
-            <a:ext cx="4754879" cy="1142999"/>
-          </a:xfrm>
-          <a:prstGeom prst="rect">
-            <a:avLst/>
-          </a:prstGeom>
-          <a:noFill/>
-        </p:spPr>
-        <p:txBody>
-          <a:bodyPr wrap="square">
-            <a:spAutoFit/>
-          </a:bodyPr>
-          <a:lstStyle/>
-          <a:p>
-            <a:pPr>
-              <a:defRPr sz="1300" b="0">
-                <a:solidFill>
-                  <a:srgbClr val="2A3441"/>
-                </a:solidFill>
-                <a:latin typeface="Aptos"/>
-              </a:defRPr>
-            </a:pPr>
-            <a:r>
-              <a:t>ticker + scope</a:t>
-            </a:r>
-            <a:br/>
-            <a:r>
-              <a:t>sentiment in [-1, 1]</a:t>
-            </a:r>
-            <a:br/>
-            <a:r>
-              <a:t>event type + impact in [1, 10]</a:t>
-            </a:r>
-            <a:br/>
-            <a:r>
-              <a:t>confidence + source + timestamp + rationale</a:t>
-            </a:r>
-          </a:p>
-        </p:txBody>
-      </p:sp>
-      <p:sp>
-        <p:nvSpPr>
-          <p:cNvPr id="12" name="Rounded Rectangle 11"/>
+          <p:cNvPr id="11" name="Rectangle 10"/>
           <p:cNvSpPr/>
           <p:nvPr/>
         </p:nvSpPr>
         <p:spPr>
           <a:xfrm>
-            <a:off x="6172200" y="1737360"/>
-            <a:ext cx="5120640" cy="1874519"/>
-          </a:xfrm>
-          <a:prstGeom prst="roundRect">
+            <a:off x="4343400" y="1691640"/>
+            <a:ext cx="64008" cy="3383280"/>
+          </a:xfrm>
+          <a:prstGeom prst="rect">
             <a:avLst/>
           </a:prstGeom>
           <a:solidFill>
-            <a:srgbClr val="F2F6FA"/>
+            <a:srgbClr val="5DE0E6"/>
           </a:solidFill>
           <a:ln>
             <a:solidFill>
-              <a:srgbClr val="DEE6EF"/>
+              <a:srgbClr val="5DE0E6"/>
             </a:solidFill>
           </a:ln>
         </p:spPr>
@@ -6098,23 +6684,167 @@
       </p:sp>
       <p:sp>
         <p:nvSpPr>
-          <p:cNvPr id="13" name="Rectangle 12"/>
+          <p:cNvPr id="12" name="TextBox 11"/>
+          <p:cNvSpPr txBox="1"/>
+          <p:nvPr/>
+        </p:nvSpPr>
+        <p:spPr>
+          <a:xfrm>
+            <a:off x="4544568" y="1856232"/>
+            <a:ext cx="3108960" cy="329184"/>
+          </a:xfrm>
+          <a:prstGeom prst="rect">
+            <a:avLst/>
+          </a:prstGeom>
+          <a:noFill/>
+        </p:spPr>
+        <p:txBody>
+          <a:bodyPr wrap="square" lIns="45720" rIns="45720">
+            <a:spAutoFit/>
+          </a:bodyPr>
+          <a:lstStyle/>
+          <a:p>
+            <a:pPr algn="l">
+              <a:spcAft>
+                <a:spcPts val="600"/>
+              </a:spcAft>
+              <a:defRPr sz="1700" b="1">
+                <a:solidFill>
+                  <a:srgbClr val="F2F6FC"/>
+                </a:solidFill>
+                <a:latin typeface="Aptos"/>
+              </a:defRPr>
+            </a:pPr>
+            <a:r>
+              <a:t>Signal generation</a:t>
+            </a:r>
+          </a:p>
+        </p:txBody>
+      </p:sp>
+      <p:sp>
+        <p:nvSpPr>
+          <p:cNvPr id="13" name="TextBox 12"/>
+          <p:cNvSpPr txBox="1"/>
+          <p:nvPr/>
+        </p:nvSpPr>
+        <p:spPr>
+          <a:xfrm>
+            <a:off x="4544568" y="2286000"/>
+            <a:ext cx="3090672" cy="2670048"/>
+          </a:xfrm>
+          <a:prstGeom prst="rect">
+            <a:avLst/>
+          </a:prstGeom>
+          <a:noFill/>
+        </p:spPr>
+        <p:txBody>
+          <a:bodyPr wrap="square" lIns="45720" rIns="45720">
+            <a:spAutoFit/>
+          </a:bodyPr>
+          <a:lstStyle/>
+          <a:p>
+            <a:pPr algn="l">
+              <a:spcAft>
+                <a:spcPts val="600"/>
+              </a:spcAft>
+              <a:defRPr sz="1400" b="0">
+                <a:solidFill>
+                  <a:srgbClr val="A5B1C2"/>
+                </a:solidFill>
+                <a:latin typeface="Aptos"/>
+              </a:defRPr>
+            </a:pPr>
+            <a:r>
+              <a:t>• Preprocessing + conservative entity linking</a:t>
+            </a:r>
+          </a:p>
+          <a:p>
+            <a:pPr algn="l">
+              <a:spcAft>
+                <a:spcPts val="600"/>
+              </a:spcAft>
+              <a:defRPr sz="1400" b="0">
+                <a:solidFill>
+                  <a:srgbClr val="A5B1C2"/>
+                </a:solidFill>
+                <a:latin typeface="Aptos"/>
+              </a:defRPr>
+            </a:pPr>
+            <a:r>
+              <a:t>• FinBERT sentiment when available</a:t>
+            </a:r>
+          </a:p>
+          <a:p>
+            <a:pPr algn="l">
+              <a:spcAft>
+                <a:spcPts val="600"/>
+              </a:spcAft>
+              <a:defRPr sz="1400" b="0">
+                <a:solidFill>
+                  <a:srgbClr val="A5B1C2"/>
+                </a:solidFill>
+                <a:latin typeface="Aptos"/>
+              </a:defRPr>
+            </a:pPr>
+            <a:r>
+              <a:t>• Zero-shot event classifier when available</a:t>
+            </a:r>
+          </a:p>
+          <a:p>
+            <a:pPr algn="l">
+              <a:spcAft>
+                <a:spcPts val="600"/>
+              </a:spcAft>
+              <a:defRPr sz="1400" b="0">
+                <a:solidFill>
+                  <a:srgbClr val="A5B1C2"/>
+                </a:solidFill>
+                <a:latin typeface="Aptos"/>
+              </a:defRPr>
+            </a:pPr>
+            <a:r>
+              <a:t>• Explainable heuristic impact score</a:t>
+            </a:r>
+          </a:p>
+          <a:p>
+            <a:pPr algn="l">
+              <a:spcAft>
+                <a:spcPts val="600"/>
+              </a:spcAft>
+              <a:defRPr sz="1400" b="0">
+                <a:solidFill>
+                  <a:srgbClr val="A5B1C2"/>
+                </a:solidFill>
+                <a:latin typeface="Aptos"/>
+              </a:defRPr>
+            </a:pPr>
+            <a:r>
+              <a:t>• Deterministic fallback for local smoke tests</a:t>
+            </a:r>
+          </a:p>
+        </p:txBody>
+      </p:sp>
+      <p:sp>
+        <p:nvSpPr>
+          <p:cNvPr id="14" name="Rounded Rectangle 13"/>
           <p:cNvSpPr/>
           <p:nvPr/>
         </p:nvSpPr>
         <p:spPr>
           <a:xfrm>
-            <a:off x="6172200" y="1737360"/>
-            <a:ext cx="73152" cy="1874519"/>
-          </a:xfrm>
-          <a:prstGeom prst="rect">
+            <a:off x="8001000" y="1691640"/>
+            <a:ext cx="3474720" cy="3383280"/>
+          </a:xfrm>
+          <a:prstGeom prst="roundRect">
             <a:avLst/>
           </a:prstGeom>
           <a:solidFill>
-            <a:srgbClr val="168F88"/>
+            <a:srgbClr val="181F2A"/>
           </a:solidFill>
           <a:ln>
-            <a:noFill/>
+            <a:solidFill>
+              <a:srgbClr val="181F2A"/>
+            </a:solidFill>
           </a:ln>
         </p:spPr>
         <p:style>
@@ -6141,14 +6871,59 @@
       </p:sp>
       <p:sp>
         <p:nvSpPr>
-          <p:cNvPr id="14" name="TextBox 13"/>
+          <p:cNvPr id="15" name="Rectangle 14"/>
+          <p:cNvSpPr/>
+          <p:nvPr/>
+        </p:nvSpPr>
+        <p:spPr>
+          <a:xfrm>
+            <a:off x="8001000" y="1691640"/>
+            <a:ext cx="64008" cy="3383280"/>
+          </a:xfrm>
+          <a:prstGeom prst="rect">
+            <a:avLst/>
+          </a:prstGeom>
+          <a:solidFill>
+            <a:srgbClr val="FFBE5C"/>
+          </a:solidFill>
+          <a:ln>
+            <a:solidFill>
+              <a:srgbClr val="FFBE5C"/>
+            </a:solidFill>
+          </a:ln>
+        </p:spPr>
+        <p:style>
+          <a:lnRef idx="1">
+            <a:schemeClr val="accent1"/>
+          </a:lnRef>
+          <a:fillRef idx="3">
+            <a:schemeClr val="accent1"/>
+          </a:fillRef>
+          <a:effectRef idx="2">
+            <a:schemeClr val="accent1"/>
+          </a:effectRef>
+          <a:fontRef idx="minor">
+            <a:schemeClr val="lt1"/>
+          </a:fontRef>
+        </p:style>
+        <p:txBody>
+          <a:bodyPr rtlCol="0" anchor="ctr"/>
+          <a:lstStyle/>
+          <a:p>
+            <a:pPr algn="ctr"/>
+          </a:p>
+        </p:txBody>
+      </p:sp>
+      <p:sp>
+        <p:nvSpPr>
+          <p:cNvPr id="16" name="TextBox 15"/>
           <p:cNvSpPr txBox="1"/>
           <p:nvPr/>
         </p:nvSpPr>
         <p:spPr>
           <a:xfrm>
-            <a:off x="6373368" y="1901952"/>
-            <a:ext cx="4754879" cy="384048"/>
+            <a:off x="8202168" y="1856232"/>
+            <a:ext cx="3108960" cy="329184"/>
           </a:xfrm>
           <a:prstGeom prst="rect">
             <a:avLst/>
@@ -6156,35 +6931,38 @@
           <a:noFill/>
         </p:spPr>
         <p:txBody>
-          <a:bodyPr wrap="square">
+          <a:bodyPr wrap="square" lIns="45720" rIns="45720">
             <a:spAutoFit/>
           </a:bodyPr>
           <a:lstStyle/>
           <a:p>
-            <a:pPr>
+            <a:pPr algn="l">
+              <a:spcAft>
+                <a:spcPts val="600"/>
+              </a:spcAft>
               <a:defRPr sz="1700" b="1">
                 <a:solidFill>
-                  <a:srgbClr val="14243E"/>
-                </a:solidFill>
-                <a:latin typeface="Aptos"/>
-              </a:defRPr>
-            </a:pPr>
-            <a:r>
-              <a:t>Model calibration</a:t>
-            </a:r>
-          </a:p>
-        </p:txBody>
-      </p:sp>
-      <p:sp>
-        <p:nvSpPr>
-          <p:cNvPr id="15" name="TextBox 14"/>
+                  <a:srgbClr val="F2F6FC"/>
+                </a:solidFill>
+                <a:latin typeface="Aptos"/>
+              </a:defRPr>
+            </a:pPr>
+            <a:r>
+              <a:t>Access and quality</a:t>
+            </a:r>
+          </a:p>
+        </p:txBody>
+      </p:sp>
+      <p:sp>
+        <p:nvSpPr>
+          <p:cNvPr id="17" name="TextBox 16"/>
           <p:cNvSpPr txBox="1"/>
           <p:nvPr/>
         </p:nvSpPr>
         <p:spPr>
           <a:xfrm>
-            <a:off x="6373368" y="2395728"/>
-            <a:ext cx="4754879" cy="1142999"/>
+            <a:off x="8202168" y="2286000"/>
+            <a:ext cx="3090672" cy="2670048"/>
           </a:xfrm>
           <a:prstGeom prst="rect">
             <a:avLst/>
@@ -6192,35 +6970,102 @@
           <a:noFill/>
         </p:spPr>
         <p:txBody>
-          <a:bodyPr wrap="square">
+          <a:bodyPr wrap="square" lIns="45720" rIns="45720">
             <a:spAutoFit/>
           </a:bodyPr>
           <a:lstStyle/>
           <a:p>
-            <a:pPr>
-              <a:defRPr sz="1300" b="0">
-                <a:solidFill>
-                  <a:srgbClr val="2A3441"/>
-                </a:solidFill>
-                <a:latin typeface="Aptos"/>
-              </a:defRPr>
-            </a:pPr>
-            <a:r>
-              <a:t>Exploratory 3-trading-day absolute abnormal-return magnitude model. The latest purged holdout showed Spearman ≈ 0.428 versus ≈ −0.302 for the original impact score.</a:t>
-            </a:r>
-          </a:p>
-        </p:txBody>
-      </p:sp>
-      <p:sp>
-        <p:nvSpPr>
-          <p:cNvPr id="16" name="TextBox 15"/>
+            <a:pPr algn="l">
+              <a:spcAft>
+                <a:spcPts val="600"/>
+              </a:spcAft>
+              <a:defRPr sz="1400" b="0">
+                <a:solidFill>
+                  <a:srgbClr val="A5B1C2"/>
+                </a:solidFill>
+                <a:latin typeface="Aptos"/>
+              </a:defRPr>
+            </a:pPr>
+            <a:r>
+              <a:t>• SQLite signal store</a:t>
+            </a:r>
+          </a:p>
+          <a:p>
+            <a:pPr algn="l">
+              <a:spcAft>
+                <a:spcPts val="600"/>
+              </a:spcAft>
+              <a:defRPr sz="1400" b="0">
+                <a:solidFill>
+                  <a:srgbClr val="A5B1C2"/>
+                </a:solidFill>
+                <a:latin typeface="Aptos"/>
+              </a:defRPr>
+            </a:pPr>
+            <a:r>
+              <a:t>• FastAPI query + aggregate endpoints</a:t>
+            </a:r>
+          </a:p>
+          <a:p>
+            <a:pPr algn="l">
+              <a:spcAft>
+                <a:spcPts val="600"/>
+              </a:spcAft>
+              <a:defRPr sz="1400" b="0">
+                <a:solidFill>
+                  <a:srgbClr val="A5B1C2"/>
+                </a:solidFill>
+                <a:latin typeface="Aptos"/>
+              </a:defRPr>
+            </a:pPr>
+            <a:r>
+              <a:t>• Scope separates company from market signals</a:t>
+            </a:r>
+          </a:p>
+          <a:p>
+            <a:pPr algn="l">
+              <a:spcAft>
+                <a:spcPts val="600"/>
+              </a:spcAft>
+              <a:defRPr sz="1400" b="0">
+                <a:solidFill>
+                  <a:srgbClr val="A5B1C2"/>
+                </a:solidFill>
+                <a:latin typeface="Aptos"/>
+              </a:defRPr>
+            </a:pPr>
+            <a:r>
+              <a:t>• Full-database analytics; recent rows limited for readability</a:t>
+            </a:r>
+          </a:p>
+          <a:p>
+            <a:pPr algn="l">
+              <a:spcAft>
+                <a:spcPts val="600"/>
+              </a:spcAft>
+              <a:defRPr sz="1400" b="0">
+                <a:solidFill>
+                  <a:srgbClr val="A5B1C2"/>
+                </a:solidFill>
+                <a:latin typeface="Aptos"/>
+              </a:defRPr>
+            </a:pPr>
+            <a:r>
+              <a:t>• Confidence is not a calibrated probability</a:t>
+            </a:r>
+          </a:p>
+        </p:txBody>
+      </p:sp>
+      <p:sp>
+        <p:nvSpPr>
+          <p:cNvPr id="18" name="TextBox 17"/>
           <p:cNvSpPr txBox="1"/>
           <p:nvPr/>
         </p:nvSpPr>
         <p:spPr>
           <a:xfrm>
-            <a:off x="822960" y="3977639"/>
-            <a:ext cx="10607040" cy="1828800"/>
+            <a:off x="868680" y="5486400"/>
+            <a:ext cx="10424160" cy="502920"/>
           </a:xfrm>
           <a:prstGeom prst="rect">
             <a:avLst/>
@@ -6228,56 +7073,24 @@
           <a:noFill/>
         </p:spPr>
         <p:txBody>
-          <a:bodyPr wrap="square">
+          <a:bodyPr wrap="square" lIns="45720" rIns="45720">
             <a:spAutoFit/>
           </a:bodyPr>
           <a:lstStyle/>
           <a:p>
-            <a:pPr>
-              <a:spcAft>
-                <a:spcPts val="1700"/>
-              </a:spcAft>
-              <a:defRPr sz="1600">
-                <a:solidFill>
-                  <a:srgbClr val="2A3441"/>
-                </a:solidFill>
-                <a:latin typeface="Aptos"/>
-              </a:defRPr>
-            </a:pPr>
-            <a:r>
-              <a:t>•  The learned score is a ranking/calibration signal, not a probability and not a directional return forecast.</a:t>
-            </a:r>
-          </a:p>
-          <a:p>
-            <a:pPr>
-              <a:spcAft>
-                <a:spcPts val="1700"/>
-              </a:spcAft>
-              <a:defRPr sz="1600">
-                <a:solidFill>
-                  <a:srgbClr val="2A3441"/>
-                </a:solidFill>
-                <a:latin typeface="Aptos"/>
-              </a:defRPr>
-            </a:pPr>
-            <a:r>
-              <a:t>•  Data coverage starts at 2021-09-30 for the current daily-price CSV; early signals are excluded from price-based calibration.</a:t>
-            </a:r>
-          </a:p>
-          <a:p>
-            <a:pPr>
-              <a:spcAft>
-                <a:spcPts val="1700"/>
-              </a:spcAft>
-              <a:defRPr sz="1600">
-                <a:solidFill>
-                  <a:srgbClr val="2A3441"/>
-                </a:solidFill>
-                <a:latin typeface="Aptos"/>
-              </a:defRPr>
-            </a:pPr>
-            <a:r>
-              <a:t>•  Keep the learned score labelled experimental pending further time-based validation.</a:t>
+            <a:pPr algn="ctr">
+              <a:spcAft>
+                <a:spcPts val="600"/>
+              </a:spcAft>
+              <a:defRPr sz="1400" b="1">
+                <a:solidFill>
+                  <a:srgbClr val="F2F6FC"/>
+                </a:solidFill>
+                <a:latin typeface="Aptos"/>
+              </a:defRPr>
+            </a:pPr>
+            <a:r>
+              <a:t>Current screenshot: 109,262 stored signals. Evaluation datasets without reliable timestamps remain separate from live ingestion.</a:t>
             </a:r>
           </a:p>
         </p:txBody>
@@ -6296,7 +7109,7 @@
     <p:bg>
       <p:bgPr>
         <a:solidFill>
-          <a:srgbClr val="FFFFFF"/>
+          <a:srgbClr val="0D1117"/>
         </a:solidFill>
         <a:effectLst/>
       </p:bgPr>
@@ -6310,23 +7123,103 @@
       <p:grpSpPr/>
       <p:sp>
         <p:nvSpPr>
-          <p:cNvPr id="2" name="Rectangle 1"/>
+          <p:cNvPr id="2" name="TextBox 1"/>
+          <p:cNvSpPr txBox="1"/>
+          <p:nvPr/>
+        </p:nvSpPr>
+        <p:spPr>
+          <a:xfrm>
+            <a:off x="594360" y="320040"/>
+            <a:ext cx="9875520" cy="228600"/>
+          </a:xfrm>
+          <a:prstGeom prst="rect">
+            <a:avLst/>
+          </a:prstGeom>
+          <a:noFill/>
+        </p:spPr>
+        <p:txBody>
+          <a:bodyPr wrap="square" lIns="45720" rIns="45720">
+            <a:spAutoFit/>
+          </a:bodyPr>
+          <a:lstStyle/>
+          <a:p>
+            <a:pPr algn="l">
+              <a:spcAft>
+                <a:spcPts val="600"/>
+              </a:spcAft>
+              <a:defRPr sz="1000" b="1">
+                <a:solidFill>
+                  <a:srgbClr val="5DE0E6"/>
+                </a:solidFill>
+                <a:latin typeface="Aptos"/>
+              </a:defRPr>
+            </a:pPr>
+            <a:r>
+              <a:t>04 / MODULE A</a:t>
+            </a:r>
+          </a:p>
+        </p:txBody>
+      </p:sp>
+      <p:sp>
+        <p:nvSpPr>
+          <p:cNvPr id="3" name="TextBox 2"/>
+          <p:cNvSpPr txBox="1"/>
+          <p:nvPr/>
+        </p:nvSpPr>
+        <p:spPr>
+          <a:xfrm>
+            <a:off x="594360" y="658368"/>
+            <a:ext cx="10972800" cy="566928"/>
+          </a:xfrm>
+          <a:prstGeom prst="rect">
+            <a:avLst/>
+          </a:prstGeom>
+          <a:noFill/>
+        </p:spPr>
+        <p:txBody>
+          <a:bodyPr wrap="square" lIns="45720" rIns="45720">
+            <a:spAutoFit/>
+          </a:bodyPr>
+          <a:lstStyle/>
+          <a:p>
+            <a:pPr algn="l">
+              <a:spcAft>
+                <a:spcPts val="600"/>
+              </a:spcAft>
+              <a:defRPr sz="2700" b="1">
+                <a:solidFill>
+                  <a:srgbClr val="F2F6FC"/>
+                </a:solidFill>
+                <a:latin typeface="Aptos"/>
+              </a:defRPr>
+            </a:pPr>
+            <a:r>
+              <a:t>Tactical index rebalancing</a:t>
+            </a:r>
+          </a:p>
+        </p:txBody>
+      </p:sp>
+      <p:sp>
+        <p:nvSpPr>
+          <p:cNvPr id="4" name="Rectangle 3"/>
           <p:cNvSpPr/>
           <p:nvPr/>
         </p:nvSpPr>
         <p:spPr>
           <a:xfrm>
-            <a:off x="0" y="0"/>
-            <a:ext cx="12191695" cy="146304"/>
+            <a:off x="594360" y="1307592"/>
+            <a:ext cx="960120" cy="50292"/>
           </a:xfrm>
           <a:prstGeom prst="rect">
             <a:avLst/>
           </a:prstGeom>
           <a:solidFill>
-            <a:srgbClr val="168F88"/>
+            <a:srgbClr val="63B3ED"/>
           </a:solidFill>
           <a:ln>
-            <a:noFill/>
+            <a:solidFill>
+              <a:srgbClr val="63B3ED"/>
+            </a:solidFill>
           </a:ln>
         </p:spPr>
         <p:style>
@@ -6353,14 +7246,14 @@
       </p:sp>
       <p:sp>
         <p:nvSpPr>
-          <p:cNvPr id="3" name="TextBox 2"/>
+          <p:cNvPr id="5" name="TextBox 4"/>
           <p:cNvSpPr txBox="1"/>
           <p:nvPr/>
         </p:nvSpPr>
         <p:spPr>
           <a:xfrm>
-            <a:off x="594360" y="384048"/>
-            <a:ext cx="10972800" cy="256032"/>
+            <a:off x="11155680" y="6473952"/>
+            <a:ext cx="457200" cy="182880"/>
           </a:xfrm>
           <a:prstGeom prst="rect">
             <a:avLst/>
@@ -6368,80 +7261,49 @@
           <a:noFill/>
         </p:spPr>
         <p:txBody>
-          <a:bodyPr wrap="square">
+          <a:bodyPr wrap="square" lIns="45720" rIns="45720">
             <a:spAutoFit/>
           </a:bodyPr>
           <a:lstStyle/>
           <a:p>
-            <a:pPr>
-              <a:defRPr sz="1100" b="1">
-                <a:solidFill>
-                  <a:srgbClr val="168F88"/>
-                </a:solidFill>
-                <a:latin typeface="Aptos"/>
-              </a:defRPr>
-            </a:pPr>
-            <a:r>
-              <a:t>04 / TACTICAL APPLICATION</a:t>
-            </a:r>
-          </a:p>
-        </p:txBody>
-      </p:sp>
-      <p:sp>
-        <p:nvSpPr>
-          <p:cNvPr id="4" name="TextBox 3"/>
-          <p:cNvSpPr txBox="1"/>
-          <p:nvPr/>
-        </p:nvSpPr>
-        <p:spPr>
-          <a:xfrm>
-            <a:off x="594360" y="713232"/>
-            <a:ext cx="10972800" cy="594360"/>
-          </a:xfrm>
-          <a:prstGeom prst="rect">
-            <a:avLst/>
-          </a:prstGeom>
-          <a:noFill/>
-        </p:spPr>
-        <p:txBody>
-          <a:bodyPr wrap="square">
-            <a:spAutoFit/>
-          </a:bodyPr>
-          <a:lstStyle/>
-          <a:p>
-            <a:pPr>
-              <a:defRPr sz="3000" b="1">
-                <a:solidFill>
-                  <a:srgbClr val="14243E"/>
-                </a:solidFill>
-                <a:latin typeface="Aptos"/>
-              </a:defRPr>
-            </a:pPr>
-            <a:r>
-              <a:t>Module A — Index Rebalancer</a:t>
-            </a:r>
-          </a:p>
-        </p:txBody>
-      </p:sp>
-      <p:sp>
-        <p:nvSpPr>
-          <p:cNvPr id="5" name="Rectangle 4"/>
+            <a:pPr algn="r">
+              <a:spcAft>
+                <a:spcPts val="600"/>
+              </a:spcAft>
+              <a:defRPr sz="1000" b="0">
+                <a:solidFill>
+                  <a:srgbClr val="A5B1C2"/>
+                </a:solidFill>
+                <a:latin typeface="Aptos"/>
+              </a:defRPr>
+            </a:pPr>
+            <a:r>
+              <a:t>5/7</a:t>
+            </a:r>
+          </a:p>
+        </p:txBody>
+      </p:sp>
+      <p:sp>
+        <p:nvSpPr>
+          <p:cNvPr id="6" name="Rounded Rectangle 5"/>
           <p:cNvSpPr/>
           <p:nvPr/>
         </p:nvSpPr>
         <p:spPr>
           <a:xfrm>
-            <a:off x="594360" y="1399032"/>
-            <a:ext cx="1005840" cy="50292"/>
-          </a:xfrm>
-          <a:prstGeom prst="rect">
+            <a:off x="685800" y="1691640"/>
+            <a:ext cx="3429000" cy="3520440"/>
+          </a:xfrm>
+          <a:prstGeom prst="roundRect">
             <a:avLst/>
           </a:prstGeom>
           <a:solidFill>
-            <a:srgbClr val="2463AA"/>
+            <a:srgbClr val="181F2A"/>
           </a:solidFill>
           <a:ln>
-            <a:noFill/>
+            <a:solidFill>
+              <a:srgbClr val="181F2A"/>
+            </a:solidFill>
           </a:ln>
         </p:spPr>
         <p:style>
@@ -6468,96 +7330,24 @@
       </p:sp>
       <p:sp>
         <p:nvSpPr>
-          <p:cNvPr id="6" name="TextBox 5"/>
-          <p:cNvSpPr txBox="1"/>
-          <p:nvPr/>
-        </p:nvSpPr>
-        <p:spPr>
-          <a:xfrm>
-            <a:off x="594360" y="6510528"/>
-            <a:ext cx="10058400" cy="182880"/>
-          </a:xfrm>
-          <a:prstGeom prst="rect">
-            <a:avLst/>
-          </a:prstGeom>
-          <a:noFill/>
-        </p:spPr>
-        <p:txBody>
-          <a:bodyPr wrap="square">
-            <a:spAutoFit/>
-          </a:bodyPr>
-          <a:lstStyle/>
-          <a:p>
-            <a:pPr>
-              <a:defRPr sz="800" b="1">
-                <a:solidFill>
-                  <a:srgbClr val="5F6C7B"/>
-                </a:solidFill>
-                <a:latin typeface="Aptos"/>
-              </a:defRPr>
-            </a:pPr>
-            <a:r>
-              <a:t>CODE TO CONNECT  •  S&amp;P GLOBAL &amp; CRISIL CAMPUS HACKATHON</a:t>
-            </a:r>
-          </a:p>
-        </p:txBody>
-      </p:sp>
-      <p:sp>
-        <p:nvSpPr>
-          <p:cNvPr id="7" name="TextBox 6"/>
-          <p:cNvSpPr txBox="1"/>
-          <p:nvPr/>
-        </p:nvSpPr>
-        <p:spPr>
-          <a:xfrm>
-            <a:off x="10972800" y="6473952"/>
-            <a:ext cx="594360" cy="228600"/>
-          </a:xfrm>
-          <a:prstGeom prst="rect">
-            <a:avLst/>
-          </a:prstGeom>
-          <a:noFill/>
-        </p:spPr>
-        <p:txBody>
-          <a:bodyPr wrap="square">
-            <a:spAutoFit/>
-          </a:bodyPr>
-          <a:lstStyle/>
-          <a:p>
-            <a:pPr>
-              <a:defRPr sz="900" b="0">
-                <a:solidFill>
-                  <a:srgbClr val="5F6C7B"/>
-                </a:solidFill>
-                <a:latin typeface="Aptos"/>
-              </a:defRPr>
-            </a:pPr>
-            <a:r>
-              <a:t>5</a:t>
-            </a:r>
-          </a:p>
-        </p:txBody>
-      </p:sp>
-      <p:sp>
-        <p:nvSpPr>
-          <p:cNvPr id="8" name="Rounded Rectangle 7"/>
+          <p:cNvPr id="7" name="Rectangle 6"/>
           <p:cNvSpPr/>
           <p:nvPr/>
         </p:nvSpPr>
         <p:spPr>
           <a:xfrm>
-            <a:off x="731520" y="1783080"/>
-            <a:ext cx="3383280" cy="2057400"/>
-          </a:xfrm>
-          <a:prstGeom prst="roundRect">
+            <a:off x="685800" y="1691640"/>
+            <a:ext cx="64008" cy="3520440"/>
+          </a:xfrm>
+          <a:prstGeom prst="rect">
             <a:avLst/>
           </a:prstGeom>
           <a:solidFill>
-            <a:srgbClr val="F2F6FA"/>
+            <a:srgbClr val="63B3ED"/>
           </a:solidFill>
           <a:ln>
             <a:solidFill>
-              <a:srgbClr val="DEE6EF"/>
+              <a:srgbClr val="63B3ED"/>
             </a:solidFill>
           </a:ln>
         </p:spPr>
@@ -6585,23 +7375,132 @@
       </p:sp>
       <p:sp>
         <p:nvSpPr>
-          <p:cNvPr id="9" name="Rectangle 8"/>
+          <p:cNvPr id="8" name="TextBox 7"/>
+          <p:cNvSpPr txBox="1"/>
+          <p:nvPr/>
+        </p:nvSpPr>
+        <p:spPr>
+          <a:xfrm>
+            <a:off x="886968" y="1856232"/>
+            <a:ext cx="3063240" cy="329184"/>
+          </a:xfrm>
+          <a:prstGeom prst="rect">
+            <a:avLst/>
+          </a:prstGeom>
+          <a:noFill/>
+        </p:spPr>
+        <p:txBody>
+          <a:bodyPr wrap="square" lIns="45720" rIns="45720">
+            <a:spAutoFit/>
+          </a:bodyPr>
+          <a:lstStyle/>
+          <a:p>
+            <a:pPr algn="l">
+              <a:spcAft>
+                <a:spcPts val="600"/>
+              </a:spcAft>
+              <a:defRPr sz="1700" b="1">
+                <a:solidFill>
+                  <a:srgbClr val="F2F6FC"/>
+                </a:solidFill>
+                <a:latin typeface="Aptos"/>
+              </a:defRPr>
+            </a:pPr>
+            <a:r>
+              <a:t>Inputs &amp; controls</a:t>
+            </a:r>
+          </a:p>
+        </p:txBody>
+      </p:sp>
+      <p:sp>
+        <p:nvSpPr>
+          <p:cNvPr id="9" name="TextBox 8"/>
+          <p:cNvSpPr txBox="1"/>
+          <p:nvPr/>
+        </p:nvSpPr>
+        <p:spPr>
+          <a:xfrm>
+            <a:off x="886968" y="2286000"/>
+            <a:ext cx="3044952" cy="2807208"/>
+          </a:xfrm>
+          <a:prstGeom prst="rect">
+            <a:avLst/>
+          </a:prstGeom>
+          <a:noFill/>
+        </p:spPr>
+        <p:txBody>
+          <a:bodyPr wrap="square" lIns="45720" rIns="45720">
+            <a:spAutoFit/>
+          </a:bodyPr>
+          <a:lstStyle/>
+          <a:p>
+            <a:pPr algn="l">
+              <a:spcAft>
+                <a:spcPts val="600"/>
+              </a:spcAft>
+              <a:defRPr sz="1400" b="0">
+                <a:solidFill>
+                  <a:srgbClr val="A5B1C2"/>
+                </a:solidFill>
+                <a:latin typeface="Aptos"/>
+              </a:defRPr>
+            </a:pPr>
+            <a:r>
+              <a:t>16 configured stocks; SPY benchmark-only.</a:t>
+            </a:r>
+          </a:p>
+          <a:p>
+            <a:pPr algn="l">
+              <a:spcAft>
+                <a:spcPts val="600"/>
+              </a:spcAft>
+              <a:defRPr sz="1400" b="0">
+                <a:solidFill>
+                  <a:srgbClr val="A5B1C2"/>
+                </a:solidFill>
+                <a:latin typeface="Aptos"/>
+              </a:defRPr>
+            </a:pPr>
+          </a:p>
+          <a:p>
+            <a:pPr algn="l">
+              <a:spcAft>
+                <a:spcPts val="600"/>
+              </a:spcAft>
+              <a:defRPr sz="1400" b="0">
+                <a:solidFill>
+                  <a:srgbClr val="A5B1C2"/>
+                </a:solidFill>
+                <a:latin typeface="Aptos"/>
+              </a:defRPr>
+            </a:pPr>
+            <a:r>
+              <a:t>7-day signal lookback • 48-hour half-life • 0.50 minimum confidence • 15% max stock weight • 10% one-way turnover cap.</a:t>
+            </a:r>
+          </a:p>
+        </p:txBody>
+      </p:sp>
+      <p:sp>
+        <p:nvSpPr>
+          <p:cNvPr id="10" name="Rounded Rectangle 9"/>
           <p:cNvSpPr/>
           <p:nvPr/>
         </p:nvSpPr>
         <p:spPr>
           <a:xfrm>
-            <a:off x="731520" y="1783080"/>
-            <a:ext cx="73152" cy="2057400"/>
-          </a:xfrm>
-          <a:prstGeom prst="rect">
+            <a:off x="4389120" y="1691640"/>
+            <a:ext cx="3429000" cy="3520440"/>
+          </a:xfrm>
+          <a:prstGeom prst="roundRect">
             <a:avLst/>
           </a:prstGeom>
           <a:solidFill>
-            <a:srgbClr val="2463AA"/>
+            <a:srgbClr val="181F2A"/>
           </a:solidFill>
           <a:ln>
-            <a:noFill/>
+            <a:solidFill>
+              <a:srgbClr val="181F2A"/>
+            </a:solidFill>
           </a:ln>
         </p:spPr>
         <p:style>
@@ -6628,108 +7527,24 @@
       </p:sp>
       <p:sp>
         <p:nvSpPr>
-          <p:cNvPr id="10" name="TextBox 9"/>
-          <p:cNvSpPr txBox="1"/>
-          <p:nvPr/>
-        </p:nvSpPr>
-        <p:spPr>
-          <a:xfrm>
-            <a:off x="932688" y="1947672"/>
-            <a:ext cx="3017520" cy="384048"/>
-          </a:xfrm>
-          <a:prstGeom prst="rect">
-            <a:avLst/>
-          </a:prstGeom>
-          <a:noFill/>
-        </p:spPr>
-        <p:txBody>
-          <a:bodyPr wrap="square">
-            <a:spAutoFit/>
-          </a:bodyPr>
-          <a:lstStyle/>
-          <a:p>
-            <a:pPr>
-              <a:defRPr sz="1700" b="1">
-                <a:solidFill>
-                  <a:srgbClr val="14243E"/>
-                </a:solidFill>
-                <a:latin typeface="Aptos"/>
-              </a:defRPr>
-            </a:pPr>
-            <a:r>
-              <a:t>Controls</a:t>
-            </a:r>
-          </a:p>
-        </p:txBody>
-      </p:sp>
-      <p:sp>
-        <p:nvSpPr>
-          <p:cNvPr id="11" name="TextBox 10"/>
-          <p:cNvSpPr txBox="1"/>
-          <p:nvPr/>
-        </p:nvSpPr>
-        <p:spPr>
-          <a:xfrm>
-            <a:off x="932688" y="2441448"/>
-            <a:ext cx="3017520" cy="1325880"/>
-          </a:xfrm>
-          <a:prstGeom prst="rect">
-            <a:avLst/>
-          </a:prstGeom>
-          <a:noFill/>
-        </p:spPr>
-        <p:txBody>
-          <a:bodyPr wrap="square">
-            <a:spAutoFit/>
-          </a:bodyPr>
-          <a:lstStyle/>
-          <a:p>
-            <a:pPr>
-              <a:defRPr sz="1300" b="0">
-                <a:solidFill>
-                  <a:srgbClr val="2A3441"/>
-                </a:solidFill>
-                <a:latin typeface="Aptos"/>
-              </a:defRPr>
-            </a:pPr>
-            <a:r>
-              <a:t>7-day signal lookback</a:t>
-            </a:r>
-            <a:br/>
-            <a:r>
-              <a:t>Confidence threshold</a:t>
-            </a:r>
-            <a:br/>
-            <a:r>
-              <a:t>Maximum single-name weight</a:t>
-            </a:r>
-            <a:br/>
-            <a:r>
-              <a:t>Maximum one-way turnover</a:t>
-            </a:r>
-          </a:p>
-        </p:txBody>
-      </p:sp>
-      <p:sp>
-        <p:nvSpPr>
-          <p:cNvPr id="12" name="Rounded Rectangle 11"/>
+          <p:cNvPr id="11" name="Rectangle 10"/>
           <p:cNvSpPr/>
           <p:nvPr/>
         </p:nvSpPr>
         <p:spPr>
           <a:xfrm>
-            <a:off x="4389120" y="1783080"/>
-            <a:ext cx="3383280" cy="2057400"/>
-          </a:xfrm>
-          <a:prstGeom prst="roundRect">
+            <a:off x="4389120" y="1691640"/>
+            <a:ext cx="64008" cy="3520440"/>
+          </a:xfrm>
+          <a:prstGeom prst="rect">
             <a:avLst/>
           </a:prstGeom>
           <a:solidFill>
-            <a:srgbClr val="F2F6FA"/>
+            <a:srgbClr val="5DE0E6"/>
           </a:solidFill>
           <a:ln>
             <a:solidFill>
-              <a:srgbClr val="DEE6EF"/>
+              <a:srgbClr val="5DE0E6"/>
             </a:solidFill>
           </a:ln>
         </p:spPr>
@@ -6757,23 +7572,190 @@
       </p:sp>
       <p:sp>
         <p:nvSpPr>
-          <p:cNvPr id="13" name="Rectangle 12"/>
+          <p:cNvPr id="12" name="TextBox 11"/>
+          <p:cNvSpPr txBox="1"/>
+          <p:nvPr/>
+        </p:nvSpPr>
+        <p:spPr>
+          <a:xfrm>
+            <a:off x="4590288" y="1856232"/>
+            <a:ext cx="3063240" cy="329184"/>
+          </a:xfrm>
+          <a:prstGeom prst="rect">
+            <a:avLst/>
+          </a:prstGeom>
+          <a:noFill/>
+        </p:spPr>
+        <p:txBody>
+          <a:bodyPr wrap="square" lIns="45720" rIns="45720">
+            <a:spAutoFit/>
+          </a:bodyPr>
+          <a:lstStyle/>
+          <a:p>
+            <a:pPr algn="l">
+              <a:spcAft>
+                <a:spcPts val="600"/>
+              </a:spcAft>
+              <a:defRPr sz="1700" b="1">
+                <a:solidFill>
+                  <a:srgbClr val="F2F6FC"/>
+                </a:solidFill>
+                <a:latin typeface="Aptos"/>
+              </a:defRPr>
+            </a:pPr>
+            <a:r>
+              <a:t>Observed dashboard run</a:t>
+            </a:r>
+          </a:p>
+        </p:txBody>
+      </p:sp>
+      <p:sp>
+        <p:nvSpPr>
+          <p:cNvPr id="13" name="TextBox 12"/>
+          <p:cNvSpPr txBox="1"/>
+          <p:nvPr/>
+        </p:nvSpPr>
+        <p:spPr>
+          <a:xfrm>
+            <a:off x="4590288" y="2286000"/>
+            <a:ext cx="3044952" cy="2807208"/>
+          </a:xfrm>
+          <a:prstGeom prst="rect">
+            <a:avLst/>
+          </a:prstGeom>
+          <a:noFill/>
+        </p:spPr>
+        <p:txBody>
+          <a:bodyPr wrap="square" lIns="45720" rIns="45720">
+            <a:spAutoFit/>
+          </a:bodyPr>
+          <a:lstStyle/>
+          <a:p>
+            <a:pPr algn="l">
+              <a:spcAft>
+                <a:spcPts val="600"/>
+              </a:spcAft>
+              <a:defRPr sz="1500" b="0">
+                <a:solidFill>
+                  <a:srgbClr val="A5B1C2"/>
+                </a:solidFill>
+                <a:latin typeface="Aptos"/>
+              </a:defRPr>
+            </a:pPr>
+            <a:r>
+              <a:t>Sentiment-tilted cumulative return: 108.68%</a:t>
+            </a:r>
+          </a:p>
+          <a:p>
+            <a:pPr algn="l">
+              <a:spcAft>
+                <a:spcPts val="600"/>
+              </a:spcAft>
+              <a:defRPr sz="1500" b="0">
+                <a:solidFill>
+                  <a:srgbClr val="A5B1C2"/>
+                </a:solidFill>
+                <a:latin typeface="Aptos"/>
+              </a:defRPr>
+            </a:pPr>
+          </a:p>
+          <a:p>
+            <a:pPr algn="l">
+              <a:spcAft>
+                <a:spcPts val="600"/>
+              </a:spcAft>
+              <a:defRPr sz="1500" b="0">
+                <a:solidFill>
+                  <a:srgbClr val="A5B1C2"/>
+                </a:solidFill>
+                <a:latin typeface="Aptos"/>
+              </a:defRPr>
+            </a:pPr>
+            <a:r>
+              <a:t>Static equal-weight: 109.60%</a:t>
+            </a:r>
+          </a:p>
+          <a:p>
+            <a:pPr algn="l">
+              <a:spcAft>
+                <a:spcPts val="600"/>
+              </a:spcAft>
+              <a:defRPr sz="1500" b="0">
+                <a:solidFill>
+                  <a:srgbClr val="A5B1C2"/>
+                </a:solidFill>
+                <a:latin typeface="Aptos"/>
+              </a:defRPr>
+            </a:pPr>
+          </a:p>
+          <a:p>
+            <a:pPr algn="l">
+              <a:spcAft>
+                <a:spcPts val="600"/>
+              </a:spcAft>
+              <a:defRPr sz="1500" b="0">
+                <a:solidFill>
+                  <a:srgbClr val="A5B1C2"/>
+                </a:solidFill>
+                <a:latin typeface="Aptos"/>
+              </a:defRPr>
+            </a:pPr>
+            <a:r>
+              <a:t>SPY buy-and-hold: 93.98%</a:t>
+            </a:r>
+          </a:p>
+          <a:p>
+            <a:pPr algn="l">
+              <a:spcAft>
+                <a:spcPts val="600"/>
+              </a:spcAft>
+              <a:defRPr sz="1500" b="0">
+                <a:solidFill>
+                  <a:srgbClr val="A5B1C2"/>
+                </a:solidFill>
+                <a:latin typeface="Aptos"/>
+              </a:defRPr>
+            </a:pPr>
+          </a:p>
+          <a:p>
+            <a:pPr algn="l">
+              <a:spcAft>
+                <a:spcPts val="600"/>
+              </a:spcAft>
+              <a:defRPr sz="1500" b="0">
+                <a:solidFill>
+                  <a:srgbClr val="A5B1C2"/>
+                </a:solidFill>
+                <a:latin typeface="Aptos"/>
+              </a:defRPr>
+            </a:pPr>
+            <a:r>
+              <a:t>1,262 price dates shown.</a:t>
+            </a:r>
+          </a:p>
+        </p:txBody>
+      </p:sp>
+      <p:sp>
+        <p:nvSpPr>
+          <p:cNvPr id="14" name="Rounded Rectangle 13"/>
           <p:cNvSpPr/>
           <p:nvPr/>
         </p:nvSpPr>
         <p:spPr>
           <a:xfrm>
-            <a:off x="4389120" y="1783080"/>
-            <a:ext cx="73152" cy="2057400"/>
-          </a:xfrm>
-          <a:prstGeom prst="rect">
+            <a:off x="8092440" y="1691640"/>
+            <a:ext cx="3429000" cy="3520440"/>
+          </a:xfrm>
+          <a:prstGeom prst="roundRect">
             <a:avLst/>
           </a:prstGeom>
           <a:solidFill>
-            <a:srgbClr val="168F88"/>
+            <a:srgbClr val="181F2A"/>
           </a:solidFill>
           <a:ln>
-            <a:noFill/>
+            <a:solidFill>
+              <a:srgbClr val="181F2A"/>
+            </a:solidFill>
           </a:ln>
         </p:spPr>
         <p:style>
@@ -6800,96 +7782,24 @@
       </p:sp>
       <p:sp>
         <p:nvSpPr>
-          <p:cNvPr id="14" name="TextBox 13"/>
-          <p:cNvSpPr txBox="1"/>
-          <p:nvPr/>
-        </p:nvSpPr>
-        <p:spPr>
-          <a:xfrm>
-            <a:off x="4590288" y="1947672"/>
-            <a:ext cx="3017520" cy="384048"/>
-          </a:xfrm>
-          <a:prstGeom prst="rect">
-            <a:avLst/>
-          </a:prstGeom>
-          <a:noFill/>
-        </p:spPr>
-        <p:txBody>
-          <a:bodyPr wrap="square">
-            <a:spAutoFit/>
-          </a:bodyPr>
-          <a:lstStyle/>
-          <a:p>
-            <a:pPr>
-              <a:defRPr sz="1700" b="1">
-                <a:solidFill>
-                  <a:srgbClr val="14243E"/>
-                </a:solidFill>
-                <a:latin typeface="Aptos"/>
-              </a:defRPr>
-            </a:pPr>
-            <a:r>
-              <a:t>Comparison</a:t>
-            </a:r>
-          </a:p>
-        </p:txBody>
-      </p:sp>
-      <p:sp>
-        <p:nvSpPr>
-          <p:cNvPr id="15" name="TextBox 14"/>
-          <p:cNvSpPr txBox="1"/>
-          <p:nvPr/>
-        </p:nvSpPr>
-        <p:spPr>
-          <a:xfrm>
-            <a:off x="4590288" y="2441448"/>
-            <a:ext cx="3017520" cy="1325880"/>
-          </a:xfrm>
-          <a:prstGeom prst="rect">
-            <a:avLst/>
-          </a:prstGeom>
-          <a:noFill/>
-        </p:spPr>
-        <p:txBody>
-          <a:bodyPr wrap="square">
-            <a:spAutoFit/>
-          </a:bodyPr>
-          <a:lstStyle/>
-          <a:p>
-            <a:pPr>
-              <a:defRPr sz="1300" b="0">
-                <a:solidFill>
-                  <a:srgbClr val="2A3441"/>
-                </a:solidFill>
-                <a:latin typeface="Aptos"/>
-              </a:defRPr>
-            </a:pPr>
-            <a:r>
-              <a:t>Sentiment-tilted index vs static equal-weight benchmark. Weights use lagged signals to reduce same-day lookahead.</a:t>
-            </a:r>
-          </a:p>
-        </p:txBody>
-      </p:sp>
-      <p:sp>
-        <p:nvSpPr>
-          <p:cNvPr id="16" name="Rounded Rectangle 15"/>
+          <p:cNvPr id="15" name="Rectangle 14"/>
           <p:cNvSpPr/>
           <p:nvPr/>
         </p:nvSpPr>
         <p:spPr>
           <a:xfrm>
-            <a:off x="8046720" y="1783080"/>
-            <a:ext cx="3383280" cy="2057400"/>
-          </a:xfrm>
-          <a:prstGeom prst="roundRect">
+            <a:off x="8092440" y="1691640"/>
+            <a:ext cx="64008" cy="3520440"/>
+          </a:xfrm>
+          <a:prstGeom prst="rect">
             <a:avLst/>
           </a:prstGeom>
           <a:solidFill>
-            <a:srgbClr val="F2F6FA"/>
+            <a:srgbClr val="FFBE5C"/>
           </a:solidFill>
           <a:ln>
             <a:solidFill>
-              <a:srgbClr val="DEE6EF"/>
+              <a:srgbClr val="FFBE5C"/>
             </a:solidFill>
           </a:ln>
         </p:spPr>
@@ -6917,44 +7827,108 @@
       </p:sp>
       <p:sp>
         <p:nvSpPr>
-          <p:cNvPr id="17" name="Rectangle 16"/>
-          <p:cNvSpPr/>
-          <p:nvPr/>
-        </p:nvSpPr>
-        <p:spPr>
-          <a:xfrm>
-            <a:off x="8046720" y="1783080"/>
-            <a:ext cx="73152" cy="2057400"/>
-          </a:xfrm>
-          <a:prstGeom prst="rect">
-            <a:avLst/>
-          </a:prstGeom>
-          <a:solidFill>
-            <a:srgbClr val="C67E20"/>
-          </a:solidFill>
-          <a:ln>
-            <a:noFill/>
-          </a:ln>
-        </p:spPr>
-        <p:style>
-          <a:lnRef idx="1">
-            <a:schemeClr val="accent1"/>
-          </a:lnRef>
-          <a:fillRef idx="3">
-            <a:schemeClr val="accent1"/>
-          </a:fillRef>
-          <a:effectRef idx="2">
-            <a:schemeClr val="accent1"/>
-          </a:effectRef>
-          <a:fontRef idx="minor">
-            <a:schemeClr val="lt1"/>
-          </a:fontRef>
-        </p:style>
-        <p:txBody>
-          <a:bodyPr rtlCol="0" anchor="ctr"/>
-          <a:lstStyle/>
-          <a:p>
-            <a:pPr algn="ctr"/>
+          <p:cNvPr id="16" name="TextBox 15"/>
+          <p:cNvSpPr txBox="1"/>
+          <p:nvPr/>
+        </p:nvSpPr>
+        <p:spPr>
+          <a:xfrm>
+            <a:off x="8293608" y="1856232"/>
+            <a:ext cx="3063240" cy="329184"/>
+          </a:xfrm>
+          <a:prstGeom prst="rect">
+            <a:avLst/>
+          </a:prstGeom>
+          <a:noFill/>
+        </p:spPr>
+        <p:txBody>
+          <a:bodyPr wrap="square" lIns="45720" rIns="45720">
+            <a:spAutoFit/>
+          </a:bodyPr>
+          <a:lstStyle/>
+          <a:p>
+            <a:pPr algn="l">
+              <a:spcAft>
+                <a:spcPts val="600"/>
+              </a:spcAft>
+              <a:defRPr sz="1700" b="1">
+                <a:solidFill>
+                  <a:srgbClr val="F2F6FC"/>
+                </a:solidFill>
+                <a:latin typeface="Aptos"/>
+              </a:defRPr>
+            </a:pPr>
+            <a:r>
+              <a:t>Interpretation</a:t>
+            </a:r>
+          </a:p>
+        </p:txBody>
+      </p:sp>
+      <p:sp>
+        <p:nvSpPr>
+          <p:cNvPr id="17" name="TextBox 16"/>
+          <p:cNvSpPr txBox="1"/>
+          <p:nvPr/>
+        </p:nvSpPr>
+        <p:spPr>
+          <a:xfrm>
+            <a:off x="8293608" y="2286000"/>
+            <a:ext cx="3044952" cy="2807208"/>
+          </a:xfrm>
+          <a:prstGeom prst="rect">
+            <a:avLst/>
+          </a:prstGeom>
+          <a:noFill/>
+        </p:spPr>
+        <p:txBody>
+          <a:bodyPr wrap="square" lIns="45720" rIns="45720">
+            <a:spAutoFit/>
+          </a:bodyPr>
+          <a:lstStyle/>
+          <a:p>
+            <a:pPr algn="l">
+              <a:spcAft>
+                <a:spcPts val="600"/>
+              </a:spcAft>
+              <a:defRPr sz="1400" b="0">
+                <a:solidFill>
+                  <a:srgbClr val="A5B1C2"/>
+                </a:solidFill>
+                <a:latin typeface="Aptos"/>
+              </a:defRPr>
+            </a:pPr>
+            <a:r>
+              <a:t>The sentiment strategy was slightly below static equal weight in the captured run.</a:t>
+            </a:r>
+          </a:p>
+          <a:p>
+            <a:pPr algn="l">
+              <a:spcAft>
+                <a:spcPts val="600"/>
+              </a:spcAft>
+              <a:defRPr sz="1400" b="0">
+                <a:solidFill>
+                  <a:srgbClr val="A5B1C2"/>
+                </a:solidFill>
+                <a:latin typeface="Aptos"/>
+              </a:defRPr>
+            </a:pPr>
+          </a:p>
+          <a:p>
+            <a:pPr algn="l">
+              <a:spcAft>
+                <a:spcPts val="600"/>
+              </a:spcAft>
+              <a:defRPr sz="1400" b="0">
+                <a:solidFill>
+                  <a:srgbClr val="A5B1C2"/>
+                </a:solidFill>
+                <a:latin typeface="Aptos"/>
+              </a:defRPr>
+            </a:pPr>
+            <a:r>
+              <a:t>Signals are lagged relative to returns. Transaction costs are excluded; this is a backtest, not live execution.</a:t>
+            </a:r>
           </a:p>
         </p:txBody>
       </p:sp>
@@ -6966,8 +7940,8 @@
         </p:nvSpPr>
         <p:spPr>
           <a:xfrm>
-            <a:off x="8247888" y="1947672"/>
-            <a:ext cx="3017520" cy="384048"/>
+            <a:off x="822960" y="5669280"/>
+            <a:ext cx="10607040" cy="365760"/>
           </a:xfrm>
           <a:prstGeom prst="rect">
             <a:avLst/>
@@ -6975,137 +7949,24 @@
           <a:noFill/>
         </p:spPr>
         <p:txBody>
-          <a:bodyPr wrap="square">
+          <a:bodyPr wrap="square" lIns="45720" rIns="45720">
             <a:spAutoFit/>
           </a:bodyPr>
           <a:lstStyle/>
           <a:p>
-            <a:pPr>
-              <a:defRPr sz="1700" b="1">
-                <a:solidFill>
-                  <a:srgbClr val="14243E"/>
-                </a:solidFill>
-                <a:latin typeface="Aptos"/>
-              </a:defRPr>
-            </a:pPr>
-            <a:r>
-              <a:t>Outputs</a:t>
-            </a:r>
-          </a:p>
-        </p:txBody>
-      </p:sp>
-      <p:sp>
-        <p:nvSpPr>
-          <p:cNvPr id="19" name="TextBox 18"/>
-          <p:cNvSpPr txBox="1"/>
-          <p:nvPr/>
-        </p:nvSpPr>
-        <p:spPr>
-          <a:xfrm>
-            <a:off x="8247888" y="2441448"/>
-            <a:ext cx="3017520" cy="1325880"/>
-          </a:xfrm>
-          <a:prstGeom prst="rect">
-            <a:avLst/>
-          </a:prstGeom>
-          <a:noFill/>
-        </p:spPr>
-        <p:txBody>
-          <a:bodyPr wrap="square">
-            <a:spAutoFit/>
-          </a:bodyPr>
-          <a:lstStyle/>
-          <a:p>
-            <a:pPr>
+            <a:pPr algn="ctr">
+              <a:spcAft>
+                <a:spcPts val="600"/>
+              </a:spcAft>
               <a:defRPr sz="1300" b="0">
                 <a:solidFill>
-                  <a:srgbClr val="2A3441"/>
-                </a:solidFill>
-                <a:latin typeface="Aptos"/>
-              </a:defRPr>
-            </a:pPr>
-            <a:r>
-              <a:t>data/processed/phase6/weights_over_time.csv</a:t>
-            </a:r>
-            <a:br/>
-            <a:r>
-              <a:t>performance_comparison.csv</a:t>
-            </a:r>
-            <a:br/>
-            <a:r>
-              <a:t>performance_summary.json</a:t>
-            </a:r>
-          </a:p>
-        </p:txBody>
-      </p:sp>
-      <p:sp>
-        <p:nvSpPr>
-          <p:cNvPr id="20" name="TextBox 19"/>
-          <p:cNvSpPr txBox="1"/>
-          <p:nvPr/>
-        </p:nvSpPr>
-        <p:spPr>
-          <a:xfrm>
-            <a:off x="822960" y="4389120"/>
-            <a:ext cx="10607040" cy="502920"/>
-          </a:xfrm>
-          <a:prstGeom prst="rect">
-            <a:avLst/>
-          </a:prstGeom>
-          <a:noFill/>
-        </p:spPr>
-        <p:txBody>
-          <a:bodyPr wrap="square">
-            <a:spAutoFit/>
-          </a:bodyPr>
-          <a:lstStyle/>
-          <a:p>
-            <a:pPr>
-              <a:defRPr sz="1600" b="1">
-                <a:solidFill>
-                  <a:srgbClr val="C67E20"/>
-                </a:solidFill>
-                <a:latin typeface="Aptos"/>
-              </a:defRPr>
-            </a:pPr>
-            <a:r>
-              <a:t>INSERT FINAL BACKTEST RESULTS AFTER RUNNING: python -m scripts.run_rebalancer</a:t>
-            </a:r>
-          </a:p>
-        </p:txBody>
-      </p:sp>
-      <p:sp>
-        <p:nvSpPr>
-          <p:cNvPr id="21" name="TextBox 20"/>
-          <p:cNvSpPr txBox="1"/>
-          <p:nvPr/>
-        </p:nvSpPr>
-        <p:spPr>
-          <a:xfrm>
-            <a:off x="822960" y="5029200"/>
-            <a:ext cx="10515600" cy="731520"/>
-          </a:xfrm>
-          <a:prstGeom prst="rect">
-            <a:avLst/>
-          </a:prstGeom>
-          <a:noFill/>
-        </p:spPr>
-        <p:txBody>
-          <a:bodyPr wrap="square">
-            <a:spAutoFit/>
-          </a:bodyPr>
-          <a:lstStyle/>
-          <a:p>
-            <a:pPr>
-              <a:defRPr sz="1600" b="0">
-                <a:solidFill>
-                  <a:srgbClr val="2A3441"/>
-                </a:solidFill>
-                <a:latin typeface="Aptos"/>
-              </a:defRPr>
-            </a:pPr>
-            <a:r>
-              <a:t>Report actual cumulative return, volatility, drawdown, turnover, and the chosen historical period. Transaction costs are currently omitted.</a:t>
+                  <a:srgbClr val="A5B1C2"/>
+                </a:solidFill>
+                <a:latin typeface="Aptos"/>
+              </a:defRPr>
+            </a:pPr>
+            <a:r>
+              <a:t>Refresh all performance figures after the final clean run before submission.</a:t>
             </a:r>
           </a:p>
         </p:txBody>
@@ -7124,7 +7985,7 @@
     <p:bg>
       <p:bgPr>
         <a:solidFill>
-          <a:srgbClr val="FFFFFF"/>
+          <a:srgbClr val="0D1117"/>
         </a:solidFill>
         <a:effectLst/>
       </p:bgPr>
@@ -7138,23 +7999,103 @@
       <p:grpSpPr/>
       <p:sp>
         <p:nvSpPr>
-          <p:cNvPr id="2" name="Rectangle 1"/>
+          <p:cNvPr id="2" name="TextBox 1"/>
+          <p:cNvSpPr txBox="1"/>
+          <p:nvPr/>
+        </p:nvSpPr>
+        <p:spPr>
+          <a:xfrm>
+            <a:off x="594360" y="320040"/>
+            <a:ext cx="9875520" cy="228600"/>
+          </a:xfrm>
+          <a:prstGeom prst="rect">
+            <a:avLst/>
+          </a:prstGeom>
+          <a:noFill/>
+        </p:spPr>
+        <p:txBody>
+          <a:bodyPr wrap="square" lIns="45720" rIns="45720">
+            <a:spAutoFit/>
+          </a:bodyPr>
+          <a:lstStyle/>
+          <a:p>
+            <a:pPr algn="l">
+              <a:spcAft>
+                <a:spcPts val="600"/>
+              </a:spcAft>
+              <a:defRPr sz="1000" b="1">
+                <a:solidFill>
+                  <a:srgbClr val="5DE0E6"/>
+                </a:solidFill>
+                <a:latin typeface="Aptos"/>
+              </a:defRPr>
+            </a:pPr>
+            <a:r>
+              <a:t>05 / MODULE B</a:t>
+            </a:r>
+          </a:p>
+        </p:txBody>
+      </p:sp>
+      <p:sp>
+        <p:nvSpPr>
+          <p:cNvPr id="3" name="TextBox 2"/>
+          <p:cNvSpPr txBox="1"/>
+          <p:nvPr/>
+        </p:nvSpPr>
+        <p:spPr>
+          <a:xfrm>
+            <a:off x="594360" y="658368"/>
+            <a:ext cx="10972800" cy="566928"/>
+          </a:xfrm>
+          <a:prstGeom prst="rect">
+            <a:avLst/>
+          </a:prstGeom>
+          <a:noFill/>
+        </p:spPr>
+        <p:txBody>
+          <a:bodyPr wrap="square" lIns="45720" rIns="45720">
+            <a:spAutoFit/>
+          </a:bodyPr>
+          <a:lstStyle/>
+          <a:p>
+            <a:pPr algn="l">
+              <a:spcAft>
+                <a:spcPts val="600"/>
+              </a:spcAft>
+              <a:defRPr sz="2700" b="1">
+                <a:solidFill>
+                  <a:srgbClr val="F2F6FC"/>
+                </a:solidFill>
+                <a:latin typeface="Aptos"/>
+              </a:defRPr>
+            </a:pPr>
+            <a:r>
+              <a:t>Event-driven wholesale portfolio stress testing</a:t>
+            </a:r>
+          </a:p>
+        </p:txBody>
+      </p:sp>
+      <p:sp>
+        <p:nvSpPr>
+          <p:cNvPr id="4" name="Rectangle 3"/>
           <p:cNvSpPr/>
           <p:nvPr/>
         </p:nvSpPr>
         <p:spPr>
           <a:xfrm>
-            <a:off x="0" y="0"/>
-            <a:ext cx="12191695" cy="146304"/>
+            <a:off x="594360" y="1307592"/>
+            <a:ext cx="960120" cy="50292"/>
           </a:xfrm>
           <a:prstGeom prst="rect">
             <a:avLst/>
           </a:prstGeom>
           <a:solidFill>
-            <a:srgbClr val="168F88"/>
+            <a:srgbClr val="63B3ED"/>
           </a:solidFill>
           <a:ln>
-            <a:noFill/>
+            <a:solidFill>
+              <a:srgbClr val="63B3ED"/>
+            </a:solidFill>
           </a:ln>
         </p:spPr>
         <p:style>
@@ -7181,14 +8122,14 @@
       </p:sp>
       <p:sp>
         <p:nvSpPr>
-          <p:cNvPr id="3" name="TextBox 2"/>
+          <p:cNvPr id="5" name="TextBox 4"/>
           <p:cNvSpPr txBox="1"/>
           <p:nvPr/>
         </p:nvSpPr>
         <p:spPr>
           <a:xfrm>
-            <a:off x="594360" y="384048"/>
-            <a:ext cx="10972800" cy="256032"/>
+            <a:off x="11155680" y="6473952"/>
+            <a:ext cx="457200" cy="182880"/>
           </a:xfrm>
           <a:prstGeom prst="rect">
             <a:avLst/>
@@ -7196,80 +8137,49 @@
           <a:noFill/>
         </p:spPr>
         <p:txBody>
-          <a:bodyPr wrap="square">
+          <a:bodyPr wrap="square" lIns="45720" rIns="45720">
             <a:spAutoFit/>
           </a:bodyPr>
           <a:lstStyle/>
           <a:p>
-            <a:pPr>
-              <a:defRPr sz="1100" b="1">
-                <a:solidFill>
-                  <a:srgbClr val="168F88"/>
-                </a:solidFill>
-                <a:latin typeface="Aptos"/>
-              </a:defRPr>
-            </a:pPr>
-            <a:r>
-              <a:t>05 / STRATEGIC APPLICATION</a:t>
-            </a:r>
-          </a:p>
-        </p:txBody>
-      </p:sp>
-      <p:sp>
-        <p:nvSpPr>
-          <p:cNvPr id="4" name="TextBox 3"/>
-          <p:cNvSpPr txBox="1"/>
-          <p:nvPr/>
-        </p:nvSpPr>
-        <p:spPr>
-          <a:xfrm>
-            <a:off x="594360" y="713232"/>
-            <a:ext cx="10972800" cy="594360"/>
-          </a:xfrm>
-          <a:prstGeom prst="rect">
-            <a:avLst/>
-          </a:prstGeom>
-          <a:noFill/>
-        </p:spPr>
-        <p:txBody>
-          <a:bodyPr wrap="square">
-            <a:spAutoFit/>
-          </a:bodyPr>
-          <a:lstStyle/>
-          <a:p>
-            <a:pPr>
-              <a:defRPr sz="3000" b="1">
-                <a:solidFill>
-                  <a:srgbClr val="14243E"/>
-                </a:solidFill>
-                <a:latin typeface="Aptos"/>
-              </a:defRPr>
-            </a:pPr>
-            <a:r>
-              <a:t>Module B — Stress Tester</a:t>
-            </a:r>
-          </a:p>
-        </p:txBody>
-      </p:sp>
-      <p:sp>
-        <p:nvSpPr>
-          <p:cNvPr id="5" name="Rectangle 4"/>
+            <a:pPr algn="r">
+              <a:spcAft>
+                <a:spcPts val="600"/>
+              </a:spcAft>
+              <a:defRPr sz="1000" b="0">
+                <a:solidFill>
+                  <a:srgbClr val="A5B1C2"/>
+                </a:solidFill>
+                <a:latin typeface="Aptos"/>
+              </a:defRPr>
+            </a:pPr>
+            <a:r>
+              <a:t>6/7</a:t>
+            </a:r>
+          </a:p>
+        </p:txBody>
+      </p:sp>
+      <p:sp>
+        <p:nvSpPr>
+          <p:cNvPr id="6" name="Rounded Rectangle 5"/>
           <p:cNvSpPr/>
           <p:nvPr/>
         </p:nvSpPr>
         <p:spPr>
           <a:xfrm>
-            <a:off x="594360" y="1399032"/>
-            <a:ext cx="1005840" cy="50292"/>
-          </a:xfrm>
-          <a:prstGeom prst="rect">
+            <a:off x="685800" y="1691640"/>
+            <a:ext cx="3429000" cy="3520440"/>
+          </a:xfrm>
+          <a:prstGeom prst="roundRect">
             <a:avLst/>
           </a:prstGeom>
           <a:solidFill>
-            <a:srgbClr val="2463AA"/>
+            <a:srgbClr val="181F2A"/>
           </a:solidFill>
           <a:ln>
-            <a:noFill/>
+            <a:solidFill>
+              <a:srgbClr val="181F2A"/>
+            </a:solidFill>
           </a:ln>
         </p:spPr>
         <p:style>
@@ -7296,96 +8206,24 @@
       </p:sp>
       <p:sp>
         <p:nvSpPr>
-          <p:cNvPr id="6" name="TextBox 5"/>
-          <p:cNvSpPr txBox="1"/>
-          <p:nvPr/>
-        </p:nvSpPr>
-        <p:spPr>
-          <a:xfrm>
-            <a:off x="594360" y="6510528"/>
-            <a:ext cx="10058400" cy="182880"/>
-          </a:xfrm>
-          <a:prstGeom prst="rect">
-            <a:avLst/>
-          </a:prstGeom>
-          <a:noFill/>
-        </p:spPr>
-        <p:txBody>
-          <a:bodyPr wrap="square">
-            <a:spAutoFit/>
-          </a:bodyPr>
-          <a:lstStyle/>
-          <a:p>
-            <a:pPr>
-              <a:defRPr sz="800" b="1">
-                <a:solidFill>
-                  <a:srgbClr val="5F6C7B"/>
-                </a:solidFill>
-                <a:latin typeface="Aptos"/>
-              </a:defRPr>
-            </a:pPr>
-            <a:r>
-              <a:t>CODE TO CONNECT  •  S&amp;P GLOBAL &amp; CRISIL CAMPUS HACKATHON</a:t>
-            </a:r>
-          </a:p>
-        </p:txBody>
-      </p:sp>
-      <p:sp>
-        <p:nvSpPr>
-          <p:cNvPr id="7" name="TextBox 6"/>
-          <p:cNvSpPr txBox="1"/>
-          <p:nvPr/>
-        </p:nvSpPr>
-        <p:spPr>
-          <a:xfrm>
-            <a:off x="10972800" y="6473952"/>
-            <a:ext cx="594360" cy="228600"/>
-          </a:xfrm>
-          <a:prstGeom prst="rect">
-            <a:avLst/>
-          </a:prstGeom>
-          <a:noFill/>
-        </p:spPr>
-        <p:txBody>
-          <a:bodyPr wrap="square">
-            <a:spAutoFit/>
-          </a:bodyPr>
-          <a:lstStyle/>
-          <a:p>
-            <a:pPr>
-              <a:defRPr sz="900" b="0">
-                <a:solidFill>
-                  <a:srgbClr val="5F6C7B"/>
-                </a:solidFill>
-                <a:latin typeface="Aptos"/>
-              </a:defRPr>
-            </a:pPr>
-            <a:r>
-              <a:t>6</a:t>
-            </a:r>
-          </a:p>
-        </p:txBody>
-      </p:sp>
-      <p:sp>
-        <p:nvSpPr>
-          <p:cNvPr id="8" name="Rounded Rectangle 7"/>
+          <p:cNvPr id="7" name="Rectangle 6"/>
           <p:cNvSpPr/>
           <p:nvPr/>
         </p:nvSpPr>
         <p:spPr>
           <a:xfrm>
-            <a:off x="731520" y="1783080"/>
-            <a:ext cx="3383280" cy="2057400"/>
-          </a:xfrm>
-          <a:prstGeom prst="roundRect">
+            <a:off x="685800" y="1691640"/>
+            <a:ext cx="64008" cy="3520440"/>
+          </a:xfrm>
+          <a:prstGeom prst="rect">
             <a:avLst/>
           </a:prstGeom>
           <a:solidFill>
-            <a:srgbClr val="F2F6FA"/>
+            <a:srgbClr val="63B3ED"/>
           </a:solidFill>
           <a:ln>
             <a:solidFill>
-              <a:srgbClr val="DEE6EF"/>
+              <a:srgbClr val="63B3ED"/>
             </a:solidFill>
           </a:ln>
         </p:spPr>
@@ -7413,23 +8251,132 @@
       </p:sp>
       <p:sp>
         <p:nvSpPr>
-          <p:cNvPr id="9" name="Rectangle 8"/>
+          <p:cNvPr id="8" name="TextBox 7"/>
+          <p:cNvSpPr txBox="1"/>
+          <p:nvPr/>
+        </p:nvSpPr>
+        <p:spPr>
+          <a:xfrm>
+            <a:off x="886968" y="1856232"/>
+            <a:ext cx="3063240" cy="329184"/>
+          </a:xfrm>
+          <a:prstGeom prst="rect">
+            <a:avLst/>
+          </a:prstGeom>
+          <a:noFill/>
+        </p:spPr>
+        <p:txBody>
+          <a:bodyPr wrap="square" lIns="45720" rIns="45720">
+            <a:spAutoFit/>
+          </a:bodyPr>
+          <a:lstStyle/>
+          <a:p>
+            <a:pPr algn="l">
+              <a:spcAft>
+                <a:spcPts val="600"/>
+              </a:spcAft>
+              <a:defRPr sz="1700" b="1">
+                <a:solidFill>
+                  <a:srgbClr val="F2F6FC"/>
+                </a:solidFill>
+                <a:latin typeface="Aptos"/>
+              </a:defRPr>
+            </a:pPr>
+            <a:r>
+              <a:t>Actual risk signal</a:t>
+            </a:r>
+          </a:p>
+        </p:txBody>
+      </p:sp>
+      <p:sp>
+        <p:nvSpPr>
+          <p:cNvPr id="9" name="TextBox 8"/>
+          <p:cNvSpPr txBox="1"/>
+          <p:nvPr/>
+        </p:nvSpPr>
+        <p:spPr>
+          <a:xfrm>
+            <a:off x="886968" y="2286000"/>
+            <a:ext cx="3044952" cy="2807208"/>
+          </a:xfrm>
+          <a:prstGeom prst="rect">
+            <a:avLst/>
+          </a:prstGeom>
+          <a:noFill/>
+        </p:spPr>
+        <p:txBody>
+          <a:bodyPr wrap="square" lIns="45720" rIns="45720">
+            <a:spAutoFit/>
+          </a:bodyPr>
+          <a:lstStyle/>
+          <a:p>
+            <a:pPr algn="l">
+              <a:spcAft>
+                <a:spcPts val="600"/>
+              </a:spcAft>
+              <a:defRPr sz="1400" b="0">
+                <a:solidFill>
+                  <a:srgbClr val="A5B1C2"/>
+                </a:solidFill>
+                <a:latin typeface="Aptos"/>
+              </a:defRPr>
+            </a:pPr>
+            <a:r>
+              <a:t>Choose a stored NLP signal filtered by impact threshold, time window, scope and event category.</a:t>
+            </a:r>
+          </a:p>
+          <a:p>
+            <a:pPr algn="l">
+              <a:spcAft>
+                <a:spcPts val="600"/>
+              </a:spcAft>
+              <a:defRPr sz="1400" b="0">
+                <a:solidFill>
+                  <a:srgbClr val="A5B1C2"/>
+                </a:solidFill>
+                <a:latin typeface="Aptos"/>
+              </a:defRPr>
+            </a:pPr>
+          </a:p>
+          <a:p>
+            <a:pPr algn="l">
+              <a:spcAft>
+                <a:spcPts val="600"/>
+              </a:spcAft>
+              <a:defRPr sz="1400" b="0">
+                <a:solidFill>
+                  <a:srgbClr val="A5B1C2"/>
+                </a:solidFill>
+                <a:latin typeface="Aptos"/>
+              </a:defRPr>
+            </a:pPr>
+            <a:r>
+              <a:t>Scenario labels are normalized to configuration keys before the shock is applied.</a:t>
+            </a:r>
+          </a:p>
+        </p:txBody>
+      </p:sp>
+      <p:sp>
+        <p:nvSpPr>
+          <p:cNvPr id="10" name="Rounded Rectangle 9"/>
           <p:cNvSpPr/>
           <p:nvPr/>
         </p:nvSpPr>
         <p:spPr>
           <a:xfrm>
-            <a:off x="731520" y="1783080"/>
-            <a:ext cx="73152" cy="2057400"/>
-          </a:xfrm>
-          <a:prstGeom prst="rect">
+            <a:off x="4389120" y="1691640"/>
+            <a:ext cx="3429000" cy="3520440"/>
+          </a:xfrm>
+          <a:prstGeom prst="roundRect">
             <a:avLst/>
           </a:prstGeom>
           <a:solidFill>
-            <a:srgbClr val="2463AA"/>
+            <a:srgbClr val="181F2A"/>
           </a:solidFill>
           <a:ln>
-            <a:noFill/>
+            <a:solidFill>
+              <a:srgbClr val="181F2A"/>
+            </a:solidFill>
           </a:ln>
         </p:spPr>
         <p:style>
@@ -7456,104 +8403,24 @@
       </p:sp>
       <p:sp>
         <p:nvSpPr>
-          <p:cNvPr id="10" name="TextBox 9"/>
-          <p:cNvSpPr txBox="1"/>
-          <p:nvPr/>
-        </p:nvSpPr>
-        <p:spPr>
-          <a:xfrm>
-            <a:off x="932688" y="1947672"/>
-            <a:ext cx="3017520" cy="384048"/>
-          </a:xfrm>
-          <a:prstGeom prst="rect">
-            <a:avLst/>
-          </a:prstGeom>
-          <a:noFill/>
-        </p:spPr>
-        <p:txBody>
-          <a:bodyPr wrap="square">
-            <a:spAutoFit/>
-          </a:bodyPr>
-          <a:lstStyle/>
-          <a:p>
-            <a:pPr>
-              <a:defRPr sz="1700" b="1">
-                <a:solidFill>
-                  <a:srgbClr val="14243E"/>
-                </a:solidFill>
-                <a:latin typeface="Aptos"/>
-              </a:defRPr>
-            </a:pPr>
-            <a:r>
-              <a:t>Synthetic portfolio</a:t>
-            </a:r>
-          </a:p>
-        </p:txBody>
-      </p:sp>
-      <p:sp>
-        <p:nvSpPr>
-          <p:cNvPr id="11" name="TextBox 10"/>
-          <p:cNvSpPr txBox="1"/>
-          <p:nvPr/>
-        </p:nvSpPr>
-        <p:spPr>
-          <a:xfrm>
-            <a:off x="932688" y="2441448"/>
-            <a:ext cx="3017520" cy="1325880"/>
-          </a:xfrm>
-          <a:prstGeom prst="rect">
-            <a:avLst/>
-          </a:prstGeom>
-          <a:noFill/>
-        </p:spPr>
-        <p:txBody>
-          <a:bodyPr wrap="square">
-            <a:spAutoFit/>
-          </a:bodyPr>
-          <a:lstStyle/>
-          <a:p>
-            <a:pPr>
-              <a:defRPr sz="1300" b="0">
-                <a:solidFill>
-                  <a:srgbClr val="2A3441"/>
-                </a:solidFill>
-                <a:latin typeface="Aptos"/>
-              </a:defRPr>
-            </a:pPr>
-            <a:r>
-              <a:t>Corporate and CRE loans</a:t>
-            </a:r>
-            <a:br/>
-            <a:r>
-              <a:t>Sovereign and corporate bonds</a:t>
-            </a:r>
-            <a:br/>
-            <a:r>
-              <a:t>Equity, rates, and FX derivatives</a:t>
-            </a:r>
-          </a:p>
-        </p:txBody>
-      </p:sp>
-      <p:sp>
-        <p:nvSpPr>
-          <p:cNvPr id="12" name="Rounded Rectangle 11"/>
+          <p:cNvPr id="11" name="Rectangle 10"/>
           <p:cNvSpPr/>
           <p:nvPr/>
         </p:nvSpPr>
         <p:spPr>
           <a:xfrm>
-            <a:off x="4389120" y="1783080"/>
-            <a:ext cx="3383280" cy="2057400"/>
-          </a:xfrm>
-          <a:prstGeom prst="roundRect">
+            <a:off x="4389120" y="1691640"/>
+            <a:ext cx="64008" cy="3520440"/>
+          </a:xfrm>
+          <a:prstGeom prst="rect">
             <a:avLst/>
           </a:prstGeom>
           <a:solidFill>
-            <a:srgbClr val="F2F6FA"/>
+            <a:srgbClr val="5DE0E6"/>
           </a:solidFill>
           <a:ln>
             <a:solidFill>
-              <a:srgbClr val="DEE6EF"/>
+              <a:srgbClr val="5DE0E6"/>
             </a:solidFill>
           </a:ln>
         </p:spPr>
@@ -7581,23 +8448,161 @@
       </p:sp>
       <p:sp>
         <p:nvSpPr>
-          <p:cNvPr id="13" name="Rectangle 12"/>
+          <p:cNvPr id="12" name="TextBox 11"/>
+          <p:cNvSpPr txBox="1"/>
+          <p:nvPr/>
+        </p:nvSpPr>
+        <p:spPr>
+          <a:xfrm>
+            <a:off x="4590288" y="1856232"/>
+            <a:ext cx="3063240" cy="329184"/>
+          </a:xfrm>
+          <a:prstGeom prst="rect">
+            <a:avLst/>
+          </a:prstGeom>
+          <a:noFill/>
+        </p:spPr>
+        <p:txBody>
+          <a:bodyPr wrap="square" lIns="45720" rIns="45720">
+            <a:spAutoFit/>
+          </a:bodyPr>
+          <a:lstStyle/>
+          <a:p>
+            <a:pPr algn="l">
+              <a:spcAft>
+                <a:spcPts val="600"/>
+              </a:spcAft>
+              <a:defRPr sz="1700" b="1">
+                <a:solidFill>
+                  <a:srgbClr val="F2F6FC"/>
+                </a:solidFill>
+                <a:latin typeface="Aptos"/>
+              </a:defRPr>
+            </a:pPr>
+            <a:r>
+              <a:t>Synthetic portfolio</a:t>
+            </a:r>
+          </a:p>
+        </p:txBody>
+      </p:sp>
+      <p:sp>
+        <p:nvSpPr>
+          <p:cNvPr id="13" name="TextBox 12"/>
+          <p:cNvSpPr txBox="1"/>
+          <p:nvPr/>
+        </p:nvSpPr>
+        <p:spPr>
+          <a:xfrm>
+            <a:off x="4590288" y="2286000"/>
+            <a:ext cx="3044952" cy="2807208"/>
+          </a:xfrm>
+          <a:prstGeom prst="rect">
+            <a:avLst/>
+          </a:prstGeom>
+          <a:noFill/>
+        </p:spPr>
+        <p:txBody>
+          <a:bodyPr wrap="square" lIns="45720" rIns="45720">
+            <a:spAutoFit/>
+          </a:bodyPr>
+          <a:lstStyle/>
+          <a:p>
+            <a:pPr algn="l">
+              <a:spcAft>
+                <a:spcPts val="600"/>
+              </a:spcAft>
+              <a:defRPr sz="1400" b="0">
+                <a:solidFill>
+                  <a:srgbClr val="A5B1C2"/>
+                </a:solidFill>
+                <a:latin typeface="Aptos"/>
+              </a:defRPr>
+            </a:pPr>
+            <a:r>
+              <a:t>7 illustrative assets across loans, bonds and derivatives.</a:t>
+            </a:r>
+          </a:p>
+          <a:p>
+            <a:pPr algn="l">
+              <a:spcAft>
+                <a:spcPts val="600"/>
+              </a:spcAft>
+              <a:defRPr sz="1400" b="0">
+                <a:solidFill>
+                  <a:srgbClr val="A5B1C2"/>
+                </a:solidFill>
+                <a:latin typeface="Aptos"/>
+              </a:defRPr>
+            </a:pPr>
+          </a:p>
+          <a:p>
+            <a:pPr algn="l">
+              <a:spcAft>
+                <a:spcPts val="600"/>
+              </a:spcAft>
+              <a:defRPr sz="1400" b="0">
+                <a:solidFill>
+                  <a:srgbClr val="A5B1C2"/>
+                </a:solidFill>
+                <a:latin typeface="Aptos"/>
+              </a:defRPr>
+            </a:pPr>
+            <a:r>
+              <a:t>Initial value shown in the dashboard: $86.25M.</a:t>
+            </a:r>
+          </a:p>
+          <a:p>
+            <a:pPr algn="l">
+              <a:spcAft>
+                <a:spcPts val="600"/>
+              </a:spcAft>
+              <a:defRPr sz="1400" b="0">
+                <a:solidFill>
+                  <a:srgbClr val="A5B1C2"/>
+                </a:solidFill>
+                <a:latin typeface="Aptos"/>
+              </a:defRPr>
+            </a:pPr>
+          </a:p>
+          <a:p>
+            <a:pPr algn="l">
+              <a:spcAft>
+                <a:spcPts val="600"/>
+              </a:spcAft>
+              <a:defRPr sz="1400" b="0">
+                <a:solidFill>
+                  <a:srgbClr val="A5B1C2"/>
+                </a:solidFill>
+                <a:latin typeface="Aptos"/>
+              </a:defRPr>
+            </a:pPr>
+            <a:r>
+              <a:t>Shock sizes are deterministic assumptions in config/stress_scenarios.yaml.</a:t>
+            </a:r>
+          </a:p>
+        </p:txBody>
+      </p:sp>
+      <p:sp>
+        <p:nvSpPr>
+          <p:cNvPr id="14" name="Rounded Rectangle 13"/>
           <p:cNvSpPr/>
           <p:nvPr/>
         </p:nvSpPr>
         <p:spPr>
           <a:xfrm>
-            <a:off x="4389120" y="1783080"/>
-            <a:ext cx="73152" cy="2057400"/>
-          </a:xfrm>
-          <a:prstGeom prst="rect">
+            <a:off x="8092440" y="1691640"/>
+            <a:ext cx="3429000" cy="3520440"/>
+          </a:xfrm>
+          <a:prstGeom prst="roundRect">
             <a:avLst/>
           </a:prstGeom>
           <a:solidFill>
-            <a:srgbClr val="168F88"/>
+            <a:srgbClr val="181F2A"/>
           </a:solidFill>
           <a:ln>
-            <a:noFill/>
+            <a:solidFill>
+              <a:srgbClr val="181F2A"/>
+            </a:solidFill>
           </a:ln>
         </p:spPr>
         <p:style>
@@ -7624,96 +8629,24 @@
       </p:sp>
       <p:sp>
         <p:nvSpPr>
-          <p:cNvPr id="14" name="TextBox 13"/>
-          <p:cNvSpPr txBox="1"/>
-          <p:nvPr/>
-        </p:nvSpPr>
-        <p:spPr>
-          <a:xfrm>
-            <a:off x="4590288" y="1947672"/>
-            <a:ext cx="3017520" cy="384048"/>
-          </a:xfrm>
-          <a:prstGeom prst="rect">
-            <a:avLst/>
-          </a:prstGeom>
-          <a:noFill/>
-        </p:spPr>
-        <p:txBody>
-          <a:bodyPr wrap="square">
-            <a:spAutoFit/>
-          </a:bodyPr>
-          <a:lstStyle/>
-          <a:p>
-            <a:pPr>
-              <a:defRPr sz="1700" b="1">
-                <a:solidFill>
-                  <a:srgbClr val="14243E"/>
-                </a:solidFill>
-                <a:latin typeface="Aptos"/>
-              </a:defRPr>
-            </a:pPr>
-            <a:r>
-              <a:t>Trigger</a:t>
-            </a:r>
-          </a:p>
-        </p:txBody>
-      </p:sp>
-      <p:sp>
-        <p:nvSpPr>
-          <p:cNvPr id="15" name="TextBox 14"/>
-          <p:cNvSpPr txBox="1"/>
-          <p:nvPr/>
-        </p:nvSpPr>
-        <p:spPr>
-          <a:xfrm>
-            <a:off x="4590288" y="2441448"/>
-            <a:ext cx="3017520" cy="1325880"/>
-          </a:xfrm>
-          <a:prstGeom prst="rect">
-            <a:avLst/>
-          </a:prstGeom>
-          <a:noFill/>
-        </p:spPr>
-        <p:txBody>
-          <a:bodyPr wrap="square">
-            <a:spAutoFit/>
-          </a:bodyPr>
-          <a:lstStyle/>
-          <a:p>
-            <a:pPr>
-              <a:defRPr sz="1300" b="0">
-                <a:solidFill>
-                  <a:srgbClr val="2A3441"/>
-                </a:solidFill>
-                <a:latin typeface="Aptos"/>
-              </a:defRPr>
-            </a:pPr>
-            <a:r>
-              <a:t>High-impact signal (default ≥ 7/10) selects a scenario by event type from config/stress_scenarios.yaml.</a:t>
-            </a:r>
-          </a:p>
-        </p:txBody>
-      </p:sp>
-      <p:sp>
-        <p:nvSpPr>
-          <p:cNvPr id="16" name="Rounded Rectangle 15"/>
+          <p:cNvPr id="15" name="Rectangle 14"/>
           <p:cNvSpPr/>
           <p:nvPr/>
         </p:nvSpPr>
         <p:spPr>
           <a:xfrm>
-            <a:off x="8046720" y="1783080"/>
-            <a:ext cx="3383280" cy="2057400"/>
-          </a:xfrm>
-          <a:prstGeom prst="roundRect">
+            <a:off x="8092440" y="1691640"/>
+            <a:ext cx="64008" cy="3520440"/>
+          </a:xfrm>
+          <a:prstGeom prst="rect">
             <a:avLst/>
           </a:prstGeom>
           <a:solidFill>
-            <a:srgbClr val="F2F6FA"/>
+            <a:srgbClr val="FF7575"/>
           </a:solidFill>
           <a:ln>
             <a:solidFill>
-              <a:srgbClr val="DEE6EF"/>
+              <a:srgbClr val="FF7575"/>
             </a:solidFill>
           </a:ln>
         </p:spPr>
@@ -7741,44 +8674,166 @@
       </p:sp>
       <p:sp>
         <p:nvSpPr>
-          <p:cNvPr id="17" name="Rectangle 16"/>
-          <p:cNvSpPr/>
-          <p:nvPr/>
-        </p:nvSpPr>
-        <p:spPr>
-          <a:xfrm>
-            <a:off x="8046720" y="1783080"/>
-            <a:ext cx="73152" cy="2057400"/>
-          </a:xfrm>
-          <a:prstGeom prst="rect">
-            <a:avLst/>
-          </a:prstGeom>
-          <a:solidFill>
-            <a:srgbClr val="C67E20"/>
-          </a:solidFill>
-          <a:ln>
-            <a:noFill/>
-          </a:ln>
-        </p:spPr>
-        <p:style>
-          <a:lnRef idx="1">
-            <a:schemeClr val="accent1"/>
-          </a:lnRef>
-          <a:fillRef idx="3">
-            <a:schemeClr val="accent1"/>
-          </a:fillRef>
-          <a:effectRef idx="2">
-            <a:schemeClr val="accent1"/>
-          </a:effectRef>
-          <a:fontRef idx="minor">
-            <a:schemeClr val="lt1"/>
-          </a:fontRef>
-        </p:style>
-        <p:txBody>
-          <a:bodyPr rtlCol="0" anchor="ctr"/>
-          <a:lstStyle/>
-          <a:p>
-            <a:pPr algn="ctr"/>
+          <p:cNvPr id="16" name="TextBox 15"/>
+          <p:cNvSpPr txBox="1"/>
+          <p:nvPr/>
+        </p:nvSpPr>
+        <p:spPr>
+          <a:xfrm>
+            <a:off x="8293608" y="1856232"/>
+            <a:ext cx="3063240" cy="329184"/>
+          </a:xfrm>
+          <a:prstGeom prst="rect">
+            <a:avLst/>
+          </a:prstGeom>
+          <a:noFill/>
+        </p:spPr>
+        <p:txBody>
+          <a:bodyPr wrap="square" lIns="45720" rIns="45720">
+            <a:spAutoFit/>
+          </a:bodyPr>
+          <a:lstStyle/>
+          <a:p>
+            <a:pPr algn="l">
+              <a:spcAft>
+                <a:spcPts val="600"/>
+              </a:spcAft>
+              <a:defRPr sz="1700" b="1">
+                <a:solidFill>
+                  <a:srgbClr val="F2F6FC"/>
+                </a:solidFill>
+                <a:latin typeface="Aptos"/>
+              </a:defRPr>
+            </a:pPr>
+            <a:r>
+              <a:t>Observed example</a:t>
+            </a:r>
+          </a:p>
+        </p:txBody>
+      </p:sp>
+      <p:sp>
+        <p:nvSpPr>
+          <p:cNvPr id="17" name="TextBox 16"/>
+          <p:cNvSpPr txBox="1"/>
+          <p:nvPr/>
+        </p:nvSpPr>
+        <p:spPr>
+          <a:xfrm>
+            <a:off x="8293608" y="2286000"/>
+            <a:ext cx="3044952" cy="2807208"/>
+          </a:xfrm>
+          <a:prstGeom prst="rect">
+            <a:avLst/>
+          </a:prstGeom>
+          <a:noFill/>
+        </p:spPr>
+        <p:txBody>
+          <a:bodyPr wrap="square" lIns="45720" rIns="45720">
+            <a:spAutoFit/>
+          </a:bodyPr>
+          <a:lstStyle/>
+          <a:p>
+            <a:pPr algn="l">
+              <a:spcAft>
+                <a:spcPts val="600"/>
+              </a:spcAft>
+              <a:defRPr sz="1400" b="0">
+                <a:solidFill>
+                  <a:srgbClr val="A5B1C2"/>
+                </a:solidFill>
+                <a:latin typeface="Aptos"/>
+              </a:defRPr>
+            </a:pPr>
+            <a:r>
+              <a:t>Before shock: $86.25M</a:t>
+            </a:r>
+          </a:p>
+          <a:p>
+            <a:pPr algn="l">
+              <a:spcAft>
+                <a:spcPts val="600"/>
+              </a:spcAft>
+              <a:defRPr sz="1400" b="0">
+                <a:solidFill>
+                  <a:srgbClr val="A5B1C2"/>
+                </a:solidFill>
+                <a:latin typeface="Aptos"/>
+              </a:defRPr>
+            </a:pPr>
+          </a:p>
+          <a:p>
+            <a:pPr algn="l">
+              <a:spcAft>
+                <a:spcPts val="600"/>
+              </a:spcAft>
+              <a:defRPr sz="1400" b="0">
+                <a:solidFill>
+                  <a:srgbClr val="A5B1C2"/>
+                </a:solidFill>
+                <a:latin typeface="Aptos"/>
+              </a:defRPr>
+            </a:pPr>
+            <a:r>
+              <a:t>After shock: about $76.09M</a:t>
+            </a:r>
+          </a:p>
+          <a:p>
+            <a:pPr algn="l">
+              <a:spcAft>
+                <a:spcPts val="600"/>
+              </a:spcAft>
+              <a:defRPr sz="1400" b="0">
+                <a:solidFill>
+                  <a:srgbClr val="A5B1C2"/>
+                </a:solidFill>
+                <a:latin typeface="Aptos"/>
+              </a:defRPr>
+            </a:pPr>
+          </a:p>
+          <a:p>
+            <a:pPr algn="l">
+              <a:spcAft>
+                <a:spcPts val="600"/>
+              </a:spcAft>
+              <a:defRPr sz="1400" b="0">
+                <a:solidFill>
+                  <a:srgbClr val="A5B1C2"/>
+                </a:solidFill>
+                <a:latin typeface="Aptos"/>
+              </a:defRPr>
+            </a:pPr>
+            <a:r>
+              <a:t>Illustrative P&amp;L: about −$10.16M.</a:t>
+            </a:r>
+          </a:p>
+          <a:p>
+            <a:pPr algn="l">
+              <a:spcAft>
+                <a:spcPts val="600"/>
+              </a:spcAft>
+              <a:defRPr sz="1400" b="0">
+                <a:solidFill>
+                  <a:srgbClr val="A5B1C2"/>
+                </a:solidFill>
+                <a:latin typeface="Aptos"/>
+              </a:defRPr>
+            </a:pPr>
+          </a:p>
+          <a:p>
+            <a:pPr algn="l">
+              <a:spcAft>
+                <a:spcPts val="600"/>
+              </a:spcAft>
+              <a:defRPr sz="1400" b="0">
+                <a:solidFill>
+                  <a:srgbClr val="A5B1C2"/>
+                </a:solidFill>
+                <a:latin typeface="Aptos"/>
+              </a:defRPr>
+            </a:pPr>
+            <a:r>
+              <a:t>Exact result depends on selected signal and resolved scenario.</a:t>
+            </a:r>
           </a:p>
         </p:txBody>
       </p:sp>
@@ -7790,8 +8845,8 @@
         </p:nvSpPr>
         <p:spPr>
           <a:xfrm>
-            <a:off x="8247888" y="1947672"/>
-            <a:ext cx="3017520" cy="384048"/>
+            <a:off x="822960" y="5669280"/>
+            <a:ext cx="10607040" cy="365760"/>
           </a:xfrm>
           <a:prstGeom prst="rect">
             <a:avLst/>
@@ -7799,141 +8854,24 @@
           <a:noFill/>
         </p:spPr>
         <p:txBody>
-          <a:bodyPr wrap="square">
+          <a:bodyPr wrap="square" lIns="45720" rIns="45720">
             <a:spAutoFit/>
           </a:bodyPr>
           <a:lstStyle/>
           <a:p>
-            <a:pPr>
-              <a:defRPr sz="1700" b="1">
-                <a:solidFill>
-                  <a:srgbClr val="14243E"/>
-                </a:solidFill>
-                <a:latin typeface="Aptos"/>
-              </a:defRPr>
-            </a:pPr>
-            <a:r>
-              <a:t>Valuation</a:t>
-            </a:r>
-          </a:p>
-        </p:txBody>
-      </p:sp>
-      <p:sp>
-        <p:nvSpPr>
-          <p:cNvPr id="19" name="TextBox 18"/>
-          <p:cNvSpPr txBox="1"/>
-          <p:nvPr/>
-        </p:nvSpPr>
-        <p:spPr>
-          <a:xfrm>
-            <a:off x="8247888" y="2441448"/>
-            <a:ext cx="3017520" cy="1325880"/>
-          </a:xfrm>
-          <a:prstGeom prst="rect">
-            <a:avLst/>
-          </a:prstGeom>
-          <a:noFill/>
-        </p:spPr>
-        <p:txBody>
-          <a:bodyPr wrap="square">
-            <a:spAutoFit/>
-          </a:bodyPr>
-          <a:lstStyle/>
-          <a:p>
-            <a:pPr>
+            <a:pPr algn="ctr">
+              <a:spcAft>
+                <a:spcPts val="600"/>
+              </a:spcAft>
               <a:defRPr sz="1300" b="0">
                 <a:solidFill>
-                  <a:srgbClr val="2A3441"/>
-                </a:solidFill>
-                <a:latin typeface="Aptos"/>
-              </a:defRPr>
-            </a:pPr>
-            <a:r>
-              <a:t>Portfolio before value</a:t>
-            </a:r>
-            <a:br/>
-            <a:r>
-              <a:t>Scenario P&amp;L</a:t>
-            </a:r>
-            <a:br/>
-            <a:r>
-              <a:t>Portfolio after value</a:t>
-            </a:r>
-            <a:br/>
-            <a:r>
-              <a:t>Asset-level P&amp;L contributions</a:t>
-            </a:r>
-          </a:p>
-        </p:txBody>
-      </p:sp>
-      <p:sp>
-        <p:nvSpPr>
-          <p:cNvPr id="20" name="TextBox 19"/>
-          <p:cNvSpPr txBox="1"/>
-          <p:nvPr/>
-        </p:nvSpPr>
-        <p:spPr>
-          <a:xfrm>
-            <a:off x="822960" y="4389120"/>
-            <a:ext cx="10607040" cy="502920"/>
-          </a:xfrm>
-          <a:prstGeom prst="rect">
-            <a:avLst/>
-          </a:prstGeom>
-          <a:noFill/>
-        </p:spPr>
-        <p:txBody>
-          <a:bodyPr wrap="square">
-            <a:spAutoFit/>
-          </a:bodyPr>
-          <a:lstStyle/>
-          <a:p>
-            <a:pPr>
-              <a:defRPr sz="1500" b="1">
-                <a:solidFill>
-                  <a:srgbClr val="C67E20"/>
-                </a:solidFill>
-                <a:latin typeface="Aptos"/>
-              </a:defRPr>
-            </a:pPr>
-            <a:r>
-              <a:t>INSERT A REAL RUN SCREENSHOT / VALUE AFTER RUNNING: python -m scripts.run_stress_test --threshold 7</a:t>
-            </a:r>
-          </a:p>
-        </p:txBody>
-      </p:sp>
-      <p:sp>
-        <p:nvSpPr>
-          <p:cNvPr id="21" name="TextBox 20"/>
-          <p:cNvSpPr txBox="1"/>
-          <p:nvPr/>
-        </p:nvSpPr>
-        <p:spPr>
-          <a:xfrm>
-            <a:off x="822960" y="5029200"/>
-            <a:ext cx="10515600" cy="777240"/>
-          </a:xfrm>
-          <a:prstGeom prst="rect">
-            <a:avLst/>
-          </a:prstGeom>
-          <a:noFill/>
-        </p:spPr>
-        <p:txBody>
-          <a:bodyPr wrap="square">
-            <a:spAutoFit/>
-          </a:bodyPr>
-          <a:lstStyle/>
-          <a:p>
-            <a:pPr>
-              <a:defRPr sz="1600" b="0">
-                <a:solidFill>
-                  <a:srgbClr val="2A3441"/>
-                </a:solidFill>
-                <a:latin typeface="Aptos"/>
-              </a:defRPr>
-            </a:pPr>
-            <a:r>
-              <a:t>Shocks and portfolio are synthetic, deterministic illustrations—not a production banking risk model.</a:t>
+                  <a:srgbClr val="A5B1C2"/>
+                </a:solidFill>
+                <a:latin typeface="Aptos"/>
+              </a:defRPr>
+            </a:pPr>
+            <a:r>
+              <a:t>Simplified sensitivities only; this is not a production banking risk model.</a:t>
             </a:r>
           </a:p>
         </p:txBody>
@@ -7952,7 +8890,7 @@
     <p:bg>
       <p:bgPr>
         <a:solidFill>
-          <a:srgbClr val="FFFFFF"/>
+          <a:srgbClr val="0D1117"/>
         </a:solidFill>
         <a:effectLst/>
       </p:bgPr>
@@ -7966,23 +8904,103 @@
       <p:grpSpPr/>
       <p:sp>
         <p:nvSpPr>
-          <p:cNvPr id="2" name="Rectangle 1"/>
+          <p:cNvPr id="2" name="TextBox 1"/>
+          <p:cNvSpPr txBox="1"/>
+          <p:nvPr/>
+        </p:nvSpPr>
+        <p:spPr>
+          <a:xfrm>
+            <a:off x="594360" y="320040"/>
+            <a:ext cx="9875520" cy="228600"/>
+          </a:xfrm>
+          <a:prstGeom prst="rect">
+            <a:avLst/>
+          </a:prstGeom>
+          <a:noFill/>
+        </p:spPr>
+        <p:txBody>
+          <a:bodyPr wrap="square" lIns="45720" rIns="45720">
+            <a:spAutoFit/>
+          </a:bodyPr>
+          <a:lstStyle/>
+          <a:p>
+            <a:pPr algn="l">
+              <a:spcAft>
+                <a:spcPts val="600"/>
+              </a:spcAft>
+              <a:defRPr sz="1000" b="1">
+                <a:solidFill>
+                  <a:srgbClr val="5DE0E6"/>
+                </a:solidFill>
+                <a:latin typeface="Aptos"/>
+              </a:defRPr>
+            </a:pPr>
+            <a:r>
+              <a:t>06 / IMPACT &amp; LIMITATIONS</a:t>
+            </a:r>
+          </a:p>
+        </p:txBody>
+      </p:sp>
+      <p:sp>
+        <p:nvSpPr>
+          <p:cNvPr id="3" name="TextBox 2"/>
+          <p:cNvSpPr txBox="1"/>
+          <p:nvPr/>
+        </p:nvSpPr>
+        <p:spPr>
+          <a:xfrm>
+            <a:off x="594360" y="658368"/>
+            <a:ext cx="10972800" cy="566928"/>
+          </a:xfrm>
+          <a:prstGeom prst="rect">
+            <a:avLst/>
+          </a:prstGeom>
+          <a:noFill/>
+        </p:spPr>
+        <p:txBody>
+          <a:bodyPr wrap="square" lIns="45720" rIns="45720">
+            <a:spAutoFit/>
+          </a:bodyPr>
+          <a:lstStyle/>
+          <a:p>
+            <a:pPr algn="l">
+              <a:spcAft>
+                <a:spcPts val="600"/>
+              </a:spcAft>
+              <a:defRPr sz="2700" b="1">
+                <a:solidFill>
+                  <a:srgbClr val="F2F6FC"/>
+                </a:solidFill>
+                <a:latin typeface="Aptos"/>
+              </a:defRPr>
+            </a:pPr>
+            <a:r>
+              <a:t>Demonstration value, caveats and next steps</a:t>
+            </a:r>
+          </a:p>
+        </p:txBody>
+      </p:sp>
+      <p:sp>
+        <p:nvSpPr>
+          <p:cNvPr id="4" name="Rectangle 3"/>
           <p:cNvSpPr/>
           <p:nvPr/>
         </p:nvSpPr>
         <p:spPr>
           <a:xfrm>
-            <a:off x="0" y="0"/>
-            <a:ext cx="12191695" cy="146304"/>
+            <a:off x="594360" y="1307592"/>
+            <a:ext cx="960120" cy="50292"/>
           </a:xfrm>
           <a:prstGeom prst="rect">
             <a:avLst/>
           </a:prstGeom>
           <a:solidFill>
-            <a:srgbClr val="168F88"/>
+            <a:srgbClr val="63B3ED"/>
           </a:solidFill>
           <a:ln>
-            <a:noFill/>
+            <a:solidFill>
+              <a:srgbClr val="63B3ED"/>
+            </a:solidFill>
           </a:ln>
         </p:spPr>
         <p:style>
@@ -8009,14 +9027,14 @@
       </p:sp>
       <p:sp>
         <p:nvSpPr>
-          <p:cNvPr id="3" name="TextBox 2"/>
+          <p:cNvPr id="5" name="TextBox 4"/>
           <p:cNvSpPr txBox="1"/>
           <p:nvPr/>
         </p:nvSpPr>
         <p:spPr>
           <a:xfrm>
-            <a:off x="594360" y="384048"/>
-            <a:ext cx="10972800" cy="256032"/>
+            <a:off x="11155680" y="6473952"/>
+            <a:ext cx="457200" cy="182880"/>
           </a:xfrm>
           <a:prstGeom prst="rect">
             <a:avLst/>
@@ -8024,80 +9042,49 @@
           <a:noFill/>
         </p:spPr>
         <p:txBody>
-          <a:bodyPr wrap="square">
+          <a:bodyPr wrap="square" lIns="45720" rIns="45720">
             <a:spAutoFit/>
           </a:bodyPr>
           <a:lstStyle/>
           <a:p>
-            <a:pPr>
-              <a:defRPr sz="1100" b="1">
-                <a:solidFill>
-                  <a:srgbClr val="168F88"/>
-                </a:solidFill>
-                <a:latin typeface="Aptos"/>
-              </a:defRPr>
-            </a:pPr>
-            <a:r>
-              <a:t>06 / SUBMISSION READINESS</a:t>
-            </a:r>
-          </a:p>
-        </p:txBody>
-      </p:sp>
-      <p:sp>
-        <p:nvSpPr>
-          <p:cNvPr id="4" name="TextBox 3"/>
-          <p:cNvSpPr txBox="1"/>
-          <p:nvPr/>
-        </p:nvSpPr>
-        <p:spPr>
-          <a:xfrm>
-            <a:off x="594360" y="713232"/>
-            <a:ext cx="10972800" cy="594360"/>
-          </a:xfrm>
-          <a:prstGeom prst="rect">
-            <a:avLst/>
-          </a:prstGeom>
-          <a:noFill/>
-        </p:spPr>
-        <p:txBody>
-          <a:bodyPr wrap="square">
-            <a:spAutoFit/>
-          </a:bodyPr>
-          <a:lstStyle/>
-          <a:p>
-            <a:pPr>
-              <a:defRPr sz="3000" b="1">
-                <a:solidFill>
-                  <a:srgbClr val="14243E"/>
-                </a:solidFill>
-                <a:latin typeface="Aptos"/>
-              </a:defRPr>
-            </a:pPr>
-            <a:r>
-              <a:t>Results, impact &amp; limitations</a:t>
-            </a:r>
-          </a:p>
-        </p:txBody>
-      </p:sp>
-      <p:sp>
-        <p:nvSpPr>
-          <p:cNvPr id="5" name="Rectangle 4"/>
+            <a:pPr algn="r">
+              <a:spcAft>
+                <a:spcPts val="600"/>
+              </a:spcAft>
+              <a:defRPr sz="1000" b="0">
+                <a:solidFill>
+                  <a:srgbClr val="A5B1C2"/>
+                </a:solidFill>
+                <a:latin typeface="Aptos"/>
+              </a:defRPr>
+            </a:pPr>
+            <a:r>
+              <a:t>7/7</a:t>
+            </a:r>
+          </a:p>
+        </p:txBody>
+      </p:sp>
+      <p:sp>
+        <p:nvSpPr>
+          <p:cNvPr id="6" name="Rounded Rectangle 5"/>
           <p:cNvSpPr/>
           <p:nvPr/>
         </p:nvSpPr>
         <p:spPr>
           <a:xfrm>
-            <a:off x="594360" y="1399032"/>
-            <a:ext cx="1005840" cy="50292"/>
-          </a:xfrm>
-          <a:prstGeom prst="rect">
+            <a:off x="685800" y="1691640"/>
+            <a:ext cx="3429000" cy="3566160"/>
+          </a:xfrm>
+          <a:prstGeom prst="roundRect">
             <a:avLst/>
           </a:prstGeom>
           <a:solidFill>
-            <a:srgbClr val="2463AA"/>
+            <a:srgbClr val="181F2A"/>
           </a:solidFill>
           <a:ln>
-            <a:noFill/>
+            <a:solidFill>
+              <a:srgbClr val="181F2A"/>
+            </a:solidFill>
           </a:ln>
         </p:spPr>
         <p:style>
@@ -8124,96 +9111,24 @@
       </p:sp>
       <p:sp>
         <p:nvSpPr>
-          <p:cNvPr id="6" name="TextBox 5"/>
-          <p:cNvSpPr txBox="1"/>
-          <p:nvPr/>
-        </p:nvSpPr>
-        <p:spPr>
-          <a:xfrm>
-            <a:off x="594360" y="6510528"/>
-            <a:ext cx="10058400" cy="182880"/>
-          </a:xfrm>
-          <a:prstGeom prst="rect">
-            <a:avLst/>
-          </a:prstGeom>
-          <a:noFill/>
-        </p:spPr>
-        <p:txBody>
-          <a:bodyPr wrap="square">
-            <a:spAutoFit/>
-          </a:bodyPr>
-          <a:lstStyle/>
-          <a:p>
-            <a:pPr>
-              <a:defRPr sz="800" b="1">
-                <a:solidFill>
-                  <a:srgbClr val="5F6C7B"/>
-                </a:solidFill>
-                <a:latin typeface="Aptos"/>
-              </a:defRPr>
-            </a:pPr>
-            <a:r>
-              <a:t>CODE TO CONNECT  •  S&amp;P GLOBAL &amp; CRISIL CAMPUS HACKATHON</a:t>
-            </a:r>
-          </a:p>
-        </p:txBody>
-      </p:sp>
-      <p:sp>
-        <p:nvSpPr>
-          <p:cNvPr id="7" name="TextBox 6"/>
-          <p:cNvSpPr txBox="1"/>
-          <p:nvPr/>
-        </p:nvSpPr>
-        <p:spPr>
-          <a:xfrm>
-            <a:off x="10972800" y="6473952"/>
-            <a:ext cx="594360" cy="228600"/>
-          </a:xfrm>
-          <a:prstGeom prst="rect">
-            <a:avLst/>
-          </a:prstGeom>
-          <a:noFill/>
-        </p:spPr>
-        <p:txBody>
-          <a:bodyPr wrap="square">
-            <a:spAutoFit/>
-          </a:bodyPr>
-          <a:lstStyle/>
-          <a:p>
-            <a:pPr>
-              <a:defRPr sz="900" b="0">
-                <a:solidFill>
-                  <a:srgbClr val="5F6C7B"/>
-                </a:solidFill>
-                <a:latin typeface="Aptos"/>
-              </a:defRPr>
-            </a:pPr>
-            <a:r>
-              <a:t>7</a:t>
-            </a:r>
-          </a:p>
-        </p:txBody>
-      </p:sp>
-      <p:sp>
-        <p:nvSpPr>
-          <p:cNvPr id="8" name="Rounded Rectangle 7"/>
+          <p:cNvPr id="7" name="Rectangle 6"/>
           <p:cNvSpPr/>
           <p:nvPr/>
         </p:nvSpPr>
         <p:spPr>
           <a:xfrm>
-            <a:off x="731520" y="1737360"/>
-            <a:ext cx="3383280" cy="1965960"/>
-          </a:xfrm>
-          <a:prstGeom prst="roundRect">
+            <a:off x="685800" y="1691640"/>
+            <a:ext cx="64008" cy="3566160"/>
+          </a:xfrm>
+          <a:prstGeom prst="rect">
             <a:avLst/>
           </a:prstGeom>
           <a:solidFill>
-            <a:srgbClr val="F2F6FA"/>
+            <a:srgbClr val="6FDCAA"/>
           </a:solidFill>
           <a:ln>
             <a:solidFill>
-              <a:srgbClr val="DEE6EF"/>
+              <a:srgbClr val="6FDCAA"/>
             </a:solidFill>
           </a:ln>
         </p:spPr>
@@ -8241,23 +9156,151 @@
       </p:sp>
       <p:sp>
         <p:nvSpPr>
-          <p:cNvPr id="9" name="Rectangle 8"/>
+          <p:cNvPr id="8" name="TextBox 7"/>
+          <p:cNvSpPr txBox="1"/>
+          <p:nvPr/>
+        </p:nvSpPr>
+        <p:spPr>
+          <a:xfrm>
+            <a:off x="886968" y="1856232"/>
+            <a:ext cx="3063240" cy="329184"/>
+          </a:xfrm>
+          <a:prstGeom prst="rect">
+            <a:avLst/>
+          </a:prstGeom>
+          <a:noFill/>
+        </p:spPr>
+        <p:txBody>
+          <a:bodyPr wrap="square" lIns="45720" rIns="45720">
+            <a:spAutoFit/>
+          </a:bodyPr>
+          <a:lstStyle/>
+          <a:p>
+            <a:pPr algn="l">
+              <a:spcAft>
+                <a:spcPts val="600"/>
+              </a:spcAft>
+              <a:defRPr sz="1700" b="1">
+                <a:solidFill>
+                  <a:srgbClr val="F2F6FC"/>
+                </a:solidFill>
+                <a:latin typeface="Aptos"/>
+              </a:defRPr>
+            </a:pPr>
+            <a:r>
+              <a:t>Domain impact</a:t>
+            </a:r>
+          </a:p>
+        </p:txBody>
+      </p:sp>
+      <p:sp>
+        <p:nvSpPr>
+          <p:cNvPr id="9" name="TextBox 8"/>
+          <p:cNvSpPr txBox="1"/>
+          <p:nvPr/>
+        </p:nvSpPr>
+        <p:spPr>
+          <a:xfrm>
+            <a:off x="886968" y="2286000"/>
+            <a:ext cx="3044952" cy="2852928"/>
+          </a:xfrm>
+          <a:prstGeom prst="rect">
+            <a:avLst/>
+          </a:prstGeom>
+          <a:noFill/>
+        </p:spPr>
+        <p:txBody>
+          <a:bodyPr wrap="square" lIns="45720" rIns="45720">
+            <a:spAutoFit/>
+          </a:bodyPr>
+          <a:lstStyle/>
+          <a:p>
+            <a:pPr algn="l">
+              <a:spcAft>
+                <a:spcPts val="600"/>
+              </a:spcAft>
+              <a:defRPr sz="1400" b="0">
+                <a:solidFill>
+                  <a:srgbClr val="A5B1C2"/>
+                </a:solidFill>
+                <a:latin typeface="Aptos"/>
+              </a:defRPr>
+            </a:pPr>
+            <a:r>
+              <a:t>• Converts text into reusable structured risk signals.</a:t>
+            </a:r>
+          </a:p>
+          <a:p>
+            <a:pPr algn="l">
+              <a:spcAft>
+                <a:spcPts val="600"/>
+              </a:spcAft>
+              <a:defRPr sz="1400" b="0">
+                <a:solidFill>
+                  <a:srgbClr val="A5B1C2"/>
+                </a:solidFill>
+                <a:latin typeface="Aptos"/>
+              </a:defRPr>
+            </a:pPr>
+            <a:r>
+              <a:t>• Makes company sentiment available to a portfolio allocation simulation.</a:t>
+            </a:r>
+          </a:p>
+          <a:p>
+            <a:pPr algn="l">
+              <a:spcAft>
+                <a:spcPts val="600"/>
+              </a:spcAft>
+              <a:defRPr sz="1400" b="0">
+                <a:solidFill>
+                  <a:srgbClr val="A5B1C2"/>
+                </a:solidFill>
+                <a:latin typeface="Aptos"/>
+              </a:defRPr>
+            </a:pPr>
+            <a:r>
+              <a:t>• Connects high-impact events to transparent portfolio stress scenarios.</a:t>
+            </a:r>
+          </a:p>
+          <a:p>
+            <a:pPr algn="l">
+              <a:spcAft>
+                <a:spcPts val="600"/>
+              </a:spcAft>
+              <a:defRPr sz="1400" b="0">
+                <a:solidFill>
+                  <a:srgbClr val="A5B1C2"/>
+                </a:solidFill>
+                <a:latin typeface="Aptos"/>
+              </a:defRPr>
+            </a:pPr>
+            <a:r>
+              <a:t>• Provides inspectable charts and downloadable results.</a:t>
+            </a:r>
+          </a:p>
+        </p:txBody>
+      </p:sp>
+      <p:sp>
+        <p:nvSpPr>
+          <p:cNvPr id="10" name="Rounded Rectangle 9"/>
           <p:cNvSpPr/>
           <p:nvPr/>
         </p:nvSpPr>
         <p:spPr>
           <a:xfrm>
-            <a:off x="731520" y="1737360"/>
-            <a:ext cx="73152" cy="1965960"/>
-          </a:xfrm>
-          <a:prstGeom prst="rect">
+            <a:off x="4389120" y="1691640"/>
+            <a:ext cx="3429000" cy="3566160"/>
+          </a:xfrm>
+          <a:prstGeom prst="roundRect">
             <a:avLst/>
           </a:prstGeom>
           <a:solidFill>
-            <a:srgbClr val="168F88"/>
+            <a:srgbClr val="181F2A"/>
           </a:solidFill>
           <a:ln>
-            <a:noFill/>
+            <a:solidFill>
+              <a:srgbClr val="181F2A"/>
+            </a:solidFill>
           </a:ln>
         </p:spPr>
         <p:style>
@@ -8284,96 +9327,24 @@
       </p:sp>
       <p:sp>
         <p:nvSpPr>
-          <p:cNvPr id="10" name="TextBox 9"/>
-          <p:cNvSpPr txBox="1"/>
-          <p:nvPr/>
-        </p:nvSpPr>
-        <p:spPr>
-          <a:xfrm>
-            <a:off x="932688" y="1901952"/>
-            <a:ext cx="3017520" cy="384048"/>
-          </a:xfrm>
-          <a:prstGeom prst="rect">
-            <a:avLst/>
-          </a:prstGeom>
-          <a:noFill/>
-        </p:spPr>
-        <p:txBody>
-          <a:bodyPr wrap="square">
-            <a:spAutoFit/>
-          </a:bodyPr>
-          <a:lstStyle/>
-          <a:p>
-            <a:pPr>
-              <a:defRPr sz="1700" b="1">
-                <a:solidFill>
-                  <a:srgbClr val="14243E"/>
-                </a:solidFill>
-                <a:latin typeface="Aptos"/>
-              </a:defRPr>
-            </a:pPr>
-            <a:r>
-              <a:t>Demo</a:t>
-            </a:r>
-          </a:p>
-        </p:txBody>
-      </p:sp>
-      <p:sp>
-        <p:nvSpPr>
-          <p:cNvPr id="11" name="TextBox 10"/>
-          <p:cNvSpPr txBox="1"/>
-          <p:nvPr/>
-        </p:nvSpPr>
-        <p:spPr>
-          <a:xfrm>
-            <a:off x="932688" y="2395728"/>
-            <a:ext cx="3017520" cy="1234439"/>
-          </a:xfrm>
-          <a:prstGeom prst="rect">
-            <a:avLst/>
-          </a:prstGeom>
-          <a:noFill/>
-        </p:spPr>
-        <p:txBody>
-          <a:bodyPr wrap="square">
-            <a:spAutoFit/>
-          </a:bodyPr>
-          <a:lstStyle/>
-          <a:p>
-            <a:pPr>
-              <a:defRPr sz="1300" b="0">
-                <a:solidFill>
-                  <a:srgbClr val="2A3441"/>
-                </a:solidFill>
-                <a:latin typeface="Aptos"/>
-              </a:defRPr>
-            </a:pPr>
-            <a:r>
-              <a:t>One Streamlit command launches Risk Engine feed, Index Rebalancer, and Stress Tester pages.</a:t>
-            </a:r>
-          </a:p>
-        </p:txBody>
-      </p:sp>
-      <p:sp>
-        <p:nvSpPr>
-          <p:cNvPr id="12" name="Rounded Rectangle 11"/>
+          <p:cNvPr id="11" name="Rectangle 10"/>
           <p:cNvSpPr/>
           <p:nvPr/>
         </p:nvSpPr>
         <p:spPr>
           <a:xfrm>
-            <a:off x="4389120" y="1737360"/>
-            <a:ext cx="3383280" cy="1965960"/>
-          </a:xfrm>
-          <a:prstGeom prst="roundRect">
+            <a:off x="4389120" y="1691640"/>
+            <a:ext cx="64008" cy="3566160"/>
+          </a:xfrm>
+          <a:prstGeom prst="rect">
             <a:avLst/>
           </a:prstGeom>
           <a:solidFill>
-            <a:srgbClr val="F2F6FA"/>
+            <a:srgbClr val="FFBE5C"/>
           </a:solidFill>
           <a:ln>
             <a:solidFill>
-              <a:srgbClr val="DEE6EF"/>
+              <a:srgbClr val="FFBE5C"/>
             </a:solidFill>
           </a:ln>
         </p:spPr>
@@ -8401,23 +9372,167 @@
       </p:sp>
       <p:sp>
         <p:nvSpPr>
-          <p:cNvPr id="13" name="Rectangle 12"/>
+          <p:cNvPr id="12" name="TextBox 11"/>
+          <p:cNvSpPr txBox="1"/>
+          <p:nvPr/>
+        </p:nvSpPr>
+        <p:spPr>
+          <a:xfrm>
+            <a:off x="4590288" y="1856232"/>
+            <a:ext cx="3063240" cy="329184"/>
+          </a:xfrm>
+          <a:prstGeom prst="rect">
+            <a:avLst/>
+          </a:prstGeom>
+          <a:noFill/>
+        </p:spPr>
+        <p:txBody>
+          <a:bodyPr wrap="square" lIns="45720" rIns="45720">
+            <a:spAutoFit/>
+          </a:bodyPr>
+          <a:lstStyle/>
+          <a:p>
+            <a:pPr algn="l">
+              <a:spcAft>
+                <a:spcPts val="600"/>
+              </a:spcAft>
+              <a:defRPr sz="1700" b="1">
+                <a:solidFill>
+                  <a:srgbClr val="F2F6FC"/>
+                </a:solidFill>
+                <a:latin typeface="Aptos"/>
+              </a:defRPr>
+            </a:pPr>
+            <a:r>
+              <a:t>Limitations</a:t>
+            </a:r>
+          </a:p>
+        </p:txBody>
+      </p:sp>
+      <p:sp>
+        <p:nvSpPr>
+          <p:cNvPr id="13" name="TextBox 12"/>
+          <p:cNvSpPr txBox="1"/>
+          <p:nvPr/>
+        </p:nvSpPr>
+        <p:spPr>
+          <a:xfrm>
+            <a:off x="4590288" y="2286000"/>
+            <a:ext cx="3044952" cy="2852928"/>
+          </a:xfrm>
+          <a:prstGeom prst="rect">
+            <a:avLst/>
+          </a:prstGeom>
+          <a:noFill/>
+        </p:spPr>
+        <p:txBody>
+          <a:bodyPr wrap="square" lIns="45720" rIns="45720">
+            <a:spAutoFit/>
+          </a:bodyPr>
+          <a:lstStyle/>
+          <a:p>
+            <a:pPr algn="l">
+              <a:spcAft>
+                <a:spcPts val="600"/>
+              </a:spcAft>
+              <a:defRPr sz="1400" b="0">
+                <a:solidFill>
+                  <a:srgbClr val="A5B1C2"/>
+                </a:solidFill>
+                <a:latin typeface="Aptos"/>
+              </a:defRPr>
+            </a:pPr>
+            <a:r>
+              <a:t>• Historical daily prices, not intraday execution.</a:t>
+            </a:r>
+          </a:p>
+          <a:p>
+            <a:pPr algn="l">
+              <a:spcAft>
+                <a:spcPts val="600"/>
+              </a:spcAft>
+              <a:defRPr sz="1400" b="0">
+                <a:solidFill>
+                  <a:srgbClr val="A5B1C2"/>
+                </a:solidFill>
+                <a:latin typeface="Aptos"/>
+              </a:defRPr>
+            </a:pPr>
+            <a:r>
+              <a:t>• No transaction costs.</a:t>
+            </a:r>
+          </a:p>
+          <a:p>
+            <a:pPr algn="l">
+              <a:spcAft>
+                <a:spcPts val="600"/>
+              </a:spcAft>
+              <a:defRPr sz="1400" b="0">
+                <a:solidFill>
+                  <a:srgbClr val="A5B1C2"/>
+                </a:solidFill>
+                <a:latin typeface="Aptos"/>
+              </a:defRPr>
+            </a:pPr>
+            <a:r>
+              <a:t>• Synthetic portfolio and simplified duration / derivative sensitivities.</a:t>
+            </a:r>
+          </a:p>
+          <a:p>
+            <a:pPr algn="l">
+              <a:spcAft>
+                <a:spcPts val="600"/>
+              </a:spcAft>
+              <a:defRPr sz="1400" b="0">
+                <a:solidFill>
+                  <a:srgbClr val="A5B1C2"/>
+                </a:solidFill>
+                <a:latin typeface="Aptos"/>
+              </a:defRPr>
+            </a:pPr>
+            <a:r>
+              <a:t>• Source licensing and model availability must be verified.</a:t>
+            </a:r>
+          </a:p>
+          <a:p>
+            <a:pPr algn="l">
+              <a:spcAft>
+                <a:spcPts val="600"/>
+              </a:spcAft>
+              <a:defRPr sz="1400" b="0">
+                <a:solidFill>
+                  <a:srgbClr val="A5B1C2"/>
+                </a:solidFill>
+                <a:latin typeface="Aptos"/>
+              </a:defRPr>
+            </a:pPr>
+            <a:r>
+              <a:t>• Impact calibration is exploratory, not a return forecast.</a:t>
+            </a:r>
+          </a:p>
+        </p:txBody>
+      </p:sp>
+      <p:sp>
+        <p:nvSpPr>
+          <p:cNvPr id="14" name="Rounded Rectangle 13"/>
           <p:cNvSpPr/>
           <p:nvPr/>
         </p:nvSpPr>
         <p:spPr>
           <a:xfrm>
-            <a:off x="4389120" y="1737360"/>
-            <a:ext cx="73152" cy="1965960"/>
-          </a:xfrm>
-          <a:prstGeom prst="rect">
+            <a:off x="8092440" y="1691640"/>
+            <a:ext cx="3429000" cy="3566160"/>
+          </a:xfrm>
+          <a:prstGeom prst="roundRect">
             <a:avLst/>
           </a:prstGeom>
           <a:solidFill>
-            <a:srgbClr val="2463AA"/>
+            <a:srgbClr val="181F2A"/>
           </a:solidFill>
           <a:ln>
-            <a:noFill/>
+            <a:solidFill>
+              <a:srgbClr val="181F2A"/>
+            </a:solidFill>
           </a:ln>
         </p:spPr>
         <p:style>
@@ -8444,96 +9559,24 @@
       </p:sp>
       <p:sp>
         <p:nvSpPr>
-          <p:cNvPr id="14" name="TextBox 13"/>
-          <p:cNvSpPr txBox="1"/>
-          <p:nvPr/>
-        </p:nvSpPr>
-        <p:spPr>
-          <a:xfrm>
-            <a:off x="4590288" y="1901952"/>
-            <a:ext cx="3017520" cy="384048"/>
-          </a:xfrm>
-          <a:prstGeom prst="rect">
-            <a:avLst/>
-          </a:prstGeom>
-          <a:noFill/>
-        </p:spPr>
-        <p:txBody>
-          <a:bodyPr wrap="square">
-            <a:spAutoFit/>
-          </a:bodyPr>
-          <a:lstStyle/>
-          <a:p>
-            <a:pPr>
-              <a:defRPr sz="1700" b="1">
-                <a:solidFill>
-                  <a:srgbClr val="14243E"/>
-                </a:solidFill>
-                <a:latin typeface="Aptos"/>
-              </a:defRPr>
-            </a:pPr>
-            <a:r>
-              <a:t>Evidence</a:t>
-            </a:r>
-          </a:p>
-        </p:txBody>
-      </p:sp>
-      <p:sp>
-        <p:nvSpPr>
-          <p:cNvPr id="15" name="TextBox 14"/>
-          <p:cNvSpPr txBox="1"/>
-          <p:nvPr/>
-        </p:nvSpPr>
-        <p:spPr>
-          <a:xfrm>
-            <a:off x="4590288" y="2395728"/>
-            <a:ext cx="3017520" cy="1234439"/>
-          </a:xfrm>
-          <a:prstGeom prst="rect">
-            <a:avLst/>
-          </a:prstGeom>
-          <a:noFill/>
-        </p:spPr>
-        <p:txBody>
-          <a:bodyPr wrap="square">
-            <a:spAutoFit/>
-          </a:bodyPr>
-          <a:lstStyle/>
-          <a:p>
-            <a:pPr>
-              <a:defRPr sz="1300" b="0">
-                <a:solidFill>
-                  <a:srgbClr val="2A3441"/>
-                </a:solidFill>
-                <a:latin typeface="Aptos"/>
-              </a:defRPr>
-            </a:pPr>
-            <a:r>
-              <a:t>Capture the actual backtest comparison, before/after stress valuation, final test count, and dashboard screenshots.</a:t>
-            </a:r>
-          </a:p>
-        </p:txBody>
-      </p:sp>
-      <p:sp>
-        <p:nvSpPr>
-          <p:cNvPr id="16" name="Rounded Rectangle 15"/>
+          <p:cNvPr id="15" name="Rectangle 14"/>
           <p:cNvSpPr/>
           <p:nvPr/>
         </p:nvSpPr>
         <p:spPr>
           <a:xfrm>
-            <a:off x="8046720" y="1737360"/>
-            <a:ext cx="3383280" cy="1965960"/>
-          </a:xfrm>
-          <a:prstGeom prst="roundRect">
+            <a:off x="8092440" y="1691640"/>
+            <a:ext cx="64008" cy="3566160"/>
+          </a:xfrm>
+          <a:prstGeom prst="rect">
             <a:avLst/>
           </a:prstGeom>
           <a:solidFill>
-            <a:srgbClr val="F2F6FA"/>
+            <a:srgbClr val="63B3ED"/>
           </a:solidFill>
           <a:ln>
             <a:solidFill>
-              <a:srgbClr val="DEE6EF"/>
+              <a:srgbClr val="63B3ED"/>
             </a:solidFill>
           </a:ln>
         </p:spPr>
@@ -8561,44 +9604,143 @@
       </p:sp>
       <p:sp>
         <p:nvSpPr>
-          <p:cNvPr id="17" name="Rectangle 16"/>
-          <p:cNvSpPr/>
-          <p:nvPr/>
-        </p:nvSpPr>
-        <p:spPr>
-          <a:xfrm>
-            <a:off x="8046720" y="1737360"/>
-            <a:ext cx="73152" cy="1965960"/>
-          </a:xfrm>
-          <a:prstGeom prst="rect">
-            <a:avLst/>
-          </a:prstGeom>
-          <a:solidFill>
-            <a:srgbClr val="C67E20"/>
-          </a:solidFill>
-          <a:ln>
-            <a:noFill/>
-          </a:ln>
-        </p:spPr>
-        <p:style>
-          <a:lnRef idx="1">
-            <a:schemeClr val="accent1"/>
-          </a:lnRef>
-          <a:fillRef idx="3">
-            <a:schemeClr val="accent1"/>
-          </a:fillRef>
-          <a:effectRef idx="2">
-            <a:schemeClr val="accent1"/>
-          </a:effectRef>
-          <a:fontRef idx="minor">
-            <a:schemeClr val="lt1"/>
-          </a:fontRef>
-        </p:style>
-        <p:txBody>
-          <a:bodyPr rtlCol="0" anchor="ctr"/>
-          <a:lstStyle/>
-          <a:p>
-            <a:pPr algn="ctr"/>
+          <p:cNvPr id="16" name="TextBox 15"/>
+          <p:cNvSpPr txBox="1"/>
+          <p:nvPr/>
+        </p:nvSpPr>
+        <p:spPr>
+          <a:xfrm>
+            <a:off x="8293608" y="1856232"/>
+            <a:ext cx="3063240" cy="329184"/>
+          </a:xfrm>
+          <a:prstGeom prst="rect">
+            <a:avLst/>
+          </a:prstGeom>
+          <a:noFill/>
+        </p:spPr>
+        <p:txBody>
+          <a:bodyPr wrap="square" lIns="45720" rIns="45720">
+            <a:spAutoFit/>
+          </a:bodyPr>
+          <a:lstStyle/>
+          <a:p>
+            <a:pPr algn="l">
+              <a:spcAft>
+                <a:spcPts val="600"/>
+              </a:spcAft>
+              <a:defRPr sz="1700" b="1">
+                <a:solidFill>
+                  <a:srgbClr val="F2F6FC"/>
+                </a:solidFill>
+                <a:latin typeface="Aptos"/>
+              </a:defRPr>
+            </a:pPr>
+            <a:r>
+              <a:t>Final checks</a:t>
+            </a:r>
+          </a:p>
+        </p:txBody>
+      </p:sp>
+      <p:sp>
+        <p:nvSpPr>
+          <p:cNvPr id="17" name="TextBox 16"/>
+          <p:cNvSpPr txBox="1"/>
+          <p:nvPr/>
+        </p:nvSpPr>
+        <p:spPr>
+          <a:xfrm>
+            <a:off x="8293608" y="2286000"/>
+            <a:ext cx="3044952" cy="2852928"/>
+          </a:xfrm>
+          <a:prstGeom prst="rect">
+            <a:avLst/>
+          </a:prstGeom>
+          <a:noFill/>
+        </p:spPr>
+        <p:txBody>
+          <a:bodyPr wrap="square" lIns="45720" rIns="45720">
+            <a:spAutoFit/>
+          </a:bodyPr>
+          <a:lstStyle/>
+          <a:p>
+            <a:pPr algn="l">
+              <a:spcAft>
+                <a:spcPts val="600"/>
+              </a:spcAft>
+              <a:defRPr sz="1400" b="0">
+                <a:solidFill>
+                  <a:srgbClr val="A5B1C2"/>
+                </a:solidFill>
+                <a:latin typeface="Aptos"/>
+              </a:defRPr>
+            </a:pPr>
+            <a:r>
+              <a:t>• Run the full pytest suite in a clean environment.</a:t>
+            </a:r>
+          </a:p>
+          <a:p>
+            <a:pPr algn="l">
+              <a:spcAft>
+                <a:spcPts val="600"/>
+              </a:spcAft>
+              <a:defRPr sz="1400" b="0">
+                <a:solidFill>
+                  <a:srgbClr val="A5B1C2"/>
+                </a:solidFill>
+                <a:latin typeface="Aptos"/>
+              </a:defRPr>
+            </a:pPr>
+            <a:r>
+              <a:t>• Refresh result figures from final outputs.</a:t>
+            </a:r>
+          </a:p>
+          <a:p>
+            <a:pPr algn="l">
+              <a:spcAft>
+                <a:spcPts val="600"/>
+              </a:spcAft>
+              <a:defRPr sz="1400" b="0">
+                <a:solidFill>
+                  <a:srgbClr val="A5B1C2"/>
+                </a:solidFill>
+                <a:latin typeface="Aptos"/>
+              </a:defRPr>
+            </a:pPr>
+            <a:r>
+              <a:t>• Include README, architecture and 5–7 slide deck in the public repo.</a:t>
+            </a:r>
+          </a:p>
+          <a:p>
+            <a:pPr algn="l">
+              <a:spcAft>
+                <a:spcPts val="600"/>
+              </a:spcAft>
+              <a:defRPr sz="1400" b="0">
+                <a:solidFill>
+                  <a:srgbClr val="A5B1C2"/>
+                </a:solidFill>
+                <a:latin typeface="Aptos"/>
+              </a:defRPr>
+            </a:pPr>
+            <a:r>
+              <a:t>• Record a demo of up to 10 minutes.</a:t>
+            </a:r>
+          </a:p>
+          <a:p>
+            <a:pPr algn="l">
+              <a:spcAft>
+                <a:spcPts val="600"/>
+              </a:spcAft>
+              <a:defRPr sz="1400" b="0">
+                <a:solidFill>
+                  <a:srgbClr val="A5B1C2"/>
+                </a:solidFill>
+                <a:latin typeface="Aptos"/>
+              </a:defRPr>
+            </a:pPr>
+            <a:r>
+              <a:t>• Test repository and video links in incognito.</a:t>
+            </a:r>
           </a:p>
         </p:txBody>
       </p:sp>
@@ -8610,8 +9752,8 @@
         </p:nvSpPr>
         <p:spPr>
           <a:xfrm>
-            <a:off x="8247888" y="1901952"/>
-            <a:ext cx="3017520" cy="384048"/>
+            <a:off x="868680" y="5715000"/>
+            <a:ext cx="10424160" cy="274320"/>
           </a:xfrm>
           <a:prstGeom prst="rect">
             <a:avLst/>
@@ -8619,128 +9761,24 @@
           <a:noFill/>
         </p:spPr>
         <p:txBody>
-          <a:bodyPr wrap="square">
+          <a:bodyPr wrap="square" lIns="45720" rIns="45720">
             <a:spAutoFit/>
           </a:bodyPr>
           <a:lstStyle/>
           <a:p>
-            <a:pPr>
-              <a:defRPr sz="1700" b="1">
-                <a:solidFill>
-                  <a:srgbClr val="14243E"/>
-                </a:solidFill>
-                <a:latin typeface="Aptos"/>
-              </a:defRPr>
-            </a:pPr>
-            <a:r>
-              <a:t>Limitations</a:t>
-            </a:r>
-          </a:p>
-        </p:txBody>
-      </p:sp>
-      <p:sp>
-        <p:nvSpPr>
-          <p:cNvPr id="19" name="TextBox 18"/>
-          <p:cNvSpPr txBox="1"/>
-          <p:nvPr/>
-        </p:nvSpPr>
-        <p:spPr>
-          <a:xfrm>
-            <a:off x="8247888" y="2395728"/>
-            <a:ext cx="3017520" cy="1234439"/>
-          </a:xfrm>
-          <a:prstGeom prst="rect">
-            <a:avLst/>
-          </a:prstGeom>
-          <a:noFill/>
-        </p:spPr>
-        <p:txBody>
-          <a:bodyPr wrap="square">
-            <a:spAutoFit/>
-          </a:bodyPr>
-          <a:lstStyle/>
-          <a:p>
-            <a:pPr>
-              <a:defRPr sz="1300" b="0">
-                <a:solidFill>
-                  <a:srgbClr val="2A3441"/>
-                </a:solidFill>
-                <a:latin typeface="Aptos"/>
-              </a:defRPr>
-            </a:pPr>
-            <a:r>
-              <a:t>Daily close data; no transaction costs; synthetic portfolio; simplified shock sensitivities; learned impact remains experimental.</a:t>
-            </a:r>
-          </a:p>
-        </p:txBody>
-      </p:sp>
-      <p:sp>
-        <p:nvSpPr>
-          <p:cNvPr id="20" name="TextBox 19"/>
-          <p:cNvSpPr txBox="1"/>
-          <p:nvPr/>
-        </p:nvSpPr>
-        <p:spPr>
-          <a:xfrm>
-            <a:off x="822960" y="4160520"/>
-            <a:ext cx="10607040" cy="1463040"/>
-          </a:xfrm>
-          <a:prstGeom prst="rect">
-            <a:avLst/>
-          </a:prstGeom>
-          <a:noFill/>
-        </p:spPr>
-        <p:txBody>
-          <a:bodyPr wrap="square">
-            <a:spAutoFit/>
-          </a:bodyPr>
-          <a:lstStyle/>
-          <a:p>
-            <a:pPr>
-              <a:spcAft>
-                <a:spcPts val="1700"/>
-              </a:spcAft>
-              <a:defRPr sz="1700">
-                <a:solidFill>
-                  <a:srgbClr val="2A3441"/>
-                </a:solidFill>
-                <a:latin typeface="Aptos"/>
-              </a:defRPr>
-            </a:pPr>
-            <a:r>
-              <a:t>•  Run the full test suite in a fresh environment.</a:t>
-            </a:r>
-          </a:p>
-          <a:p>
-            <a:pPr>
-              <a:spcAft>
-                <a:spcPts val="1700"/>
-              </a:spcAft>
-              <a:defRPr sz="1700">
-                <a:solidFill>
-                  <a:srgbClr val="2A3441"/>
-                </a:solidFill>
-                <a:latin typeface="Aptos"/>
-              </a:defRPr>
-            </a:pPr>
-            <a:r>
-              <a:t>•  Polish README, architecture diagram, source/data notes, and Quickstart.</a:t>
-            </a:r>
-          </a:p>
-          <a:p>
-            <a:pPr>
-              <a:spcAft>
-                <a:spcPts val="1700"/>
-              </a:spcAft>
-              <a:defRPr sz="1700">
-                <a:solidFill>
-                  <a:srgbClr val="2A3441"/>
-                </a:solidFill>
-                <a:latin typeface="Aptos"/>
-              </a:defRPr>
-            </a:pPr>
-            <a:r>
-              <a:t>•  Record the walkthrough; test repository, deck, and video links in an incognito/signed-out browser.</a:t>
+            <a:pPr algn="ctr">
+              <a:spcAft>
+                <a:spcPts val="600"/>
+              </a:spcAft>
+              <a:defRPr sz="1200" b="0">
+                <a:solidFill>
+                  <a:srgbClr val="A5B1C2"/>
+                </a:solidFill>
+                <a:latin typeface="Aptos"/>
+              </a:defRPr>
+            </a:pPr>
+            <a:r>
+              <a:t>Candidate: Aniket Sonawane  •  ABV-IIITM Gwalior</a:t>
             </a:r>
           </a:p>
         </p:txBody>
